--- a/Slides/2025-2026/Slides/Statistiek 2025-2026 -- college 5b -- centrale limietstelling.pptx
+++ b/Slides/2025-2026/Slides/Statistiek 2025-2026 -- college 5b -- centrale limietstelling.pptx
@@ -6,10 +6,10 @@
     <p:sldMasterId id="2147483686" r:id="rId2"/>
   </p:sldMasterIdLst>
   <p:notesMasterIdLst>
-    <p:notesMasterId r:id="rId26"/>
+    <p:notesMasterId r:id="rId29"/>
   </p:notesMasterIdLst>
   <p:handoutMasterIdLst>
-    <p:handoutMasterId r:id="rId27"/>
+    <p:handoutMasterId r:id="rId30"/>
   </p:handoutMasterIdLst>
   <p:sldIdLst>
     <p:sldId id="291" r:id="rId3"/>
@@ -19,22 +19,25 @@
     <p:sldId id="293" r:id="rId7"/>
     <p:sldId id="294" r:id="rId8"/>
     <p:sldId id="295" r:id="rId9"/>
-    <p:sldId id="259" r:id="rId10"/>
-    <p:sldId id="278" r:id="rId11"/>
-    <p:sldId id="292" r:id="rId12"/>
-    <p:sldId id="271" r:id="rId13"/>
-    <p:sldId id="287" r:id="rId14"/>
-    <p:sldId id="272" r:id="rId15"/>
-    <p:sldId id="288" r:id="rId16"/>
-    <p:sldId id="297" r:id="rId17"/>
-    <p:sldId id="273" r:id="rId18"/>
-    <p:sldId id="289" r:id="rId19"/>
-    <p:sldId id="298" r:id="rId20"/>
-    <p:sldId id="281" r:id="rId21"/>
-    <p:sldId id="282" r:id="rId22"/>
-    <p:sldId id="283" r:id="rId23"/>
-    <p:sldId id="285" r:id="rId24"/>
-    <p:sldId id="290" r:id="rId25"/>
+    <p:sldId id="300" r:id="rId10"/>
+    <p:sldId id="259" r:id="rId11"/>
+    <p:sldId id="278" r:id="rId12"/>
+    <p:sldId id="292" r:id="rId13"/>
+    <p:sldId id="271" r:id="rId14"/>
+    <p:sldId id="287" r:id="rId15"/>
+    <p:sldId id="272" r:id="rId16"/>
+    <p:sldId id="288" r:id="rId17"/>
+    <p:sldId id="297" r:id="rId18"/>
+    <p:sldId id="273" r:id="rId19"/>
+    <p:sldId id="289" r:id="rId20"/>
+    <p:sldId id="298" r:id="rId21"/>
+    <p:sldId id="281" r:id="rId22"/>
+    <p:sldId id="302" r:id="rId23"/>
+    <p:sldId id="282" r:id="rId24"/>
+    <p:sldId id="283" r:id="rId25"/>
+    <p:sldId id="285" r:id="rId26"/>
+    <p:sldId id="301" r:id="rId27"/>
+    <p:sldId id="290" r:id="rId28"/>
   </p:sldIdLst>
   <p:sldSz cx="12192000" cy="6858000"/>
   <p:notesSz cx="6921500" cy="9423400"/>
@@ -1651,6 +1654,130 @@
     <p:extLst>
       <p:ext uri="{BB962C8B-B14F-4D97-AF65-F5344CB8AC3E}">
         <p14:creationId xmlns:p14="http://schemas.microsoft.com/office/powerpoint/2010/main" val="3824561717"/>
+      </p:ext>
+    </p:extLst>
+  </p:cSld>
+  <p:clrMapOvr>
+    <a:masterClrMapping/>
+  </p:clrMapOvr>
+</p:notes>
+</file>
+
+<file path=ppt/notesSlides/notesSlide5.xml><?xml version="1.0" encoding="utf-8"?>
+<p:notes xmlns:a="http://schemas.openxmlformats.org/drawingml/2006/main" xmlns:r="http://schemas.openxmlformats.org/officeDocument/2006/relationships" xmlns:p="http://schemas.openxmlformats.org/presentationml/2006/main">
+  <p:cSld>
+    <p:spTree>
+      <p:nvGrpSpPr>
+        <p:cNvPr id="1" name=""/>
+        <p:cNvGrpSpPr/>
+        <p:nvPr/>
+      </p:nvGrpSpPr>
+      <p:grpSpPr>
+        <a:xfrm>
+          <a:off x="0" y="0"/>
+          <a:ext cx="0" cy="0"/>
+          <a:chOff x="0" y="0"/>
+          <a:chExt cx="0" cy="0"/>
+        </a:xfrm>
+      </p:grpSpPr>
+      <p:sp>
+        <p:nvSpPr>
+          <p:cNvPr id="2" name="Tijdelijke aanduiding voor dia-afbeelding 1"/>
+          <p:cNvSpPr>
+            <a:spLocks noGrp="1" noRot="1" noChangeAspect="1"/>
+          </p:cNvSpPr>
+          <p:nvPr>
+            <p:ph type="sldImg"/>
+          </p:nvPr>
+        </p:nvSpPr>
+        <p:spPr/>
+      </p:sp>
+      <p:sp>
+        <p:nvSpPr>
+          <p:cNvPr id="3" name="Tijdelijke aanduiding voor notities 2"/>
+          <p:cNvSpPr>
+            <a:spLocks noGrp="1"/>
+          </p:cNvSpPr>
+          <p:nvPr>
+            <p:ph type="body" idx="1"/>
+          </p:nvPr>
+        </p:nvSpPr>
+        <p:spPr/>
+        <p:txBody>
+          <a:bodyPr/>
+          <a:lstStyle/>
+          <a:p>
+            <a:r>
+              <a:rPr lang="nl-NL" dirty="0" smtClean="0"/>
+              <a:t>Vraag: wat betekent</a:t>
+            </a:r>
+            <a:r>
+              <a:rPr lang="nl-NL" baseline="0" dirty="0" smtClean="0"/>
+              <a:t> het dat de standaardafwijking van de som een factor wortel n heeft (grotere spreiding bij grotere steekproeven!)? En bij het gemiddelde gedeeld door wortel n (kleinere spreiding bij grotere steekproeven!)?</a:t>
+            </a:r>
+            <a:endParaRPr lang="nl-NL" dirty="0"/>
+          </a:p>
+        </p:txBody>
+      </p:sp>
+      <p:sp>
+        <p:nvSpPr>
+          <p:cNvPr id="4" name="Tijdelijke aanduiding voor voettekst 3"/>
+          <p:cNvSpPr>
+            <a:spLocks noGrp="1"/>
+          </p:cNvSpPr>
+          <p:nvPr>
+            <p:ph type="ftr" sz="quarter" idx="10"/>
+          </p:nvPr>
+        </p:nvSpPr>
+        <p:spPr/>
+        <p:txBody>
+          <a:bodyPr/>
+          <a:lstStyle/>
+          <a:p>
+            <a:pPr>
+              <a:defRPr/>
+            </a:pPr>
+            <a:r>
+              <a:rPr lang="en-US" smtClean="0"/>
+              <a:t>Eventuele voettekst</a:t>
+            </a:r>
+            <a:endParaRPr lang="en-US" dirty="0"/>
+          </a:p>
+        </p:txBody>
+      </p:sp>
+      <p:sp>
+        <p:nvSpPr>
+          <p:cNvPr id="5" name="Tijdelijke aanduiding voor dianummer 4"/>
+          <p:cNvSpPr>
+            <a:spLocks noGrp="1"/>
+          </p:cNvSpPr>
+          <p:nvPr>
+            <p:ph type="sldNum" sz="quarter" idx="11"/>
+          </p:nvPr>
+        </p:nvSpPr>
+        <p:spPr/>
+        <p:txBody>
+          <a:bodyPr/>
+          <a:lstStyle/>
+          <a:p>
+            <a:pPr>
+              <a:defRPr/>
+            </a:pPr>
+            <a:fld id="{9FC98DC9-4F28-4B39-8B6E-408133FC7853}" type="slidenum">
+              <a:rPr lang="en-US" smtClean="0"/>
+              <a:pPr>
+                <a:defRPr/>
+              </a:pPr>
+              <a:t>8</a:t>
+            </a:fld>
+            <a:endParaRPr lang="en-US" dirty="0"/>
+          </a:p>
+        </p:txBody>
+      </p:sp>
+    </p:spTree>
+    <p:extLst>
+      <p:ext uri="{BB962C8B-B14F-4D97-AF65-F5344CB8AC3E}">
+        <p14:creationId xmlns:p14="http://schemas.microsoft.com/office/powerpoint/2010/main" val="2589415171"/>
       </p:ext>
     </p:extLst>
   </p:cSld>
@@ -8281,751 +8408,48 @@
             <p:ph type="title"/>
           </p:nvPr>
         </p:nvSpPr>
-        <p:spPr>
-          <a:xfrm>
-            <a:off x="814917" y="1265241"/>
-            <a:ext cx="10363200" cy="800219"/>
-          </a:xfrm>
-        </p:spPr>
+        <p:spPr/>
         <p:txBody>
           <a:bodyPr/>
           <a:lstStyle/>
           <a:p>
-            <a:r>
-              <a:rPr lang="en-US" b="1" dirty="0" err="1"/>
-              <a:t>Waarom</a:t>
-            </a:r>
-            <a:r>
-              <a:rPr lang="en-US" b="1" dirty="0"/>
-              <a:t> is de </a:t>
-            </a:r>
-            <a:r>
-              <a:rPr lang="en-US" b="1" dirty="0" err="1"/>
+            <a:pPr eaLnBrk="1" hangingPunct="1"/>
+            <a:r>
+              <a:rPr lang="en-US" dirty="0" err="1" smtClean="0"/>
+              <a:t>Visuele</a:t>
+            </a:r>
+            <a:r>
+              <a:rPr lang="en-US" dirty="0" smtClean="0"/>
+              <a:t> </a:t>
+            </a:r>
+            <a:r>
+              <a:rPr lang="en-US" dirty="0" err="1" smtClean="0"/>
+              <a:t>simulatie</a:t>
+            </a:r>
+            <a:r>
+              <a:rPr lang="en-US" dirty="0"/>
+              <a:t> </a:t>
+            </a:r>
+            <a:r>
+              <a:rPr lang="en-US" dirty="0" smtClean="0"/>
+              <a:t>van de </a:t>
+            </a:r>
+            <a:r>
+              <a:rPr lang="en-US" dirty="0" err="1" smtClean="0"/>
               <a:t>centrale</a:t>
             </a:r>
             <a:r>
-              <a:rPr lang="en-US" b="1" dirty="0"/>
+              <a:rPr lang="en-US" dirty="0" smtClean="0"/>
               <a:t> </a:t>
             </a:r>
             <a:r>
-              <a:rPr lang="en-US" b="1" dirty="0" err="1"/>
+              <a:rPr lang="en-US" dirty="0" err="1" smtClean="0"/>
               <a:t>limietstelling</a:t>
             </a:r>
-            <a:r>
-              <a:rPr lang="en-US" b="1" dirty="0"/>
-              <a:t> (CLS) zo </a:t>
-            </a:r>
-            <a:r>
-              <a:rPr lang="en-US" b="1" dirty="0" err="1"/>
-              <a:t>krachtig</a:t>
-            </a:r>
-            <a:r>
-              <a:rPr lang="en-US" b="1" dirty="0"/>
-              <a:t>?</a:t>
-            </a:r>
-            <a:br>
-              <a:rPr lang="en-US" b="1" dirty="0"/>
-            </a:br>
             <a:endParaRPr lang="nl-NL" dirty="0" smtClean="0"/>
           </a:p>
         </p:txBody>
       </p:sp>
-      <mc:AlternateContent xmlns:mc="http://schemas.openxmlformats.org/markup-compatibility/2006">
-        <mc:Choice xmlns:a14="http://schemas.microsoft.com/office/drawing/2010/main" Requires="a14">
-          <p:sp>
-            <p:nvSpPr>
-              <p:cNvPr id="6147" name="Content Placeholder 2"/>
-              <p:cNvSpPr>
-                <a:spLocks noGrp="1"/>
-              </p:cNvSpPr>
-              <p:nvPr>
-                <p:ph idx="1"/>
-              </p:nvPr>
-            </p:nvSpPr>
-            <p:spPr>
-              <a:xfrm>
-                <a:off x="812800" y="1773238"/>
-                <a:ext cx="10827816" cy="4246562"/>
-              </a:xfrm>
-            </p:spPr>
-            <p:txBody>
-              <a:bodyPr/>
-              <a:lstStyle/>
-              <a:p>
-                <a:pPr marL="342900" indent="-342900" eaLnBrk="1" hangingPunct="1">
-                  <a:buFont typeface="Arial" panose="020B0604020202020204" pitchFamily="34" charset="0"/>
-                  <a:buChar char="•"/>
-                </a:pPr>
-                <a:r>
-                  <a:rPr lang="en-US" sz="2400" dirty="0" err="1" smtClean="0"/>
-                  <a:t>Kansverdeling</a:t>
-                </a:r>
-                <a:r>
-                  <a:rPr lang="en-US" sz="2400" dirty="0" smtClean="0"/>
-                  <a:t> </a:t>
-                </a:r>
-                <a:r>
-                  <a:rPr lang="en-US" sz="2400" dirty="0" smtClean="0"/>
-                  <a:t>van </a:t>
-                </a:r>
-                <a:r>
-                  <a:rPr lang="en-US" sz="2400" dirty="0" err="1" smtClean="0"/>
-                  <a:t>sommen</a:t>
-                </a:r>
-                <a:r>
-                  <a:rPr lang="en-US" sz="2400" dirty="0" smtClean="0"/>
-                  <a:t>/</a:t>
-                </a:r>
-                <a:r>
-                  <a:rPr lang="en-US" sz="2400" dirty="0" err="1" smtClean="0"/>
-                  <a:t>gemiddelden</a:t>
-                </a:r>
-                <a:r>
-                  <a:rPr lang="en-US" sz="2400" dirty="0" smtClean="0"/>
-                  <a:t> </a:t>
-                </a:r>
-                <a:r>
-                  <a:rPr lang="en-US" sz="2400" dirty="0" err="1" smtClean="0"/>
-                  <a:t>bepalen</a:t>
-                </a:r>
-                <a:r>
-                  <a:rPr lang="en-US" sz="2400" dirty="0" smtClean="0"/>
-                  <a:t> is </a:t>
-                </a:r>
-                <a:r>
-                  <a:rPr lang="en-US" sz="2400" dirty="0" err="1" smtClean="0"/>
-                  <a:t>zeer</a:t>
-                </a:r>
-                <a:r>
-                  <a:rPr lang="en-US" sz="2400" dirty="0" smtClean="0"/>
-                  <a:t> </a:t>
-                </a:r>
-                <a:r>
-                  <a:rPr lang="en-US" sz="2400" dirty="0" smtClean="0"/>
-                  <a:t>complex / </a:t>
-                </a:r>
-                <a:r>
-                  <a:rPr lang="en-US" sz="2400" dirty="0" err="1" smtClean="0"/>
-                  <a:t>onmogelijk</a:t>
-                </a:r>
-                <a:r>
-                  <a:rPr lang="en-US" sz="2400" dirty="0" smtClean="0"/>
-                  <a:t>.</a:t>
-                </a:r>
-                <a:endParaRPr lang="en-US" sz="2400" dirty="0" smtClean="0"/>
-              </a:p>
-              <a:p>
-                <a:pPr marL="717550" lvl="1" indent="-342900">
-                  <a:buFont typeface="Arial" panose="020B0604020202020204" pitchFamily="34" charset="0"/>
-                  <a:buChar char="•"/>
-                </a:pPr>
-                <a:r>
-                  <a:rPr lang="nl-NL" sz="2000" b="0" dirty="0" smtClean="0"/>
-                  <a:t>Vereist het </a:t>
-                </a:r>
-                <a:r>
-                  <a:rPr lang="nl-NL" sz="2000" dirty="0"/>
-                  <a:t>d</a:t>
-                </a:r>
-                <a:r>
-                  <a:rPr lang="nl-NL" sz="2000" dirty="0" smtClean="0"/>
-                  <a:t>oorrekenen van </a:t>
-                </a:r>
-                <a14:m>
-                  <m:oMath xmlns:m="http://schemas.openxmlformats.org/officeDocument/2006/math">
-                    <m:r>
-                      <a:rPr lang="nl-NL" sz="2000" b="0" i="1" smtClean="0">
-                        <a:latin typeface="Cambria Math" panose="02040503050406030204" pitchFamily="18" charset="0"/>
-                      </a:rPr>
-                      <m:t>𝑛</m:t>
-                    </m:r>
-                  </m:oMath>
-                </a14:m>
-                <a:r>
-                  <a:rPr lang="en-US" sz="2000" dirty="0" smtClean="0"/>
-                  <a:t>-</a:t>
-                </a:r>
-                <a:r>
-                  <a:rPr lang="en-US" sz="2000" dirty="0" err="1" smtClean="0"/>
-                  <a:t>voudige</a:t>
-                </a:r>
-                <a:r>
-                  <a:rPr lang="en-US" sz="2000" dirty="0" smtClean="0"/>
-                  <a:t> </a:t>
-                </a:r>
-                <a:r>
-                  <a:rPr lang="en-US" sz="2000" dirty="0" err="1" smtClean="0"/>
-                  <a:t>integralen</a:t>
-                </a:r>
-                <a:r>
-                  <a:rPr lang="en-US" sz="2000" dirty="0" smtClean="0"/>
-                  <a:t> </a:t>
-                </a:r>
-                <a14:m>
-                  <m:oMath xmlns:m="http://schemas.openxmlformats.org/officeDocument/2006/math">
-                    <m:r>
-                      <a:rPr lang="nl-NL" sz="2000" b="0" i="1" smtClean="0">
-                        <a:latin typeface="Cambria Math" panose="02040503050406030204" pitchFamily="18" charset="0"/>
-                      </a:rPr>
-                      <m:t>…</m:t>
-                    </m:r>
-                  </m:oMath>
-                </a14:m>
-                <a:endParaRPr lang="nl-NL" sz="2000" b="0" dirty="0" smtClean="0"/>
-              </a:p>
-              <a:p>
-                <a:pPr marL="717550" lvl="1" indent="-342900">
-                  <a:buFont typeface="Arial" panose="020B0604020202020204" pitchFamily="34" charset="0"/>
-                  <a:buChar char="•"/>
-                </a:pPr>
-                <a:r>
-                  <a:rPr lang="en-US" sz="2000" dirty="0" smtClean="0"/>
-                  <a:t>CLS </a:t>
-                </a:r>
-                <a:r>
-                  <a:rPr lang="en-US" sz="2000" dirty="0" err="1" smtClean="0"/>
-                  <a:t>zegt</a:t>
-                </a:r>
-                <a:r>
-                  <a:rPr lang="en-US" sz="2000" dirty="0" smtClean="0"/>
-                  <a:t> </a:t>
-                </a:r>
-                <a:r>
-                  <a:rPr lang="en-US" sz="2000" dirty="0" err="1" smtClean="0"/>
-                  <a:t>dat</a:t>
-                </a:r>
-                <a:r>
-                  <a:rPr lang="en-US" sz="2000" dirty="0" smtClean="0"/>
-                  <a:t> we in </a:t>
-                </a:r>
-                <a:r>
-                  <a:rPr lang="en-US" sz="2000" dirty="0" err="1" smtClean="0"/>
-                  <a:t>veel</a:t>
-                </a:r>
-                <a:r>
-                  <a:rPr lang="en-US" sz="2000" dirty="0" smtClean="0"/>
-                  <a:t> </a:t>
-                </a:r>
-                <a:r>
-                  <a:rPr lang="en-US" sz="2000" dirty="0" err="1" smtClean="0"/>
-                  <a:t>gevallen</a:t>
-                </a:r>
-                <a:r>
-                  <a:rPr lang="en-US" sz="2000" dirty="0" smtClean="0"/>
-                  <a:t> </a:t>
-                </a:r>
-                <a:r>
-                  <a:rPr lang="en-US" sz="2000" dirty="0" smtClean="0"/>
-                  <a:t>de </a:t>
-                </a:r>
-                <a:r>
-                  <a:rPr lang="en-US" sz="2000" dirty="0" err="1" smtClean="0"/>
-                  <a:t>normale</a:t>
-                </a:r>
-                <a:r>
-                  <a:rPr lang="en-US" sz="2000" dirty="0" smtClean="0"/>
-                  <a:t> </a:t>
-                </a:r>
-                <a:r>
-                  <a:rPr lang="en-US" sz="2000" dirty="0" err="1" smtClean="0"/>
-                  <a:t>verdeling</a:t>
-                </a:r>
-                <a:r>
-                  <a:rPr lang="en-US" sz="2000" dirty="0" smtClean="0"/>
-                  <a:t> </a:t>
-                </a:r>
-                <a:r>
-                  <a:rPr lang="en-US" sz="2000" dirty="0" err="1" smtClean="0"/>
-                  <a:t>kunnen</a:t>
-                </a:r>
-                <a:r>
-                  <a:rPr lang="en-US" sz="2000" dirty="0" smtClean="0"/>
-                  <a:t> </a:t>
-                </a:r>
-                <a:r>
-                  <a:rPr lang="en-US" sz="2000" dirty="0" err="1" smtClean="0"/>
-                  <a:t>gebruiken</a:t>
-                </a:r>
-                <a:r>
-                  <a:rPr lang="en-US" sz="2000" dirty="0" smtClean="0"/>
-                  <a:t> </a:t>
-                </a:r>
-                <a:r>
-                  <a:rPr lang="en-US" sz="2000" dirty="0" err="1" smtClean="0"/>
-                  <a:t>als</a:t>
-                </a:r>
-                <a:r>
-                  <a:rPr lang="en-US" sz="2000" dirty="0" smtClean="0"/>
-                  <a:t> </a:t>
-                </a:r>
-                <a:r>
-                  <a:rPr lang="en-US" sz="2000" dirty="0" err="1" smtClean="0"/>
-                  <a:t>benadering</a:t>
-                </a:r>
-                <a:endParaRPr lang="en-US" sz="2000" dirty="0" smtClean="0"/>
-              </a:p>
-              <a:p>
-                <a:pPr marL="717550" lvl="1" indent="-342900">
-                  <a:buFont typeface="Arial" panose="020B0604020202020204" pitchFamily="34" charset="0"/>
-                  <a:buChar char="•"/>
-                </a:pPr>
-                <a:endParaRPr lang="en-US" dirty="0" smtClean="0"/>
-              </a:p>
-              <a:p>
-                <a:pPr marL="717550" lvl="1" indent="-342900">
-                  <a:buFont typeface="Arial" panose="020B0604020202020204" pitchFamily="34" charset="0"/>
-                  <a:buChar char="•"/>
-                </a:pPr>
-                <a:endParaRPr lang="en-US" dirty="0" smtClean="0"/>
-              </a:p>
-              <a:p>
-                <a:pPr marL="342900" indent="-342900">
-                  <a:buFont typeface="Arial" panose="020B0604020202020204" pitchFamily="34" charset="0"/>
-                  <a:buChar char="•"/>
-                </a:pPr>
-                <a:r>
-                  <a:rPr lang="en-US" sz="2400" dirty="0" smtClean="0"/>
-                  <a:t>De </a:t>
-                </a:r>
-                <a:r>
-                  <a:rPr lang="en-US" sz="2400" dirty="0" err="1" smtClean="0"/>
-                  <a:t>centrale</a:t>
-                </a:r>
-                <a:r>
-                  <a:rPr lang="en-US" sz="2400" dirty="0" smtClean="0"/>
-                  <a:t> </a:t>
-                </a:r>
-                <a:r>
-                  <a:rPr lang="en-US" sz="2400" dirty="0" err="1" smtClean="0"/>
-                  <a:t>limietstelling</a:t>
-                </a:r>
-                <a:r>
-                  <a:rPr lang="en-US" sz="2400" dirty="0" smtClean="0"/>
-                  <a:t> </a:t>
-                </a:r>
-                <a:r>
-                  <a:rPr lang="en-US" sz="2400" dirty="0" err="1" smtClean="0"/>
-                  <a:t>brengt</a:t>
-                </a:r>
-                <a:r>
-                  <a:rPr lang="en-US" sz="2400" dirty="0" smtClean="0"/>
-                  <a:t> </a:t>
-                </a:r>
-                <a:r>
-                  <a:rPr lang="en-US" sz="2400" dirty="0" err="1" smtClean="0"/>
-                  <a:t>orde</a:t>
-                </a:r>
-                <a:r>
-                  <a:rPr lang="en-US" sz="2400" i="1" dirty="0" smtClean="0"/>
-                  <a:t> </a:t>
-                </a:r>
-                <a:r>
-                  <a:rPr lang="en-US" sz="2400" dirty="0" smtClean="0"/>
-                  <a:t>in de chaos</a:t>
-                </a:r>
-                <a:endParaRPr lang="en-US" sz="2400" i="1" dirty="0" smtClean="0"/>
-              </a:p>
-              <a:p>
-                <a:pPr marL="717550" lvl="1" indent="-342900">
-                  <a:buFont typeface="Arial" panose="020B0604020202020204" pitchFamily="34" charset="0"/>
-                  <a:buChar char="•"/>
-                </a:pPr>
-                <a:r>
-                  <a:rPr lang="en-US" sz="2000" dirty="0" smtClean="0"/>
-                  <a:t>Chaos: </a:t>
-                </a:r>
-                <a:r>
-                  <a:rPr lang="en-US" sz="2000" dirty="0" err="1" smtClean="0"/>
-                  <a:t>verschillende</a:t>
-                </a:r>
-                <a:r>
-                  <a:rPr lang="en-US" sz="2000" dirty="0" smtClean="0"/>
-                  <a:t> </a:t>
-                </a:r>
-                <a:r>
-                  <a:rPr lang="en-US" sz="2000" dirty="0" err="1" smtClean="0"/>
-                  <a:t>kansvariabelen</a:t>
-                </a:r>
-                <a:r>
-                  <a:rPr lang="en-US" sz="2000" dirty="0" smtClean="0"/>
-                  <a:t> </a:t>
-                </a:r>
-                <a:r>
-                  <a:rPr lang="en-US" sz="2000" dirty="0" err="1" smtClean="0"/>
-                  <a:t>volgen</a:t>
-                </a:r>
-                <a:r>
-                  <a:rPr lang="en-US" sz="2000" dirty="0" smtClean="0"/>
-                  <a:t> </a:t>
-                </a:r>
-                <a:r>
-                  <a:rPr lang="en-US" sz="2000" dirty="0" err="1" smtClean="0"/>
-                  <a:t>allerlei</a:t>
-                </a:r>
-                <a:r>
-                  <a:rPr lang="en-US" sz="2000" dirty="0" smtClean="0"/>
-                  <a:t> </a:t>
-                </a:r>
-                <a:r>
-                  <a:rPr lang="en-US" sz="2000" dirty="0" err="1" smtClean="0"/>
-                  <a:t>verschillende</a:t>
-                </a:r>
-                <a:r>
-                  <a:rPr lang="en-US" sz="2000" dirty="0" smtClean="0"/>
-                  <a:t> </a:t>
-                </a:r>
-                <a:r>
-                  <a:rPr lang="en-US" sz="2000" dirty="0" err="1" smtClean="0"/>
-                  <a:t>kansverdelingen</a:t>
-                </a:r>
-                <a:endParaRPr lang="en-US" sz="2000" dirty="0" smtClean="0"/>
-              </a:p>
-              <a:p>
-                <a:pPr marL="717550" lvl="1" indent="-342900">
-                  <a:buFont typeface="Arial" panose="020B0604020202020204" pitchFamily="34" charset="0"/>
-                  <a:buChar char="•"/>
-                </a:pPr>
-                <a:r>
-                  <a:rPr lang="en-US" sz="2000" dirty="0" err="1" smtClean="0"/>
-                  <a:t>Orde</a:t>
-                </a:r>
-                <a:r>
-                  <a:rPr lang="en-US" sz="2000" dirty="0" smtClean="0"/>
-                  <a:t>: </a:t>
-                </a:r>
-                <a:r>
-                  <a:rPr lang="en-US" sz="2000" b="1" dirty="0" err="1" smtClean="0"/>
-                  <a:t>gemiddeld</a:t>
-                </a:r>
-                <a:r>
-                  <a:rPr lang="en-US" sz="2000" dirty="0" smtClean="0"/>
-                  <a:t> </a:t>
-                </a:r>
-                <a:r>
-                  <a:rPr lang="en-US" sz="2000" dirty="0" err="1" smtClean="0"/>
-                  <a:t>volgen</a:t>
-                </a:r>
-                <a:r>
-                  <a:rPr lang="en-US" sz="2000" dirty="0" smtClean="0"/>
-                  <a:t> </a:t>
-                </a:r>
-                <a:r>
-                  <a:rPr lang="en-US" sz="2000" dirty="0" err="1" smtClean="0"/>
-                  <a:t>alle</a:t>
-                </a:r>
-                <a:r>
-                  <a:rPr lang="en-US" sz="2000" dirty="0" smtClean="0"/>
-                  <a:t> </a:t>
-                </a:r>
-                <a:r>
-                  <a:rPr lang="en-US" sz="2000" dirty="0" err="1" smtClean="0"/>
-                  <a:t>kansvariabelen</a:t>
-                </a:r>
-                <a:r>
-                  <a:rPr lang="en-US" sz="2000" dirty="0" smtClean="0"/>
-                  <a:t> </a:t>
-                </a:r>
-                <a:r>
-                  <a:rPr lang="en-US" sz="2000" dirty="0" err="1" smtClean="0"/>
-                  <a:t>hetzelfde</a:t>
-                </a:r>
-                <a:r>
-                  <a:rPr lang="en-US" sz="2000" dirty="0" smtClean="0"/>
-                  <a:t> </a:t>
-                </a:r>
-                <a:r>
-                  <a:rPr lang="en-US" sz="2000" dirty="0" err="1" smtClean="0"/>
-                  <a:t>voorspelbare</a:t>
-                </a:r>
-                <a:r>
-                  <a:rPr lang="en-US" sz="2000" dirty="0" smtClean="0"/>
-                  <a:t> </a:t>
-                </a:r>
-                <a:r>
-                  <a:rPr lang="en-US" sz="2000" dirty="0" smtClean="0"/>
-                  <a:t>patroon.</a:t>
-                </a:r>
-              </a:p>
-              <a:p>
-                <a:pPr marL="717550" lvl="1" indent="-342900">
-                  <a:buFont typeface="Arial" panose="020B0604020202020204" pitchFamily="34" charset="0"/>
-                  <a:buChar char="•"/>
-                </a:pPr>
-                <a:endParaRPr lang="en-US" sz="2000" dirty="0" smtClean="0"/>
-              </a:p>
-              <a:p>
-                <a:pPr lvl="1" indent="0">
-                  <a:buNone/>
-                </a:pPr>
-                <a:endParaRPr lang="en-US" sz="2000" dirty="0" smtClean="0"/>
-              </a:p>
-              <a:p>
-                <a:pPr marL="342900" indent="-342900">
-                  <a:buFont typeface="Arial" panose="020B0604020202020204" pitchFamily="34" charset="0"/>
-                  <a:buChar char="•"/>
-                </a:pPr>
-                <a:r>
-                  <a:rPr lang="en-US" sz="2400" dirty="0" err="1" smtClean="0"/>
-                  <a:t>Veel</a:t>
-                </a:r>
-                <a:r>
-                  <a:rPr lang="en-US" sz="2400" dirty="0" smtClean="0"/>
-                  <a:t> </a:t>
-                </a:r>
-                <a:r>
-                  <a:rPr lang="en-US" sz="2400" dirty="0" err="1" smtClean="0"/>
-                  <a:t>statistische</a:t>
-                </a:r>
-                <a:r>
-                  <a:rPr lang="en-US" sz="2400" dirty="0" smtClean="0"/>
-                  <a:t> </a:t>
-                </a:r>
-                <a:r>
-                  <a:rPr lang="en-US" sz="2400" dirty="0" err="1" smtClean="0"/>
-                  <a:t>methoden</a:t>
-                </a:r>
-                <a:r>
-                  <a:rPr lang="en-US" sz="2400" dirty="0" smtClean="0"/>
-                  <a:t> </a:t>
-                </a:r>
-                <a:r>
-                  <a:rPr lang="en-US" sz="2400" dirty="0" err="1" smtClean="0"/>
-                  <a:t>leunen</a:t>
-                </a:r>
-                <a:r>
-                  <a:rPr lang="en-US" sz="2400" dirty="0" smtClean="0"/>
-                  <a:t> op de </a:t>
-                </a:r>
-                <a:r>
-                  <a:rPr lang="en-US" sz="2400" dirty="0" err="1" smtClean="0"/>
-                  <a:t>schouders</a:t>
-                </a:r>
-                <a:r>
-                  <a:rPr lang="en-US" sz="2400" dirty="0" smtClean="0"/>
-                  <a:t> van de </a:t>
-                </a:r>
-                <a:r>
-                  <a:rPr lang="en-US" sz="2400" dirty="0" smtClean="0"/>
-                  <a:t>CLS</a:t>
-                </a:r>
-              </a:p>
-              <a:p>
-                <a:pPr marL="717550" lvl="1" indent="-342900">
-                  <a:buFont typeface="Arial" panose="020B0604020202020204" pitchFamily="34" charset="0"/>
-                  <a:buChar char="•"/>
-                </a:pPr>
-                <a:r>
-                  <a:rPr lang="en-US" sz="2000" dirty="0" err="1" smtClean="0"/>
-                  <a:t>Stel</a:t>
-                </a:r>
-                <a:r>
-                  <a:rPr lang="en-US" sz="2000" dirty="0" smtClean="0"/>
-                  <a:t> we </a:t>
-                </a:r>
-                <a:r>
-                  <a:rPr lang="en-US" sz="2000" dirty="0" err="1" smtClean="0"/>
-                  <a:t>hebben</a:t>
-                </a:r>
-                <a:r>
-                  <a:rPr lang="en-US" sz="2000" dirty="0" smtClean="0"/>
-                  <a:t> </a:t>
-                </a:r>
-                <a:r>
-                  <a:rPr lang="en-US" sz="2000" dirty="0" err="1" smtClean="0"/>
-                  <a:t>steekproefdata</a:t>
-                </a:r>
-                <a:r>
-                  <a:rPr lang="en-US" sz="2000" dirty="0" smtClean="0"/>
-                  <a:t> </a:t>
-                </a:r>
-                <a:r>
-                  <a:rPr lang="en-US" sz="2000" dirty="0" err="1" smtClean="0"/>
-                  <a:t>verzameld</a:t>
-                </a:r>
-                <a:r>
-                  <a:rPr lang="en-US" sz="2000" dirty="0" smtClean="0"/>
-                  <a:t> </a:t>
-                </a:r>
-                <a:r>
-                  <a:rPr lang="en-US" sz="2000" dirty="0" err="1" smtClean="0"/>
-                  <a:t>en</a:t>
-                </a:r>
-                <a:r>
-                  <a:rPr lang="en-US" sz="2000" dirty="0" smtClean="0"/>
-                  <a:t> </a:t>
-                </a:r>
-                <a:r>
-                  <a:rPr lang="en-US" sz="2000" dirty="0" err="1" smtClean="0"/>
-                  <a:t>willen</a:t>
-                </a:r>
-                <a:r>
-                  <a:rPr lang="en-US" sz="2000" dirty="0" smtClean="0"/>
-                  <a:t> </a:t>
-                </a:r>
-                <a:r>
-                  <a:rPr lang="en-US" sz="2000" dirty="0" err="1" smtClean="0"/>
-                  <a:t>iets</a:t>
-                </a:r>
-                <a:r>
-                  <a:rPr lang="en-US" sz="2000" dirty="0" smtClean="0"/>
-                  <a:t> </a:t>
-                </a:r>
-                <a:r>
-                  <a:rPr lang="en-US" sz="2000" dirty="0" err="1" smtClean="0"/>
-                  <a:t>zeggen</a:t>
-                </a:r>
-                <a:r>
-                  <a:rPr lang="en-US" sz="2000" dirty="0" smtClean="0"/>
-                  <a:t> over het </a:t>
-                </a:r>
-                <a:r>
-                  <a:rPr lang="en-US" sz="2000" dirty="0" err="1" smtClean="0"/>
-                  <a:t>populatiegemiddelde</a:t>
-                </a:r>
-                <a:r>
-                  <a:rPr lang="en-US" sz="2000" dirty="0" smtClean="0"/>
-                  <a:t>.</a:t>
-                </a:r>
-              </a:p>
-              <a:p>
-                <a:pPr marL="717550" lvl="1" indent="-342900">
-                  <a:buFont typeface="Arial" panose="020B0604020202020204" pitchFamily="34" charset="0"/>
-                  <a:buChar char="•"/>
-                </a:pPr>
-                <a:r>
-                  <a:rPr lang="en-US" sz="2000" dirty="0" smtClean="0"/>
-                  <a:t>CLS </a:t>
-                </a:r>
-                <a:r>
-                  <a:rPr lang="en-US" sz="2000" dirty="0" err="1" smtClean="0"/>
-                  <a:t>geeft</a:t>
-                </a:r>
-                <a:r>
-                  <a:rPr lang="en-US" sz="2000" dirty="0" smtClean="0"/>
-                  <a:t> </a:t>
-                </a:r>
-                <a:r>
-                  <a:rPr lang="en-US" sz="2000" dirty="0" err="1" smtClean="0"/>
-                  <a:t>ons</a:t>
-                </a:r>
-                <a:r>
-                  <a:rPr lang="en-US" sz="2000" dirty="0" smtClean="0"/>
-                  <a:t> nu </a:t>
-                </a:r>
-                <a:r>
-                  <a:rPr lang="en-US" sz="2000" dirty="0" err="1" smtClean="0"/>
-                  <a:t>een</a:t>
-                </a:r>
-                <a:r>
-                  <a:rPr lang="en-US" sz="2000" dirty="0" smtClean="0"/>
-                  <a:t> </a:t>
-                </a:r>
-                <a:r>
-                  <a:rPr lang="en-US" sz="2000" dirty="0" err="1" smtClean="0"/>
-                  <a:t>manier</a:t>
-                </a:r>
-                <a:r>
-                  <a:rPr lang="en-US" sz="2000" dirty="0" smtClean="0"/>
-                  <a:t> om </a:t>
-                </a:r>
-                <a:r>
-                  <a:rPr lang="en-US" sz="2000" dirty="0" err="1" smtClean="0"/>
-                  <a:t>een</a:t>
-                </a:r>
-                <a:r>
-                  <a:rPr lang="en-US" sz="2000" dirty="0" smtClean="0"/>
-                  <a:t> </a:t>
-                </a:r>
-                <a:r>
-                  <a:rPr lang="en-US" sz="2000" dirty="0" err="1" smtClean="0"/>
-                  <a:t>schatting</a:t>
-                </a:r>
-                <a:r>
-                  <a:rPr lang="en-US" sz="2000" dirty="0" smtClean="0"/>
-                  <a:t> op basis van </a:t>
-                </a:r>
-                <a:r>
-                  <a:rPr lang="en-US" sz="2000" dirty="0" err="1" smtClean="0"/>
-                  <a:t>deze</a:t>
-                </a:r>
-                <a:r>
-                  <a:rPr lang="en-US" sz="2000" dirty="0" smtClean="0"/>
-                  <a:t> </a:t>
-                </a:r>
-                <a:r>
-                  <a:rPr lang="en-US" sz="2000" dirty="0" err="1" smtClean="0"/>
-                  <a:t>steekproef</a:t>
-                </a:r>
-                <a:r>
-                  <a:rPr lang="en-US" sz="2000" dirty="0" smtClean="0"/>
-                  <a:t> </a:t>
-                </a:r>
-                <a:r>
-                  <a:rPr lang="en-US" sz="2000" dirty="0" err="1" smtClean="0"/>
-                  <a:t>te</a:t>
-                </a:r>
-                <a:r>
-                  <a:rPr lang="en-US" sz="2000" dirty="0" smtClean="0"/>
-                  <a:t> </a:t>
-                </a:r>
-                <a:r>
-                  <a:rPr lang="en-US" sz="2000" dirty="0" err="1" smtClean="0"/>
-                  <a:t>kwantificeren</a:t>
-                </a:r>
-                <a:r>
-                  <a:rPr lang="en-US" sz="2000" dirty="0" smtClean="0"/>
-                  <a:t>.</a:t>
-                </a:r>
-                <a:endParaRPr lang="en-US" sz="2000" dirty="0" smtClean="0"/>
-              </a:p>
-              <a:p>
-                <a:pPr marL="342900" indent="-342900">
-                  <a:buFont typeface="Arial" panose="020B0604020202020204" pitchFamily="34" charset="0"/>
-                  <a:buChar char="•"/>
-                </a:pPr>
-                <a:endParaRPr lang="en-US" sz="2000" dirty="0" smtClean="0"/>
-              </a:p>
-            </p:txBody>
-          </p:sp>
-        </mc:Choice>
-        <mc:Fallback>
-          <p:sp>
-            <p:nvSpPr>
-              <p:cNvPr id="6147" name="Content Placeholder 2"/>
-              <p:cNvSpPr>
-                <a:spLocks noGrp="1" noRot="1" noChangeAspect="1" noMove="1" noResize="1" noEditPoints="1" noAdjustHandles="1" noChangeArrowheads="1" noChangeShapeType="1" noTextEdit="1"/>
-              </p:cNvSpPr>
-              <p:nvPr>
-                <p:ph idx="1"/>
-              </p:nvPr>
-            </p:nvSpPr>
-            <p:spPr>
-              <a:xfrm>
-                <a:off x="812800" y="1773238"/>
-                <a:ext cx="10827816" cy="4246562"/>
-              </a:xfrm>
-              <a:blipFill>
-                <a:blip r:embed="rId2"/>
-                <a:stretch>
-                  <a:fillRect l="-1576" t="-2296" b="-7174"/>
-                </a:stretch>
-              </a:blipFill>
-            </p:spPr>
-            <p:txBody>
-              <a:bodyPr/>
-              <a:lstStyle/>
-              <a:p>
-                <a:r>
-                  <a:rPr lang="nl-NL">
-                    <a:noFill/>
-                  </a:rPr>
-                  <a:t> </a:t>
-                </a:r>
-              </a:p>
-            </p:txBody>
-          </p:sp>
-        </mc:Fallback>
-      </mc:AlternateContent>
       <p:sp>
         <p:nvSpPr>
           <p:cNvPr id="6148" name="Date Placeholder 3"/>
@@ -9059,10 +8483,324 @@
           </a:p>
         </p:txBody>
       </p:sp>
+      <mc:AlternateContent xmlns:mc="http://schemas.openxmlformats.org/markup-compatibility/2006" xmlns:a14="http://schemas.microsoft.com/office/drawing/2010/main">
+        <mc:Choice Requires="a14">
+          <p:sp>
+            <p:nvSpPr>
+              <p:cNvPr id="2" name="Tijdelijke aanduiding voor inhoud 1"/>
+              <p:cNvSpPr>
+                <a:spLocks noGrp="1"/>
+              </p:cNvSpPr>
+              <p:nvPr>
+                <p:ph idx="1"/>
+              </p:nvPr>
+            </p:nvSpPr>
+            <p:spPr/>
+            <p:txBody>
+              <a:bodyPr/>
+              <a:lstStyle/>
+              <a:p>
+                <a:pPr marL="342900" indent="-342900">
+                  <a:buFont typeface="Arial" panose="020B0604020202020204" pitchFamily="34" charset="0"/>
+                  <a:buChar char="•"/>
+                </a:pPr>
+                <a:endParaRPr lang="nl-NL" dirty="0" smtClean="0"/>
+              </a:p>
+              <a:p>
+                <a:pPr marL="342900" indent="-342900">
+                  <a:buFont typeface="Arial" panose="020B0604020202020204" pitchFamily="34" charset="0"/>
+                  <a:buChar char="•"/>
+                </a:pPr>
+                <a:r>
+                  <a:rPr lang="nl-NL" dirty="0" smtClean="0"/>
+                  <a:t>Wat gebeurt er als we het aantal </a:t>
+                </a:r>
+                <a:r>
+                  <a:rPr lang="nl-NL" dirty="0" err="1" smtClean="0"/>
+                  <a:t>kansvariabelen</a:t>
+                </a:r>
+                <a:r>
+                  <a:rPr lang="nl-NL" dirty="0" smtClean="0"/>
+                  <a:t> </a:t>
+                </a:r>
+                <a14:m>
+                  <m:oMath xmlns:m="http://schemas.openxmlformats.org/officeDocument/2006/math">
+                    <m:r>
+                      <a:rPr lang="nl-NL" b="0" i="1" smtClean="0">
+                        <a:latin typeface="Cambria Math" panose="02040503050406030204" pitchFamily="18" charset="0"/>
+                      </a:rPr>
+                      <m:t>𝑛</m:t>
+                    </m:r>
+                  </m:oMath>
+                </a14:m>
+                <a:r>
+                  <a:rPr lang="nl-NL" dirty="0" smtClean="0"/>
+                  <a:t> vergroten?</a:t>
+                </a:r>
+              </a:p>
+              <a:p>
+                <a:pPr marL="717550" lvl="1" indent="-342900">
+                  <a:buFont typeface="Arial" panose="020B0604020202020204" pitchFamily="34" charset="0"/>
+                  <a:buChar char="•"/>
+                </a:pPr>
+                <a:r>
+                  <a:rPr lang="nl-NL" dirty="0" smtClean="0">
+                    <a:solidFill>
+                      <a:srgbClr val="92D050"/>
+                    </a:solidFill>
+                  </a:rPr>
+                  <a:t>Bij grotere </a:t>
+                </a:r>
+                <a14:m>
+                  <m:oMath xmlns:m="http://schemas.openxmlformats.org/officeDocument/2006/math">
+                    <m:r>
+                      <a:rPr lang="nl-NL" b="0" i="1" smtClean="0">
+                        <a:solidFill>
+                          <a:srgbClr val="92D050"/>
+                        </a:solidFill>
+                        <a:latin typeface="Cambria Math" panose="02040503050406030204" pitchFamily="18" charset="0"/>
+                      </a:rPr>
+                      <m:t>𝑛</m:t>
+                    </m:r>
+                  </m:oMath>
+                </a14:m>
+                <a:r>
+                  <a:rPr lang="nl-NL" dirty="0" smtClean="0">
+                    <a:solidFill>
+                      <a:srgbClr val="92D050"/>
+                    </a:solidFill>
+                  </a:rPr>
+                  <a:t> wordt de normale benadering steeds beter. </a:t>
+                </a:r>
+              </a:p>
+              <a:p>
+                <a:pPr marL="717550" lvl="1" indent="-342900">
+                  <a:buFont typeface="Arial" panose="020B0604020202020204" pitchFamily="34" charset="0"/>
+                  <a:buChar char="•"/>
+                </a:pPr>
+                <a:r>
+                  <a:rPr lang="nl-NL" dirty="0" smtClean="0">
+                    <a:solidFill>
+                      <a:srgbClr val="92D050"/>
+                    </a:solidFill>
+                  </a:rPr>
+                  <a:t>Vanaf </a:t>
+                </a:r>
+                <a14:m>
+                  <m:oMath xmlns:m="http://schemas.openxmlformats.org/officeDocument/2006/math">
+                    <m:r>
+                      <a:rPr lang="nl-NL" b="0" i="1" smtClean="0">
+                        <a:solidFill>
+                          <a:srgbClr val="92D050"/>
+                        </a:solidFill>
+                        <a:latin typeface="Cambria Math" panose="02040503050406030204" pitchFamily="18" charset="0"/>
+                      </a:rPr>
+                      <m:t>𝑛</m:t>
+                    </m:r>
+                    <m:r>
+                      <a:rPr lang="nl-NL" b="0" i="1" smtClean="0">
+                        <a:solidFill>
+                          <a:srgbClr val="92D050"/>
+                        </a:solidFill>
+                        <a:latin typeface="Cambria Math" panose="02040503050406030204" pitchFamily="18" charset="0"/>
+                      </a:rPr>
+                      <m:t>≥30</m:t>
+                    </m:r>
+                  </m:oMath>
+                </a14:m>
+                <a:r>
+                  <a:rPr lang="nl-NL" dirty="0" smtClean="0">
+                    <a:solidFill>
+                      <a:srgbClr val="92D050"/>
+                    </a:solidFill>
+                  </a:rPr>
+                  <a:t> is het verschil met de echte verdeling verwaarloosbaar klein.</a:t>
+                </a:r>
+                <a:endParaRPr lang="nl-NL" dirty="0">
+                  <a:solidFill>
+                    <a:srgbClr val="92D050"/>
+                  </a:solidFill>
+                </a:endParaRPr>
+              </a:p>
+              <a:p>
+                <a:pPr marL="342900" indent="-342900">
+                  <a:buFont typeface="Arial" panose="020B0604020202020204" pitchFamily="34" charset="0"/>
+                  <a:buChar char="•"/>
+                </a:pPr>
+                <a:endParaRPr lang="nl-NL" dirty="0" smtClean="0"/>
+              </a:p>
+              <a:p>
+                <a:pPr marL="342900" indent="-342900">
+                  <a:buFont typeface="Arial" panose="020B0604020202020204" pitchFamily="34" charset="0"/>
+                  <a:buChar char="•"/>
+                </a:pPr>
+                <a:r>
+                  <a:rPr lang="nl-NL" dirty="0" smtClean="0"/>
+                  <a:t>Wat gebeurt er als we het aantal steekproeven van grootte </a:t>
+                </a:r>
+                <a14:m>
+                  <m:oMath xmlns:m="http://schemas.openxmlformats.org/officeDocument/2006/math">
+                    <m:r>
+                      <a:rPr lang="nl-NL" b="0" i="1" smtClean="0">
+                        <a:latin typeface="Cambria Math" panose="02040503050406030204" pitchFamily="18" charset="0"/>
+                      </a:rPr>
+                      <m:t>𝑛</m:t>
+                    </m:r>
+                  </m:oMath>
+                </a14:m>
+                <a:r>
+                  <a:rPr lang="nl-NL" dirty="0" smtClean="0"/>
+                  <a:t> vergroten?</a:t>
+                </a:r>
+              </a:p>
+              <a:p>
+                <a:pPr marL="717550" lvl="1" indent="-342900">
+                  <a:buFont typeface="Arial" panose="020B0604020202020204" pitchFamily="34" charset="0"/>
+                  <a:buChar char="•"/>
+                </a:pPr>
+                <a:r>
+                  <a:rPr lang="nl-NL" dirty="0" smtClean="0">
+                    <a:solidFill>
+                      <a:srgbClr val="92D050"/>
+                    </a:solidFill>
+                  </a:rPr>
+                  <a:t>Bij grotere aantallen steekproeven (</a:t>
+                </a:r>
+                <a14:m>
+                  <m:oMath xmlns:m="http://schemas.openxmlformats.org/officeDocument/2006/math">
+                    <m:r>
+                      <a:rPr lang="nl-NL" b="0" i="1" smtClean="0">
+                        <a:solidFill>
+                          <a:srgbClr val="92D050"/>
+                        </a:solidFill>
+                        <a:latin typeface="Cambria Math" panose="02040503050406030204" pitchFamily="18" charset="0"/>
+                      </a:rPr>
+                      <m:t>𝑛</m:t>
+                    </m:r>
+                    <m:r>
+                      <a:rPr lang="nl-NL" b="0" i="1" smtClean="0">
+                        <a:solidFill>
+                          <a:srgbClr val="92D050"/>
+                        </a:solidFill>
+                        <a:latin typeface="Cambria Math" panose="02040503050406030204" pitchFamily="18" charset="0"/>
+                      </a:rPr>
+                      <m:t>=1</m:t>
+                    </m:r>
+                  </m:oMath>
+                </a14:m>
+                <a:r>
+                  <a:rPr lang="nl-NL" dirty="0" smtClean="0">
+                    <a:solidFill>
+                      <a:srgbClr val="92D050"/>
+                    </a:solidFill>
+                  </a:rPr>
+                  <a:t>) is de originele kansverdeling het beste te zien.</a:t>
+                </a:r>
+              </a:p>
+              <a:p>
+                <a:pPr marL="717550" lvl="1" indent="-342900">
+                  <a:buFont typeface="Arial" panose="020B0604020202020204" pitchFamily="34" charset="0"/>
+                  <a:buChar char="•"/>
+                </a:pPr>
+                <a:r>
+                  <a:rPr lang="nl-NL" dirty="0" smtClean="0">
+                    <a:solidFill>
+                      <a:srgbClr val="92D050"/>
+                    </a:solidFill>
+                  </a:rPr>
+                  <a:t>Verhoog dan </a:t>
+                </a:r>
+                <a14:m>
+                  <m:oMath xmlns:m="http://schemas.openxmlformats.org/officeDocument/2006/math">
+                    <m:r>
+                      <a:rPr lang="nl-NL" b="0" i="1" smtClean="0">
+                        <a:solidFill>
+                          <a:srgbClr val="92D050"/>
+                        </a:solidFill>
+                        <a:latin typeface="Cambria Math" panose="02040503050406030204" pitchFamily="18" charset="0"/>
+                      </a:rPr>
+                      <m:t>𝑛</m:t>
+                    </m:r>
+                  </m:oMath>
+                </a14:m>
+                <a:r>
+                  <a:rPr lang="nl-NL" dirty="0" smtClean="0">
+                    <a:solidFill>
+                      <a:srgbClr val="92D050"/>
+                    </a:solidFill>
+                  </a:rPr>
+                  <a:t> stap voor stap om de ontwikkeling tot de normale benadering te zien.</a:t>
+                </a:r>
+              </a:p>
+              <a:p>
+                <a:pPr algn="ctr"/>
+                <a:endParaRPr lang="nl-NL" b="1" dirty="0" smtClean="0">
+                  <a:hlinkClick r:id="rId2"/>
+                </a:endParaRPr>
+              </a:p>
+              <a:p>
+                <a:pPr algn="ctr"/>
+                <a:endParaRPr lang="nl-NL" b="1" dirty="0">
+                  <a:hlinkClick r:id="rId2"/>
+                </a:endParaRPr>
+              </a:p>
+              <a:p>
+                <a:pPr algn="ctr"/>
+                <a:r>
+                  <a:rPr lang="nl-NL" b="1" dirty="0" smtClean="0">
+                    <a:hlinkClick r:id="rId2"/>
+                  </a:rPr>
+                  <a:t>https</a:t>
+                </a:r>
+                <a:r>
+                  <a:rPr lang="nl-NL" b="1" dirty="0">
+                    <a:hlinkClick r:id="rId2"/>
+                  </a:rPr>
+                  <a:t>://interactive-cls.streamlit.app</a:t>
+                </a:r>
+                <a:endParaRPr lang="nl-NL" b="1" dirty="0"/>
+              </a:p>
+            </p:txBody>
+          </p:sp>
+        </mc:Choice>
+        <mc:Fallback xmlns="">
+          <p:sp>
+            <p:nvSpPr>
+              <p:cNvPr id="2" name="Tijdelijke aanduiding voor inhoud 1"/>
+              <p:cNvSpPr>
+                <a:spLocks noGrp="1" noRot="1" noChangeAspect="1" noMove="1" noResize="1" noEditPoints="1" noAdjustHandles="1" noChangeArrowheads="1" noChangeShapeType="1" noTextEdit="1"/>
+              </p:cNvSpPr>
+              <p:nvPr>
+                <p:ph idx="1"/>
+              </p:nvPr>
+            </p:nvSpPr>
+            <p:spPr>
+              <a:blipFill>
+                <a:blip r:embed="rId3"/>
+                <a:stretch>
+                  <a:fillRect l="-1529" r="-1647" b="-2582"/>
+                </a:stretch>
+              </a:blipFill>
+            </p:spPr>
+            <p:txBody>
+              <a:bodyPr/>
+              <a:lstStyle/>
+              <a:p>
+                <a:r>
+                  <a:rPr lang="nl-NL">
+                    <a:noFill/>
+                  </a:rPr>
+                  <a:t> </a:t>
+                </a:r>
+              </a:p>
+            </p:txBody>
+          </p:sp>
+        </mc:Fallback>
+      </mc:AlternateContent>
     </p:spTree>
     <p:extLst>
       <p:ext uri="{BB962C8B-B14F-4D97-AF65-F5344CB8AC3E}">
-        <p14:creationId xmlns:p14="http://schemas.microsoft.com/office/powerpoint/2010/main" val="1298405984"/>
+        <p14:creationId xmlns:p14="http://schemas.microsoft.com/office/powerpoint/2010/main" val="2263666321"/>
       </p:ext>
     </p:extLst>
   </p:cSld>
@@ -9072,7 +8810,190 @@
   <p:timing>
     <p:tnLst>
       <p:par>
-        <p:cTn id="1" dur="indefinite" restart="never" nodeType="tmRoot"/>
+        <p:cTn id="1" dur="indefinite" restart="never" nodeType="tmRoot">
+          <p:childTnLst>
+            <p:seq concurrent="1" nextAc="seek">
+              <p:cTn id="2" dur="indefinite" nodeType="mainSeq">
+                <p:childTnLst>
+                  <p:par>
+                    <p:cTn id="3" fill="hold">
+                      <p:stCondLst>
+                        <p:cond delay="indefinite"/>
+                      </p:stCondLst>
+                      <p:childTnLst>
+                        <p:par>
+                          <p:cTn id="4" fill="hold">
+                            <p:stCondLst>
+                              <p:cond delay="0"/>
+                            </p:stCondLst>
+                            <p:childTnLst>
+                              <p:par>
+                                <p:cTn id="5" presetID="1" presetClass="entr" presetSubtype="0" fill="hold" nodeType="clickEffect">
+                                  <p:stCondLst>
+                                    <p:cond delay="0"/>
+                                  </p:stCondLst>
+                                  <p:childTnLst>
+                                    <p:set>
+                                      <p:cBhvr>
+                                        <p:cTn id="6" dur="1" fill="hold">
+                                          <p:stCondLst>
+                                            <p:cond delay="0"/>
+                                          </p:stCondLst>
+                                        </p:cTn>
+                                        <p:tgtEl>
+                                          <p:spTgt spid="2">
+                                            <p:txEl>
+                                              <p:pRg st="2" end="2"/>
+                                            </p:txEl>
+                                          </p:spTgt>
+                                        </p:tgtEl>
+                                        <p:attrNameLst>
+                                          <p:attrName>style.visibility</p:attrName>
+                                        </p:attrNameLst>
+                                      </p:cBhvr>
+                                      <p:to>
+                                        <p:strVal val="visible"/>
+                                      </p:to>
+                                    </p:set>
+                                  </p:childTnLst>
+                                </p:cTn>
+                              </p:par>
+                              <p:par>
+                                <p:cTn id="7" presetID="1" presetClass="entr" presetSubtype="0" fill="hold" nodeType="withEffect">
+                                  <p:stCondLst>
+                                    <p:cond delay="0"/>
+                                  </p:stCondLst>
+                                  <p:childTnLst>
+                                    <p:set>
+                                      <p:cBhvr>
+                                        <p:cTn id="8" dur="1" fill="hold">
+                                          <p:stCondLst>
+                                            <p:cond delay="0"/>
+                                          </p:stCondLst>
+                                        </p:cTn>
+                                        <p:tgtEl>
+                                          <p:spTgt spid="2">
+                                            <p:txEl>
+                                              <p:pRg st="3" end="3"/>
+                                            </p:txEl>
+                                          </p:spTgt>
+                                        </p:tgtEl>
+                                        <p:attrNameLst>
+                                          <p:attrName>style.visibility</p:attrName>
+                                        </p:attrNameLst>
+                                      </p:cBhvr>
+                                      <p:to>
+                                        <p:strVal val="visible"/>
+                                      </p:to>
+                                    </p:set>
+                                  </p:childTnLst>
+                                </p:cTn>
+                              </p:par>
+                            </p:childTnLst>
+                          </p:cTn>
+                        </p:par>
+                      </p:childTnLst>
+                    </p:cTn>
+                  </p:par>
+                  <p:par>
+                    <p:cTn id="9" fill="hold">
+                      <p:stCondLst>
+                        <p:cond delay="indefinite"/>
+                      </p:stCondLst>
+                      <p:childTnLst>
+                        <p:par>
+                          <p:cTn id="10" fill="hold">
+                            <p:stCondLst>
+                              <p:cond delay="0"/>
+                            </p:stCondLst>
+                            <p:childTnLst>
+                              <p:par>
+                                <p:cTn id="11" presetID="1" presetClass="entr" presetSubtype="0" fill="hold" nodeType="clickEffect">
+                                  <p:stCondLst>
+                                    <p:cond delay="0"/>
+                                  </p:stCondLst>
+                                  <p:childTnLst>
+                                    <p:set>
+                                      <p:cBhvr>
+                                        <p:cTn id="12" dur="1" fill="hold">
+                                          <p:stCondLst>
+                                            <p:cond delay="0"/>
+                                          </p:stCondLst>
+                                        </p:cTn>
+                                        <p:tgtEl>
+                                          <p:spTgt spid="2">
+                                            <p:txEl>
+                                              <p:pRg st="6" end="6"/>
+                                            </p:txEl>
+                                          </p:spTgt>
+                                        </p:tgtEl>
+                                        <p:attrNameLst>
+                                          <p:attrName>style.visibility</p:attrName>
+                                        </p:attrNameLst>
+                                      </p:cBhvr>
+                                      <p:to>
+                                        <p:strVal val="visible"/>
+                                      </p:to>
+                                    </p:set>
+                                  </p:childTnLst>
+                                </p:cTn>
+                              </p:par>
+                              <p:par>
+                                <p:cTn id="13" presetID="1" presetClass="entr" presetSubtype="0" fill="hold" nodeType="withEffect">
+                                  <p:stCondLst>
+                                    <p:cond delay="0"/>
+                                  </p:stCondLst>
+                                  <p:childTnLst>
+                                    <p:set>
+                                      <p:cBhvr>
+                                        <p:cTn id="14" dur="1" fill="hold">
+                                          <p:stCondLst>
+                                            <p:cond delay="0"/>
+                                          </p:stCondLst>
+                                        </p:cTn>
+                                        <p:tgtEl>
+                                          <p:spTgt spid="2">
+                                            <p:txEl>
+                                              <p:pRg st="7" end="7"/>
+                                            </p:txEl>
+                                          </p:spTgt>
+                                        </p:tgtEl>
+                                        <p:attrNameLst>
+                                          <p:attrName>style.visibility</p:attrName>
+                                        </p:attrNameLst>
+                                      </p:cBhvr>
+                                      <p:to>
+                                        <p:strVal val="visible"/>
+                                      </p:to>
+                                    </p:set>
+                                  </p:childTnLst>
+                                </p:cTn>
+                              </p:par>
+                            </p:childTnLst>
+                          </p:cTn>
+                        </p:par>
+                      </p:childTnLst>
+                    </p:cTn>
+                  </p:par>
+                </p:childTnLst>
+              </p:cTn>
+              <p:prevCondLst>
+                <p:cond evt="onPrev" delay="0">
+                  <p:tgtEl>
+                    <p:sldTgt/>
+                  </p:tgtEl>
+                </p:cond>
+              </p:prevCondLst>
+              <p:nextCondLst>
+                <p:cond evt="onNext" delay="0">
+                  <p:tgtEl>
+                    <p:sldTgt/>
+                  </p:tgtEl>
+                </p:cond>
+              </p:nextCondLst>
+            </p:seq>
+          </p:childTnLst>
+        </p:cTn>
       </p:par>
     </p:tnLst>
   </p:timing>
@@ -9106,30 +9027,57 @@
             <p:ph type="title"/>
           </p:nvPr>
         </p:nvSpPr>
-        <p:spPr/>
+        <p:spPr>
+          <a:xfrm>
+            <a:off x="814917" y="1265241"/>
+            <a:ext cx="10363200" cy="800219"/>
+          </a:xfrm>
+        </p:spPr>
         <p:txBody>
           <a:bodyPr/>
           <a:lstStyle/>
           <a:p>
-            <a:pPr eaLnBrk="1" hangingPunct="1"/>
-            <a:r>
-              <a:rPr lang="en-US" dirty="0" smtClean="0"/>
-              <a:t>Buijs: </a:t>
-            </a:r>
-            <a:r>
-              <a:rPr lang="en-US" dirty="0" err="1" smtClean="0"/>
-              <a:t>opgave</a:t>
-            </a:r>
-            <a:r>
-              <a:rPr lang="en-US" dirty="0" smtClean="0"/>
-              <a:t> 5.12</a:t>
-            </a:r>
+            <a:r>
+              <a:rPr lang="en-US" b="1" dirty="0" err="1"/>
+              <a:t>Waarom</a:t>
+            </a:r>
+            <a:r>
+              <a:rPr lang="en-US" b="1" dirty="0"/>
+              <a:t> is de </a:t>
+            </a:r>
+            <a:r>
+              <a:rPr lang="en-US" b="1" dirty="0" err="1"/>
+              <a:t>centrale</a:t>
+            </a:r>
+            <a:r>
+              <a:rPr lang="en-US" b="1" dirty="0"/>
+              <a:t> </a:t>
+            </a:r>
+            <a:r>
+              <a:rPr lang="en-US" b="1" dirty="0" err="1"/>
+              <a:t>limietstelling</a:t>
+            </a:r>
+            <a:r>
+              <a:rPr lang="en-US" b="1" dirty="0"/>
+              <a:t> (CLS) zo </a:t>
+            </a:r>
+            <a:r>
+              <a:rPr lang="en-US" b="1" dirty="0" err="1"/>
+              <a:t>krachtig</a:t>
+            </a:r>
+            <a:r>
+              <a:rPr lang="en-US" b="1" dirty="0"/>
+              <a:t>?</a:t>
+            </a:r>
+            <a:br>
+              <a:rPr lang="en-US" b="1" dirty="0"/>
+            </a:br>
             <a:endParaRPr lang="nl-NL" dirty="0" smtClean="0"/>
           </a:p>
         </p:txBody>
       </p:sp>
-      <mc:AlternateContent xmlns:mc="http://schemas.openxmlformats.org/markup-compatibility/2006">
-        <mc:Choice xmlns:a14="http://schemas.microsoft.com/office/drawing/2010/main" Requires="a14">
+      <mc:AlternateContent xmlns:mc="http://schemas.openxmlformats.org/markup-compatibility/2006" xmlns:a14="http://schemas.microsoft.com/office/drawing/2010/main">
+        <mc:Choice Requires="a14">
           <p:sp>
             <p:nvSpPr>
               <p:cNvPr id="6147" name="Content Placeholder 2"/>
@@ -9143,480 +9091,628 @@
             <p:spPr>
               <a:xfrm>
                 <a:off x="812800" y="1773238"/>
-                <a:ext cx="10539784" cy="4246562"/>
+                <a:ext cx="10827816" cy="4246562"/>
               </a:xfrm>
             </p:spPr>
             <p:txBody>
               <a:bodyPr/>
               <a:lstStyle/>
               <a:p>
-                <a:pPr eaLnBrk="1" hangingPunct="1"/>
-                <a:r>
-                  <a:rPr lang="en-US" b="1" dirty="0" smtClean="0"/>
-                  <a:t>De </a:t>
-                </a:r>
-                <a:r>
-                  <a:rPr lang="en-US" b="1" dirty="0" err="1" smtClean="0"/>
-                  <a:t>tijd</a:t>
-                </a:r>
-                <a:r>
-                  <a:rPr lang="en-US" b="1" dirty="0"/>
-                  <a:t> </a:t>
-                </a:r>
-                <a:r>
-                  <a:rPr lang="en-US" b="1" dirty="0" smtClean="0"/>
-                  <a:t>die </a:t>
-                </a:r>
-                <a:r>
-                  <a:rPr lang="en-US" b="1" dirty="0" err="1" smtClean="0"/>
-                  <a:t>een</a:t>
-                </a:r>
-                <a:r>
-                  <a:rPr lang="en-US" b="1" dirty="0" smtClean="0"/>
-                  <a:t> </a:t>
-                </a:r>
-                <a:r>
-                  <a:rPr lang="en-US" b="1" dirty="0" err="1" smtClean="0"/>
-                  <a:t>vertegenwoordiger</a:t>
-                </a:r>
-                <a:r>
-                  <a:rPr lang="en-US" b="1" dirty="0" smtClean="0"/>
-                  <a:t> </a:t>
-                </a:r>
-                <a:r>
-                  <a:rPr lang="en-US" b="1" dirty="0" err="1" smtClean="0"/>
-                  <a:t>nodig</a:t>
-                </a:r>
-                <a:r>
-                  <a:rPr lang="en-US" b="1" dirty="0" smtClean="0"/>
-                  <a:t> </a:t>
-                </a:r>
-                <a:r>
-                  <a:rPr lang="en-US" b="1" dirty="0" err="1" smtClean="0"/>
-                  <a:t>heeft</a:t>
-                </a:r>
-                <a:r>
-                  <a:rPr lang="en-US" b="1" dirty="0" smtClean="0"/>
-                  <a:t> </a:t>
-                </a:r>
-                <a:r>
-                  <a:rPr lang="en-US" b="1" dirty="0" err="1" smtClean="0"/>
-                  <a:t>voor</a:t>
-                </a:r>
-                <a:r>
-                  <a:rPr lang="en-US" b="1" dirty="0" smtClean="0"/>
-                  <a:t> het </a:t>
-                </a:r>
-                <a:r>
-                  <a:rPr lang="en-US" b="1" dirty="0" err="1" smtClean="0"/>
-                  <a:t>bezoeken</a:t>
-                </a:r>
-                <a:r>
-                  <a:rPr lang="en-US" b="1" dirty="0" smtClean="0"/>
+                <a:pPr marL="342900" indent="-342900" eaLnBrk="1" hangingPunct="1">
+                  <a:buFont typeface="Arial" panose="020B0604020202020204" pitchFamily="34" charset="0"/>
+                  <a:buChar char="•"/>
+                </a:pPr>
+                <a:r>
+                  <a:rPr lang="en-US" sz="2400" dirty="0" err="1" smtClean="0"/>
+                  <a:t>Kansverdeling</a:t>
+                </a:r>
+                <a:r>
+                  <a:rPr lang="en-US" sz="2400" dirty="0" smtClean="0"/>
                   <a:t> van </a:t>
                 </a:r>
                 <a:r>
-                  <a:rPr lang="en-US" b="1" dirty="0" err="1" smtClean="0"/>
-                  <a:t>een</a:t>
-                </a:r>
-                <a:r>
-                  <a:rPr lang="en-US" b="1" dirty="0" smtClean="0"/>
-                  <a:t> </a:t>
-                </a:r>
-                <a:r>
-                  <a:rPr lang="en-US" b="1" dirty="0" err="1" smtClean="0"/>
-                  <a:t>klant</a:t>
-                </a:r>
-                <a:r>
-                  <a:rPr lang="en-US" b="1" dirty="0" smtClean="0"/>
-                  <a:t> </a:t>
-                </a:r>
-                <a:r>
-                  <a:rPr lang="en-US" b="1" dirty="0" err="1" smtClean="0"/>
-                  <a:t>wordt</a:t>
-                </a:r>
-                <a:r>
-                  <a:rPr lang="en-US" b="1" dirty="0" smtClean="0"/>
-                  <a:t> </a:t>
-                </a:r>
-                <a:r>
-                  <a:rPr lang="en-US" b="1" dirty="0" err="1" smtClean="0"/>
-                  <a:t>weergegeven</a:t>
-                </a:r>
-                <a:r>
-                  <a:rPr lang="en-US" b="1" dirty="0" smtClean="0"/>
-                  <a:t> door de </a:t>
-                </a:r>
-                <a:r>
-                  <a:rPr lang="en-US" b="1" dirty="0" err="1" smtClean="0"/>
-                  <a:t>kansvariabele</a:t>
-                </a:r>
-                <a:r>
-                  <a:rPr lang="en-US" b="1" dirty="0" smtClean="0"/>
-                  <a:t> </a:t>
+                  <a:rPr lang="en-US" sz="2400" dirty="0" err="1" smtClean="0"/>
+                  <a:t>sommen</a:t>
+                </a:r>
+                <a:r>
+                  <a:rPr lang="en-US" sz="2400" dirty="0" smtClean="0"/>
+                  <a:t>/</a:t>
+                </a:r>
+                <a:r>
+                  <a:rPr lang="en-US" sz="2400" dirty="0" err="1" smtClean="0"/>
+                  <a:t>gemiddelden</a:t>
+                </a:r>
+                <a:r>
+                  <a:rPr lang="en-US" sz="2400" dirty="0" smtClean="0"/>
+                  <a:t> </a:t>
+                </a:r>
+                <a:r>
+                  <a:rPr lang="en-US" sz="2400" dirty="0" err="1" smtClean="0"/>
+                  <a:t>bepalen</a:t>
+                </a:r>
+                <a:r>
+                  <a:rPr lang="en-US" sz="2400" dirty="0" smtClean="0"/>
+                  <a:t> is </a:t>
+                </a:r>
+                <a:r>
+                  <a:rPr lang="en-US" sz="2400" dirty="0" err="1" smtClean="0"/>
+                  <a:t>zeer</a:t>
+                </a:r>
+                <a:r>
+                  <a:rPr lang="en-US" sz="2400" dirty="0" smtClean="0"/>
+                  <a:t> complex / </a:t>
+                </a:r>
+                <a:r>
+                  <a:rPr lang="en-US" sz="2400" dirty="0" err="1" smtClean="0"/>
+                  <a:t>onmogelijk</a:t>
+                </a:r>
+                <a:r>
+                  <a:rPr lang="en-US" sz="2400" dirty="0" smtClean="0"/>
+                  <a:t>.</a:t>
+                </a:r>
+              </a:p>
+              <a:p>
+                <a:pPr marL="717550" lvl="1" indent="-342900">
+                  <a:buFont typeface="Arial" panose="020B0604020202020204" pitchFamily="34" charset="0"/>
+                  <a:buChar char="•"/>
+                </a:pPr>
+                <a:r>
+                  <a:rPr lang="nl-NL" sz="2000" b="0" dirty="0" smtClean="0"/>
+                  <a:t>Vereist het </a:t>
+                </a:r>
+                <a:r>
+                  <a:rPr lang="nl-NL" sz="2000" dirty="0"/>
+                  <a:t>d</a:t>
+                </a:r>
+                <a:r>
+                  <a:rPr lang="nl-NL" sz="2000" dirty="0" smtClean="0"/>
+                  <a:t>oorrekenen van </a:t>
                 </a:r>
                 <a14:m>
                   <m:oMath xmlns:m="http://schemas.openxmlformats.org/officeDocument/2006/math">
                     <m:r>
-                      <a:rPr lang="en-US" b="1" i="1" smtClean="0">
+                      <a:rPr lang="nl-NL" sz="2000" b="0" i="1" smtClean="0">
                         <a:latin typeface="Cambria Math" panose="02040503050406030204" pitchFamily="18" charset="0"/>
                       </a:rPr>
-                      <m:t>𝑿</m:t>
-                    </m:r>
-                    <m:r>
-                      <a:rPr lang="en-US" b="1" i="1" smtClean="0">
-                        <a:latin typeface="Cambria Math" panose="02040503050406030204" pitchFamily="18" charset="0"/>
-                      </a:rPr>
-                      <m:t>.</m:t>
+                      <m:t>𝑛</m:t>
                     </m:r>
                   </m:oMath>
                 </a14:m>
                 <a:r>
-                  <a:rPr lang="en-US" b="1" dirty="0" smtClean="0"/>
-                  <a:t> Op </a:t>
-                </a:r>
-                <a:r>
-                  <a:rPr lang="en-US" b="1" dirty="0" err="1" smtClean="0"/>
-                  <a:t>grond</a:t>
-                </a:r>
-                <a:r>
-                  <a:rPr lang="en-US" b="1" dirty="0" smtClean="0"/>
-                  <a:t> van </a:t>
-                </a:r>
-                <a:r>
-                  <a:rPr lang="en-US" b="1" dirty="0" err="1" smtClean="0"/>
-                  <a:t>ervaring</a:t>
-                </a:r>
-                <a:r>
-                  <a:rPr lang="en-US" b="1" dirty="0" smtClean="0"/>
-                  <a:t> is </a:t>
-                </a:r>
-                <a:r>
-                  <a:rPr lang="en-US" b="1" dirty="0" err="1" smtClean="0"/>
-                  <a:t>bekend</a:t>
-                </a:r>
-                <a:r>
-                  <a:rPr lang="en-US" b="1" dirty="0" smtClean="0"/>
-                  <a:t> </a:t>
-                </a:r>
-                <a:r>
-                  <a:rPr lang="en-US" b="1" dirty="0" err="1" smtClean="0"/>
-                  <a:t>dat</a:t>
-                </a:r>
-                <a:r>
-                  <a:rPr lang="en-US" b="1" dirty="0" smtClean="0"/>
+                  <a:rPr lang="en-US" sz="2000" dirty="0" smtClean="0"/>
+                  <a:t>-</a:t>
+                </a:r>
+                <a:r>
+                  <a:rPr lang="en-US" sz="2000" dirty="0" err="1" smtClean="0"/>
+                  <a:t>voudige</a:t>
+                </a:r>
+                <a:r>
+                  <a:rPr lang="en-US" sz="2000" dirty="0" smtClean="0"/>
+                  <a:t> </a:t>
+                </a:r>
+                <a:r>
+                  <a:rPr lang="en-US" sz="2000" dirty="0" err="1" smtClean="0"/>
+                  <a:t>integralen</a:t>
+                </a:r>
+                <a:r>
+                  <a:rPr lang="en-US" sz="2000" dirty="0" smtClean="0"/>
                   <a:t> </a:t>
                 </a:r>
                 <a14:m>
                   <m:oMath xmlns:m="http://schemas.openxmlformats.org/officeDocument/2006/math">
                     <m:r>
-                      <a:rPr lang="en-US" b="1" i="1" smtClean="0">
+                      <a:rPr lang="nl-NL" sz="2000" b="0" i="1" smtClean="0">
                         <a:latin typeface="Cambria Math" panose="02040503050406030204" pitchFamily="18" charset="0"/>
                       </a:rPr>
-                      <m:t>𝑿</m:t>
+                      <m:t>…</m:t>
                     </m:r>
                   </m:oMath>
                 </a14:m>
-                <a:r>
-                  <a:rPr lang="en-US" b="1" dirty="0" smtClean="0"/>
-                  <a:t> normaal </a:t>
-                </a:r>
-                <a:r>
-                  <a:rPr lang="en-US" b="1" dirty="0" err="1" smtClean="0"/>
-                  <a:t>verdeeld</a:t>
-                </a:r>
-                <a:r>
-                  <a:rPr lang="en-US" b="1" dirty="0" smtClean="0"/>
-                  <a:t> is met </a:t>
-                </a:r>
-                <a14:m>
-                  <m:oMath xmlns:m="http://schemas.openxmlformats.org/officeDocument/2006/math">
-                    <m:r>
-                      <a:rPr lang="en-US" b="1" i="1" smtClean="0">
-                        <a:latin typeface="Cambria Math" panose="02040503050406030204" pitchFamily="18" charset="0"/>
-                      </a:rPr>
-                      <m:t>𝝁</m:t>
-                    </m:r>
-                    <m:r>
-                      <a:rPr lang="en-US" b="1" i="1" smtClean="0">
-                        <a:latin typeface="Cambria Math" panose="02040503050406030204" pitchFamily="18" charset="0"/>
-                      </a:rPr>
-                      <m:t>=</m:t>
-                    </m:r>
-                    <m:r>
-                      <a:rPr lang="en-US" b="1" i="1" smtClean="0">
-                        <a:latin typeface="Cambria Math" panose="02040503050406030204" pitchFamily="18" charset="0"/>
-                      </a:rPr>
-                      <m:t>𝟒𝟓</m:t>
-                    </m:r>
-                  </m:oMath>
-                </a14:m>
-                <a:r>
-                  <a:rPr lang="en-US" b="1" dirty="0" smtClean="0"/>
-                  <a:t> </a:t>
-                </a:r>
-                <a:r>
-                  <a:rPr lang="en-US" b="1" dirty="0" err="1" smtClean="0"/>
-                  <a:t>minuten</a:t>
-                </a:r>
-                <a:r>
-                  <a:rPr lang="en-US" b="1" dirty="0" smtClean="0"/>
-                  <a:t> </a:t>
-                </a:r>
-                <a:r>
-                  <a:rPr lang="en-US" b="1" dirty="0" err="1" smtClean="0"/>
-                  <a:t>en</a:t>
-                </a:r>
-                <a:r>
-                  <a:rPr lang="en-US" b="1" dirty="0" smtClean="0"/>
-                  <a:t> </a:t>
-                </a:r>
-                <a14:m>
-                  <m:oMath xmlns:m="http://schemas.openxmlformats.org/officeDocument/2006/math">
-                    <m:r>
-                      <a:rPr lang="en-US" b="1" i="1" smtClean="0">
-                        <a:latin typeface="Cambria Math" panose="02040503050406030204" pitchFamily="18" charset="0"/>
-                      </a:rPr>
-                      <m:t>𝝈</m:t>
-                    </m:r>
-                    <m:r>
-                      <a:rPr lang="en-US" b="1" i="1" smtClean="0">
-                        <a:latin typeface="Cambria Math" panose="02040503050406030204" pitchFamily="18" charset="0"/>
-                      </a:rPr>
-                      <m:t>=</m:t>
-                    </m:r>
-                    <m:r>
-                      <a:rPr lang="en-US" b="1" i="1" smtClean="0">
-                        <a:latin typeface="Cambria Math" panose="02040503050406030204" pitchFamily="18" charset="0"/>
-                      </a:rPr>
-                      <m:t>𝟏𝟎</m:t>
-                    </m:r>
-                  </m:oMath>
-                </a14:m>
-                <a:r>
-                  <a:rPr lang="en-US" b="1" dirty="0" smtClean="0"/>
-                  <a:t> </a:t>
-                </a:r>
-                <a:r>
-                  <a:rPr lang="en-US" b="1" dirty="0" err="1" smtClean="0"/>
-                  <a:t>minuten</a:t>
-                </a:r>
-                <a:r>
-                  <a:rPr lang="en-US" b="1" dirty="0" smtClean="0"/>
-                  <a:t> (in de </a:t>
-                </a:r>
-                <a:r>
-                  <a:rPr lang="en-US" b="1" dirty="0" err="1" smtClean="0"/>
-                  <a:t>tijdsduur</a:t>
-                </a:r>
-                <a:r>
-                  <a:rPr lang="en-US" b="1" dirty="0" smtClean="0"/>
-                  <a:t> </a:t>
-                </a:r>
-                <a14:m>
-                  <m:oMath xmlns:m="http://schemas.openxmlformats.org/officeDocument/2006/math">
-                    <m:r>
-                      <a:rPr lang="nl-NL" b="1" i="1" smtClean="0">
-                        <a:latin typeface="Cambria Math" panose="02040503050406030204" pitchFamily="18" charset="0"/>
-                      </a:rPr>
-                      <m:t>𝑿</m:t>
-                    </m:r>
-                  </m:oMath>
-                </a14:m>
-                <a:r>
-                  <a:rPr lang="en-US" b="1" dirty="0" smtClean="0"/>
-                  <a:t> is </a:t>
-                </a:r>
-                <a:r>
-                  <a:rPr lang="en-US" b="1" dirty="0" err="1" smtClean="0"/>
-                  <a:t>ook</a:t>
-                </a:r>
-                <a:r>
-                  <a:rPr lang="en-US" b="1" dirty="0" smtClean="0"/>
-                  <a:t> de </a:t>
-                </a:r>
-                <a:r>
-                  <a:rPr lang="en-US" b="1" dirty="0" err="1" smtClean="0"/>
-                  <a:t>reistijd</a:t>
-                </a:r>
-                <a:r>
-                  <a:rPr lang="en-US" b="1" dirty="0" smtClean="0"/>
-                  <a:t> </a:t>
-                </a:r>
-                <a:r>
-                  <a:rPr lang="en-US" b="1" dirty="0" err="1" smtClean="0"/>
-                  <a:t>opgenomen</a:t>
-                </a:r>
-                <a:r>
-                  <a:rPr lang="en-US" b="1" dirty="0" smtClean="0"/>
-                  <a:t>)</a:t>
-                </a:r>
-                <a14:m>
-                  <m:oMath xmlns:m="http://schemas.openxmlformats.org/officeDocument/2006/math">
-                    <m:r>
-                      <a:rPr lang="en-US" b="1" i="1" smtClean="0">
-                        <a:latin typeface="Cambria Math" panose="02040503050406030204" pitchFamily="18" charset="0"/>
-                      </a:rPr>
-                      <m:t>.</m:t>
-                    </m:r>
-                  </m:oMath>
-                </a14:m>
-                <a:r>
-                  <a:rPr lang="en-US" b="1" dirty="0" smtClean="0"/>
-                  <a:t> De </a:t>
-                </a:r>
-                <a:r>
-                  <a:rPr lang="en-US" b="1" dirty="0" err="1" smtClean="0"/>
-                  <a:t>tijdsduren</a:t>
-                </a:r>
-                <a:r>
-                  <a:rPr lang="en-US" b="1" dirty="0" smtClean="0"/>
-                  <a:t> van </a:t>
-                </a:r>
-                <a:r>
-                  <a:rPr lang="en-US" b="1" dirty="0" err="1" smtClean="0"/>
-                  <a:t>bezoeken</a:t>
-                </a:r>
-                <a:r>
-                  <a:rPr lang="en-US" b="1" dirty="0" smtClean="0"/>
-                  <a:t> </a:t>
-                </a:r>
-                <a:r>
-                  <a:rPr lang="en-US" b="1" dirty="0" err="1" smtClean="0"/>
-                  <a:t>zijn</a:t>
-                </a:r>
-                <a:r>
-                  <a:rPr lang="en-US" b="1" dirty="0" smtClean="0"/>
-                  <a:t> </a:t>
-                </a:r>
-                <a:r>
-                  <a:rPr lang="en-US" b="1" dirty="0" err="1" smtClean="0"/>
-                  <a:t>onderling</a:t>
-                </a:r>
-                <a:r>
-                  <a:rPr lang="en-US" b="1" dirty="0" smtClean="0"/>
-                  <a:t> </a:t>
-                </a:r>
-                <a:r>
-                  <a:rPr lang="en-US" b="1" dirty="0" err="1" smtClean="0"/>
-                  <a:t>onafhankelijk</a:t>
-                </a:r>
-                <a:r>
-                  <a:rPr lang="en-US" b="1" dirty="0" smtClean="0"/>
-                  <a:t>.</a:t>
-                </a:r>
+                <a:endParaRPr lang="nl-NL" sz="2000" b="0" dirty="0" smtClean="0"/>
               </a:p>
               <a:p>
-                <a:pPr marL="457200" indent="-457200" eaLnBrk="1" hangingPunct="1">
-                  <a:buAutoNum type="alphaLcParenR"/>
+                <a:pPr marL="717550" lvl="1" indent="-342900">
+                  <a:buFont typeface="Arial" panose="020B0604020202020204" pitchFamily="34" charset="0"/>
+                  <a:buChar char="•"/>
                 </a:pPr>
                 <a:r>
-                  <a:rPr lang="en-US" b="1" dirty="0" smtClean="0"/>
-                  <a:t>Hoe </a:t>
-                </a:r>
-                <a:r>
-                  <a:rPr lang="en-US" b="1" dirty="0" err="1" smtClean="0"/>
-                  <a:t>groot</a:t>
-                </a:r>
-                <a:r>
-                  <a:rPr lang="en-US" b="1" dirty="0" smtClean="0"/>
-                  <a:t> is de </a:t>
-                </a:r>
-                <a:r>
-                  <a:rPr lang="en-US" b="1" dirty="0" err="1" smtClean="0"/>
-                  <a:t>kans</a:t>
-                </a:r>
-                <a:r>
-                  <a:rPr lang="en-US" b="1" dirty="0" smtClean="0"/>
-                  <a:t> </a:t>
-                </a:r>
-                <a:r>
-                  <a:rPr lang="en-US" b="1" dirty="0" err="1" smtClean="0"/>
+                  <a:rPr lang="en-US" sz="2000" dirty="0" smtClean="0"/>
+                  <a:t>CLS </a:t>
+                </a:r>
+                <a:r>
+                  <a:rPr lang="en-US" sz="2000" dirty="0" err="1" smtClean="0"/>
+                  <a:t>zegt</a:t>
+                </a:r>
+                <a:r>
+                  <a:rPr lang="en-US" sz="2000" dirty="0" smtClean="0"/>
+                  <a:t> </a:t>
+                </a:r>
+                <a:r>
+                  <a:rPr lang="en-US" sz="2000" dirty="0" err="1" smtClean="0"/>
                   <a:t>dat</a:t>
                 </a:r>
                 <a:r>
-                  <a:rPr lang="en-US" b="1" dirty="0" smtClean="0"/>
-                  <a:t> </a:t>
-                </a:r>
-                <a:r>
-                  <a:rPr lang="en-US" b="1" dirty="0" err="1" smtClean="0"/>
-                  <a:t>een</a:t>
-                </a:r>
-                <a:r>
-                  <a:rPr lang="en-US" b="1" dirty="0" smtClean="0"/>
-                  <a:t> </a:t>
-                </a:r>
-                <a:r>
-                  <a:rPr lang="en-US" b="1" dirty="0" err="1" smtClean="0"/>
-                  <a:t>willekeurig</a:t>
-                </a:r>
-                <a:r>
-                  <a:rPr lang="en-US" b="1" dirty="0" smtClean="0"/>
-                  <a:t> </a:t>
-                </a:r>
-                <a:r>
-                  <a:rPr lang="en-US" b="1" dirty="0" err="1" smtClean="0"/>
-                  <a:t>bezoek</a:t>
-                </a:r>
-                <a:r>
-                  <a:rPr lang="en-US" b="1" dirty="0" smtClean="0"/>
-                  <a:t> </a:t>
-                </a:r>
-                <a:r>
-                  <a:rPr lang="en-US" b="1" dirty="0" err="1" smtClean="0"/>
-                  <a:t>meer</a:t>
-                </a:r>
-                <a:r>
-                  <a:rPr lang="en-US" b="1" dirty="0" smtClean="0"/>
-                  <a:t> </a:t>
-                </a:r>
-                <a:r>
-                  <a:rPr lang="en-US" b="1" dirty="0" err="1" smtClean="0"/>
-                  <a:t>dan</a:t>
-                </a:r>
-                <a:r>
-                  <a:rPr lang="en-US" b="1" dirty="0" smtClean="0"/>
-                  <a:t> </a:t>
-                </a:r>
-                <a14:m>
-                  <m:oMath xmlns:m="http://schemas.openxmlformats.org/officeDocument/2006/math">
-                    <m:r>
-                      <a:rPr lang="en-US" b="1" i="1" dirty="0" smtClean="0">
-                        <a:latin typeface="Cambria Math" panose="02040503050406030204" pitchFamily="18" charset="0"/>
-                      </a:rPr>
-                      <m:t>𝟔𝟎</m:t>
-                    </m:r>
-                  </m:oMath>
-                </a14:m>
-                <a:r>
-                  <a:rPr lang="en-US" b="1" dirty="0" smtClean="0"/>
-                  <a:t> </a:t>
-                </a:r>
-                <a:r>
-                  <a:rPr lang="en-US" b="1" dirty="0" err="1" smtClean="0"/>
-                  <a:t>minuten</a:t>
-                </a:r>
-                <a:r>
-                  <a:rPr lang="en-US" b="1" dirty="0" smtClean="0"/>
-                  <a:t> </a:t>
-                </a:r>
-                <a:r>
-                  <a:rPr lang="en-US" b="1" dirty="0" err="1" smtClean="0"/>
-                  <a:t>vergt</a:t>
-                </a:r>
-                <a:r>
-                  <a:rPr lang="en-US" b="1" dirty="0" smtClean="0"/>
-                  <a:t>?</a:t>
-                </a:r>
+                  <a:rPr lang="en-US" sz="2000" dirty="0" smtClean="0"/>
+                  <a:t> we in </a:t>
+                </a:r>
+                <a:r>
+                  <a:rPr lang="en-US" sz="2000" dirty="0" err="1" smtClean="0"/>
+                  <a:t>veel</a:t>
+                </a:r>
+                <a:r>
+                  <a:rPr lang="en-US" sz="2000" dirty="0" smtClean="0"/>
+                  <a:t> </a:t>
+                </a:r>
+                <a:r>
+                  <a:rPr lang="en-US" sz="2000" dirty="0" err="1" smtClean="0"/>
+                  <a:t>gevallen</a:t>
+                </a:r>
+                <a:r>
+                  <a:rPr lang="en-US" sz="2000" dirty="0" smtClean="0"/>
+                  <a:t> de </a:t>
+                </a:r>
+                <a:r>
+                  <a:rPr lang="en-US" sz="2000" dirty="0" err="1" smtClean="0"/>
+                  <a:t>normale</a:t>
+                </a:r>
+                <a:r>
+                  <a:rPr lang="en-US" sz="2000" dirty="0" smtClean="0"/>
+                  <a:t> </a:t>
+                </a:r>
+                <a:r>
+                  <a:rPr lang="en-US" sz="2000" dirty="0" err="1" smtClean="0"/>
+                  <a:t>verdeling</a:t>
+                </a:r>
+                <a:r>
+                  <a:rPr lang="en-US" sz="2000" dirty="0" smtClean="0"/>
+                  <a:t> </a:t>
+                </a:r>
+                <a:r>
+                  <a:rPr lang="en-US" sz="2000" dirty="0" err="1" smtClean="0"/>
+                  <a:t>kunnen</a:t>
+                </a:r>
+                <a:r>
+                  <a:rPr lang="en-US" sz="2000" dirty="0" smtClean="0"/>
+                  <a:t> </a:t>
+                </a:r>
+                <a:r>
+                  <a:rPr lang="en-US" sz="2000" dirty="0" err="1" smtClean="0"/>
+                  <a:t>gebruiken</a:t>
+                </a:r>
+                <a:r>
+                  <a:rPr lang="en-US" sz="2000" dirty="0" smtClean="0"/>
+                  <a:t> </a:t>
+                </a:r>
+                <a:r>
+                  <a:rPr lang="en-US" sz="2000" dirty="0" err="1" smtClean="0"/>
+                  <a:t>als</a:t>
+                </a:r>
+                <a:r>
+                  <a:rPr lang="en-US" sz="2000" dirty="0" smtClean="0"/>
+                  <a:t> </a:t>
+                </a:r>
+                <a:r>
+                  <a:rPr lang="en-US" sz="2000" dirty="0" err="1" smtClean="0"/>
+                  <a:t>benadering</a:t>
+                </a:r>
+                <a:endParaRPr lang="en-US" sz="2000" dirty="0" smtClean="0"/>
               </a:p>
               <a:p>
-                <a:pPr eaLnBrk="1" hangingPunct="1"/>
-                <a:endParaRPr lang="en-US" b="1" dirty="0" smtClean="0"/>
+                <a:pPr marL="717550" lvl="1" indent="-342900">
+                  <a:buFont typeface="Arial" panose="020B0604020202020204" pitchFamily="34" charset="0"/>
+                  <a:buChar char="•"/>
+                </a:pPr>
+                <a:endParaRPr lang="en-US" dirty="0" smtClean="0"/>
+              </a:p>
+              <a:p>
+                <a:pPr marL="717550" lvl="1" indent="-342900">
+                  <a:buFont typeface="Arial" panose="020B0604020202020204" pitchFamily="34" charset="0"/>
+                  <a:buChar char="•"/>
+                </a:pPr>
+                <a:endParaRPr lang="en-US" dirty="0" smtClean="0"/>
+              </a:p>
+              <a:p>
+                <a:pPr marL="342900" indent="-342900">
+                  <a:buFont typeface="Arial" panose="020B0604020202020204" pitchFamily="34" charset="0"/>
+                  <a:buChar char="•"/>
+                </a:pPr>
+                <a:r>
+                  <a:rPr lang="en-US" sz="2400" dirty="0" smtClean="0"/>
+                  <a:t>De </a:t>
+                </a:r>
+                <a:r>
+                  <a:rPr lang="en-US" sz="2400" dirty="0" err="1" smtClean="0"/>
+                  <a:t>centrale</a:t>
+                </a:r>
+                <a:r>
+                  <a:rPr lang="en-US" sz="2400" dirty="0" smtClean="0"/>
+                  <a:t> </a:t>
+                </a:r>
+                <a:r>
+                  <a:rPr lang="en-US" sz="2400" dirty="0" err="1" smtClean="0"/>
+                  <a:t>limietstelling</a:t>
+                </a:r>
+                <a:r>
+                  <a:rPr lang="en-US" sz="2400" dirty="0" smtClean="0"/>
+                  <a:t> </a:t>
+                </a:r>
+                <a:r>
+                  <a:rPr lang="en-US" sz="2400" dirty="0" err="1" smtClean="0"/>
+                  <a:t>brengt</a:t>
+                </a:r>
+                <a:r>
+                  <a:rPr lang="en-US" sz="2400" dirty="0" smtClean="0"/>
+                  <a:t> </a:t>
+                </a:r>
+                <a:r>
+                  <a:rPr lang="en-US" sz="2400" dirty="0" err="1" smtClean="0"/>
+                  <a:t>orde</a:t>
+                </a:r>
+                <a:r>
+                  <a:rPr lang="en-US" sz="2400" i="1" dirty="0" smtClean="0"/>
+                  <a:t> </a:t>
+                </a:r>
+                <a:r>
+                  <a:rPr lang="en-US" sz="2400" dirty="0" smtClean="0"/>
+                  <a:t>in de chaos</a:t>
+                </a:r>
+                <a:endParaRPr lang="en-US" sz="2400" i="1" dirty="0" smtClean="0"/>
+              </a:p>
+              <a:p>
+                <a:pPr marL="717550" lvl="1" indent="-342900">
+                  <a:buFont typeface="Arial" panose="020B0604020202020204" pitchFamily="34" charset="0"/>
+                  <a:buChar char="•"/>
+                </a:pPr>
+                <a:r>
+                  <a:rPr lang="en-US" sz="2000" dirty="0" smtClean="0"/>
+                  <a:t>Chaos: </a:t>
+                </a:r>
+                <a:r>
+                  <a:rPr lang="en-US" sz="2000" dirty="0" err="1" smtClean="0"/>
+                  <a:t>verschillende</a:t>
+                </a:r>
+                <a:r>
+                  <a:rPr lang="en-US" sz="2000" dirty="0" smtClean="0"/>
+                  <a:t> </a:t>
+                </a:r>
+                <a:r>
+                  <a:rPr lang="en-US" sz="2000" dirty="0" err="1" smtClean="0"/>
+                  <a:t>kansvariabelen</a:t>
+                </a:r>
+                <a:r>
+                  <a:rPr lang="en-US" sz="2000" dirty="0" smtClean="0"/>
+                  <a:t> </a:t>
+                </a:r>
+                <a:r>
+                  <a:rPr lang="en-US" sz="2000" dirty="0" err="1" smtClean="0"/>
+                  <a:t>volgen</a:t>
+                </a:r>
+                <a:r>
+                  <a:rPr lang="en-US" sz="2000" dirty="0" smtClean="0"/>
+                  <a:t> </a:t>
+                </a:r>
+                <a:r>
+                  <a:rPr lang="en-US" sz="2000" dirty="0" err="1" smtClean="0"/>
+                  <a:t>allerlei</a:t>
+                </a:r>
+                <a:r>
+                  <a:rPr lang="en-US" sz="2000" dirty="0" smtClean="0"/>
+                  <a:t> </a:t>
+                </a:r>
+                <a:r>
+                  <a:rPr lang="en-US" sz="2000" dirty="0" err="1" smtClean="0"/>
+                  <a:t>verschillende</a:t>
+                </a:r>
+                <a:r>
+                  <a:rPr lang="en-US" sz="2000" dirty="0" smtClean="0"/>
+                  <a:t> </a:t>
+                </a:r>
+                <a:r>
+                  <a:rPr lang="en-US" sz="2000" dirty="0" err="1" smtClean="0"/>
+                  <a:t>kansverdelingen</a:t>
+                </a:r>
+                <a:endParaRPr lang="en-US" sz="2000" dirty="0" smtClean="0"/>
+              </a:p>
+              <a:p>
+                <a:pPr marL="717550" lvl="1" indent="-342900">
+                  <a:buFont typeface="Arial" panose="020B0604020202020204" pitchFamily="34" charset="0"/>
+                  <a:buChar char="•"/>
+                </a:pPr>
+                <a:r>
+                  <a:rPr lang="en-US" sz="2000" dirty="0" err="1" smtClean="0"/>
+                  <a:t>Orde</a:t>
+                </a:r>
+                <a:r>
+                  <a:rPr lang="en-US" sz="2000" dirty="0" smtClean="0"/>
+                  <a:t>: </a:t>
+                </a:r>
+                <a:r>
+                  <a:rPr lang="en-US" sz="2000" b="1" dirty="0" err="1" smtClean="0"/>
+                  <a:t>gemiddeld</a:t>
+                </a:r>
+                <a:r>
+                  <a:rPr lang="en-US" sz="2000" dirty="0" smtClean="0"/>
+                  <a:t> </a:t>
+                </a:r>
+                <a:r>
+                  <a:rPr lang="en-US" sz="2000" dirty="0" err="1" smtClean="0"/>
+                  <a:t>volgen</a:t>
+                </a:r>
+                <a:r>
+                  <a:rPr lang="en-US" sz="2000" dirty="0" smtClean="0"/>
+                  <a:t> </a:t>
+                </a:r>
+                <a:r>
+                  <a:rPr lang="en-US" sz="2000" dirty="0" err="1" smtClean="0"/>
+                  <a:t>alle</a:t>
+                </a:r>
+                <a:r>
+                  <a:rPr lang="en-US" sz="2000" dirty="0" smtClean="0"/>
+                  <a:t> </a:t>
+                </a:r>
+                <a:r>
+                  <a:rPr lang="en-US" sz="2000" dirty="0" err="1" smtClean="0"/>
+                  <a:t>kansvariabelen</a:t>
+                </a:r>
+                <a:r>
+                  <a:rPr lang="en-US" sz="2000" dirty="0" smtClean="0"/>
+                  <a:t> </a:t>
+                </a:r>
+                <a:r>
+                  <a:rPr lang="en-US" sz="2000" dirty="0" err="1" smtClean="0"/>
+                  <a:t>hetzelfde</a:t>
+                </a:r>
+                <a:r>
+                  <a:rPr lang="en-US" sz="2000" dirty="0" smtClean="0"/>
+                  <a:t> </a:t>
+                </a:r>
+                <a:r>
+                  <a:rPr lang="en-US" sz="2000" dirty="0" err="1" smtClean="0"/>
+                  <a:t>voorspelbare</a:t>
+                </a:r>
+                <a:r>
+                  <a:rPr lang="en-US" sz="2000" dirty="0" smtClean="0"/>
+                  <a:t> patroon.</a:t>
+                </a:r>
+              </a:p>
+              <a:p>
+                <a:pPr marL="717550" lvl="1" indent="-342900">
+                  <a:buFont typeface="Arial" panose="020B0604020202020204" pitchFamily="34" charset="0"/>
+                  <a:buChar char="•"/>
+                </a:pPr>
+                <a:endParaRPr lang="en-US" sz="2000" dirty="0" smtClean="0"/>
+              </a:p>
+              <a:p>
+                <a:pPr lvl="1" indent="0">
+                  <a:buNone/>
+                </a:pPr>
+                <a:endParaRPr lang="en-US" sz="2000" dirty="0" smtClean="0"/>
+              </a:p>
+              <a:p>
+                <a:pPr marL="342900" indent="-342900">
+                  <a:buFont typeface="Arial" panose="020B0604020202020204" pitchFamily="34" charset="0"/>
+                  <a:buChar char="•"/>
+                </a:pPr>
+                <a:r>
+                  <a:rPr lang="en-US" sz="2400" dirty="0" err="1" smtClean="0"/>
+                  <a:t>Veel</a:t>
+                </a:r>
+                <a:r>
+                  <a:rPr lang="en-US" sz="2400" dirty="0" smtClean="0"/>
+                  <a:t> </a:t>
+                </a:r>
+                <a:r>
+                  <a:rPr lang="en-US" sz="2400" dirty="0" err="1" smtClean="0"/>
+                  <a:t>statistische</a:t>
+                </a:r>
+                <a:r>
+                  <a:rPr lang="en-US" sz="2400" dirty="0" smtClean="0"/>
+                  <a:t> </a:t>
+                </a:r>
+                <a:r>
+                  <a:rPr lang="en-US" sz="2400" dirty="0" err="1" smtClean="0"/>
+                  <a:t>methoden</a:t>
+                </a:r>
+                <a:r>
+                  <a:rPr lang="en-US" sz="2400" dirty="0" smtClean="0"/>
+                  <a:t> </a:t>
+                </a:r>
+                <a:r>
+                  <a:rPr lang="en-US" sz="2400" dirty="0" err="1" smtClean="0"/>
+                  <a:t>leunen</a:t>
+                </a:r>
+                <a:r>
+                  <a:rPr lang="en-US" sz="2400" dirty="0" smtClean="0"/>
+                  <a:t> op de </a:t>
+                </a:r>
+                <a:r>
+                  <a:rPr lang="en-US" sz="2400" dirty="0" err="1" smtClean="0"/>
+                  <a:t>schouders</a:t>
+                </a:r>
+                <a:r>
+                  <a:rPr lang="en-US" sz="2400" dirty="0" smtClean="0"/>
+                  <a:t> van de CLS</a:t>
+                </a:r>
+              </a:p>
+              <a:p>
+                <a:pPr marL="717550" lvl="1" indent="-342900">
+                  <a:buFont typeface="Arial" panose="020B0604020202020204" pitchFamily="34" charset="0"/>
+                  <a:buChar char="•"/>
+                </a:pPr>
+                <a:r>
+                  <a:rPr lang="en-US" sz="2000" dirty="0" err="1" smtClean="0"/>
+                  <a:t>Stel</a:t>
+                </a:r>
+                <a:r>
+                  <a:rPr lang="en-US" sz="2000" dirty="0" smtClean="0"/>
+                  <a:t> we </a:t>
+                </a:r>
+                <a:r>
+                  <a:rPr lang="en-US" sz="2000" dirty="0" err="1" smtClean="0"/>
+                  <a:t>hebben</a:t>
+                </a:r>
+                <a:r>
+                  <a:rPr lang="en-US" sz="2000" dirty="0" smtClean="0"/>
+                  <a:t> </a:t>
+                </a:r>
+                <a:r>
+                  <a:rPr lang="en-US" sz="2000" dirty="0" err="1" smtClean="0"/>
+                  <a:t>steekproefdata</a:t>
+                </a:r>
+                <a:r>
+                  <a:rPr lang="en-US" sz="2000" dirty="0" smtClean="0"/>
+                  <a:t> </a:t>
+                </a:r>
+                <a:r>
+                  <a:rPr lang="en-US" sz="2000" dirty="0" err="1" smtClean="0"/>
+                  <a:t>verzameld</a:t>
+                </a:r>
+                <a:r>
+                  <a:rPr lang="en-US" sz="2000" dirty="0" smtClean="0"/>
+                  <a:t> </a:t>
+                </a:r>
+                <a:r>
+                  <a:rPr lang="en-US" sz="2000" dirty="0" err="1" smtClean="0"/>
+                  <a:t>en</a:t>
+                </a:r>
+                <a:r>
+                  <a:rPr lang="en-US" sz="2000" dirty="0" smtClean="0"/>
+                  <a:t> </a:t>
+                </a:r>
+                <a:r>
+                  <a:rPr lang="en-US" sz="2000" dirty="0" err="1" smtClean="0"/>
+                  <a:t>willen</a:t>
+                </a:r>
+                <a:r>
+                  <a:rPr lang="en-US" sz="2000" dirty="0" smtClean="0"/>
+                  <a:t> </a:t>
+                </a:r>
+                <a:r>
+                  <a:rPr lang="en-US" sz="2000" dirty="0" err="1" smtClean="0"/>
+                  <a:t>iets</a:t>
+                </a:r>
+                <a:r>
+                  <a:rPr lang="en-US" sz="2000" dirty="0" smtClean="0"/>
+                  <a:t> </a:t>
+                </a:r>
+                <a:r>
+                  <a:rPr lang="en-US" sz="2000" dirty="0" err="1" smtClean="0"/>
+                  <a:t>zeggen</a:t>
+                </a:r>
+                <a:r>
+                  <a:rPr lang="en-US" sz="2000" dirty="0" smtClean="0"/>
+                  <a:t> over het </a:t>
+                </a:r>
+                <a:r>
+                  <a:rPr lang="en-US" sz="2000" dirty="0" err="1" smtClean="0"/>
+                  <a:t>populatiegemiddelde</a:t>
+                </a:r>
+                <a:r>
+                  <a:rPr lang="en-US" sz="2000" dirty="0" smtClean="0"/>
+                  <a:t>.</a:t>
+                </a:r>
+              </a:p>
+              <a:p>
+                <a:pPr marL="717550" lvl="1" indent="-342900">
+                  <a:buFont typeface="Arial" panose="020B0604020202020204" pitchFamily="34" charset="0"/>
+                  <a:buChar char="•"/>
+                </a:pPr>
+                <a:r>
+                  <a:rPr lang="en-US" sz="2000" dirty="0" smtClean="0"/>
+                  <a:t>CLS </a:t>
+                </a:r>
+                <a:r>
+                  <a:rPr lang="en-US" sz="2000" dirty="0" err="1" smtClean="0"/>
+                  <a:t>geeft</a:t>
+                </a:r>
+                <a:r>
+                  <a:rPr lang="en-US" sz="2000" dirty="0" smtClean="0"/>
+                  <a:t> </a:t>
+                </a:r>
+                <a:r>
+                  <a:rPr lang="en-US" sz="2000" dirty="0" err="1" smtClean="0"/>
+                  <a:t>ons</a:t>
+                </a:r>
+                <a:r>
+                  <a:rPr lang="en-US" sz="2000" dirty="0" smtClean="0"/>
+                  <a:t> nu </a:t>
+                </a:r>
+                <a:r>
+                  <a:rPr lang="en-US" sz="2000" dirty="0" err="1" smtClean="0"/>
+                  <a:t>een</a:t>
+                </a:r>
+                <a:r>
+                  <a:rPr lang="en-US" sz="2000" dirty="0" smtClean="0"/>
+                  <a:t> </a:t>
+                </a:r>
+                <a:r>
+                  <a:rPr lang="en-US" sz="2000" dirty="0" err="1" smtClean="0"/>
+                  <a:t>manier</a:t>
+                </a:r>
+                <a:r>
+                  <a:rPr lang="en-US" sz="2000" dirty="0" smtClean="0"/>
+                  <a:t> om </a:t>
+                </a:r>
+                <a:r>
+                  <a:rPr lang="en-US" sz="2000" dirty="0" err="1" smtClean="0"/>
+                  <a:t>een</a:t>
+                </a:r>
+                <a:r>
+                  <a:rPr lang="en-US" sz="2000" dirty="0" smtClean="0"/>
+                  <a:t> </a:t>
+                </a:r>
+                <a:r>
+                  <a:rPr lang="en-US" sz="2000" dirty="0" err="1" smtClean="0"/>
+                  <a:t>schatting</a:t>
+                </a:r>
+                <a:r>
+                  <a:rPr lang="en-US" sz="2000" dirty="0" smtClean="0"/>
+                  <a:t> op basis van </a:t>
+                </a:r>
+                <a:r>
+                  <a:rPr lang="en-US" sz="2000" dirty="0" err="1" smtClean="0"/>
+                  <a:t>deze</a:t>
+                </a:r>
+                <a:r>
+                  <a:rPr lang="en-US" sz="2000" dirty="0" smtClean="0"/>
+                  <a:t> </a:t>
+                </a:r>
+                <a:r>
+                  <a:rPr lang="en-US" sz="2000" dirty="0" err="1" smtClean="0"/>
+                  <a:t>steekproef</a:t>
+                </a:r>
+                <a:r>
+                  <a:rPr lang="en-US" sz="2000" dirty="0" smtClean="0"/>
+                  <a:t> </a:t>
+                </a:r>
+                <a:r>
+                  <a:rPr lang="en-US" sz="2000" dirty="0" err="1" smtClean="0"/>
+                  <a:t>te</a:t>
+                </a:r>
+                <a:r>
+                  <a:rPr lang="en-US" sz="2000" dirty="0" smtClean="0"/>
+                  <a:t> </a:t>
+                </a:r>
+                <a:r>
+                  <a:rPr lang="en-US" sz="2000" dirty="0" err="1" smtClean="0"/>
+                  <a:t>kwantificeren</a:t>
+                </a:r>
+                <a:r>
+                  <a:rPr lang="en-US" sz="2000" dirty="0" smtClean="0"/>
+                  <a:t>.</a:t>
+                </a:r>
+              </a:p>
+              <a:p>
+                <a:pPr marL="342900" indent="-342900">
+                  <a:buFont typeface="Arial" panose="020B0604020202020204" pitchFamily="34" charset="0"/>
+                  <a:buChar char="•"/>
+                </a:pPr>
+                <a:endParaRPr lang="en-US" sz="2000" dirty="0" smtClean="0"/>
               </a:p>
             </p:txBody>
           </p:sp>
         </mc:Choice>
-        <mc:Fallback>
+        <mc:Fallback xmlns="">
           <p:sp>
             <p:nvSpPr>
               <p:cNvPr id="6147" name="Content Placeholder 2"/>
@@ -9630,12 +9726,12 @@
             <p:spPr>
               <a:xfrm>
                 <a:off x="812800" y="1773238"/>
-                <a:ext cx="10539784" cy="4246562"/>
+                <a:ext cx="10827816" cy="4246562"/>
               </a:xfrm>
               <a:blipFill>
                 <a:blip r:embed="rId2"/>
                 <a:stretch>
-                  <a:fillRect l="-1619" t="-2009"/>
+                  <a:fillRect l="-1576" t="-2296" b="-7174"/>
                 </a:stretch>
               </a:blipFill>
             </p:spPr>
@@ -9690,7 +9786,7 @@
     </p:spTree>
     <p:extLst>
       <p:ext uri="{BB962C8B-B14F-4D97-AF65-F5344CB8AC3E}">
-        <p14:creationId xmlns:p14="http://schemas.microsoft.com/office/powerpoint/2010/main" val="1796914669"/>
+        <p14:creationId xmlns:p14="http://schemas.microsoft.com/office/powerpoint/2010/main" val="1298405984"/>
       </p:ext>
     </p:extLst>
   </p:cSld>
@@ -9756,8 +9852,636 @@
           </a:p>
         </p:txBody>
       </p:sp>
-      <mc:AlternateContent xmlns:mc="http://schemas.openxmlformats.org/markup-compatibility/2006">
-        <mc:Choice xmlns:a14="http://schemas.microsoft.com/office/drawing/2010/main" Requires="a14">
+      <mc:AlternateContent xmlns:mc="http://schemas.openxmlformats.org/markup-compatibility/2006" xmlns:a14="http://schemas.microsoft.com/office/drawing/2010/main">
+        <mc:Choice Requires="a14">
+          <p:sp>
+            <p:nvSpPr>
+              <p:cNvPr id="6147" name="Content Placeholder 2"/>
+              <p:cNvSpPr>
+                <a:spLocks noGrp="1"/>
+              </p:cNvSpPr>
+              <p:nvPr>
+                <p:ph idx="1"/>
+              </p:nvPr>
+            </p:nvSpPr>
+            <p:spPr>
+              <a:xfrm>
+                <a:off x="812800" y="1773238"/>
+                <a:ext cx="10539784" cy="4246562"/>
+              </a:xfrm>
+            </p:spPr>
+            <p:txBody>
+              <a:bodyPr/>
+              <a:lstStyle/>
+              <a:p>
+                <a:pPr eaLnBrk="1" hangingPunct="1"/>
+                <a:r>
+                  <a:rPr lang="en-US" b="1" dirty="0" smtClean="0"/>
+                  <a:t>De </a:t>
+                </a:r>
+                <a:r>
+                  <a:rPr lang="en-US" b="1" dirty="0" err="1" smtClean="0"/>
+                  <a:t>tijd</a:t>
+                </a:r>
+                <a:r>
+                  <a:rPr lang="en-US" b="1" dirty="0"/>
+                  <a:t> </a:t>
+                </a:r>
+                <a:r>
+                  <a:rPr lang="en-US" b="1" dirty="0" smtClean="0"/>
+                  <a:t>die </a:t>
+                </a:r>
+                <a:r>
+                  <a:rPr lang="en-US" b="1" dirty="0" err="1" smtClean="0"/>
+                  <a:t>een</a:t>
+                </a:r>
+                <a:r>
+                  <a:rPr lang="en-US" b="1" dirty="0" smtClean="0"/>
+                  <a:t> </a:t>
+                </a:r>
+                <a:r>
+                  <a:rPr lang="en-US" b="1" dirty="0" err="1" smtClean="0"/>
+                  <a:t>vertegenwoordiger</a:t>
+                </a:r>
+                <a:r>
+                  <a:rPr lang="en-US" b="1" dirty="0" smtClean="0"/>
+                  <a:t> </a:t>
+                </a:r>
+                <a:r>
+                  <a:rPr lang="en-US" b="1" dirty="0" err="1" smtClean="0"/>
+                  <a:t>nodig</a:t>
+                </a:r>
+                <a:r>
+                  <a:rPr lang="en-US" b="1" dirty="0" smtClean="0"/>
+                  <a:t> </a:t>
+                </a:r>
+                <a:r>
+                  <a:rPr lang="en-US" b="1" dirty="0" err="1" smtClean="0"/>
+                  <a:t>heeft</a:t>
+                </a:r>
+                <a:r>
+                  <a:rPr lang="en-US" b="1" dirty="0" smtClean="0"/>
+                  <a:t> </a:t>
+                </a:r>
+                <a:r>
+                  <a:rPr lang="en-US" b="1" dirty="0" err="1" smtClean="0"/>
+                  <a:t>voor</a:t>
+                </a:r>
+                <a:r>
+                  <a:rPr lang="en-US" b="1" dirty="0" smtClean="0"/>
+                  <a:t> het </a:t>
+                </a:r>
+                <a:r>
+                  <a:rPr lang="en-US" b="1" dirty="0" err="1" smtClean="0"/>
+                  <a:t>bezoeken</a:t>
+                </a:r>
+                <a:r>
+                  <a:rPr lang="en-US" b="1" dirty="0" smtClean="0"/>
+                  <a:t> van </a:t>
+                </a:r>
+                <a:r>
+                  <a:rPr lang="en-US" b="1" dirty="0" err="1" smtClean="0"/>
+                  <a:t>een</a:t>
+                </a:r>
+                <a:r>
+                  <a:rPr lang="en-US" b="1" dirty="0" smtClean="0"/>
+                  <a:t> </a:t>
+                </a:r>
+                <a:r>
+                  <a:rPr lang="en-US" b="1" dirty="0" err="1" smtClean="0"/>
+                  <a:t>klant</a:t>
+                </a:r>
+                <a:r>
+                  <a:rPr lang="en-US" b="1" dirty="0" smtClean="0"/>
+                  <a:t> </a:t>
+                </a:r>
+                <a:r>
+                  <a:rPr lang="en-US" b="1" dirty="0" err="1" smtClean="0"/>
+                  <a:t>wordt</a:t>
+                </a:r>
+                <a:r>
+                  <a:rPr lang="en-US" b="1" dirty="0" smtClean="0"/>
+                  <a:t> </a:t>
+                </a:r>
+                <a:r>
+                  <a:rPr lang="en-US" b="1" dirty="0" err="1" smtClean="0"/>
+                  <a:t>weergegeven</a:t>
+                </a:r>
+                <a:r>
+                  <a:rPr lang="en-US" b="1" dirty="0" smtClean="0"/>
+                  <a:t> door de </a:t>
+                </a:r>
+                <a:r>
+                  <a:rPr lang="en-US" b="1" dirty="0" err="1" smtClean="0"/>
+                  <a:t>kansvariabele</a:t>
+                </a:r>
+                <a:r>
+                  <a:rPr lang="en-US" b="1" dirty="0" smtClean="0"/>
+                  <a:t> </a:t>
+                </a:r>
+                <a14:m>
+                  <m:oMath xmlns:m="http://schemas.openxmlformats.org/officeDocument/2006/math">
+                    <m:r>
+                      <a:rPr lang="en-US" b="1" i="1" smtClean="0">
+                        <a:latin typeface="Cambria Math" panose="02040503050406030204" pitchFamily="18" charset="0"/>
+                      </a:rPr>
+                      <m:t>𝑿</m:t>
+                    </m:r>
+                    <m:r>
+                      <a:rPr lang="en-US" b="1" i="1" smtClean="0">
+                        <a:latin typeface="Cambria Math" panose="02040503050406030204" pitchFamily="18" charset="0"/>
+                      </a:rPr>
+                      <m:t>.</m:t>
+                    </m:r>
+                  </m:oMath>
+                </a14:m>
+                <a:r>
+                  <a:rPr lang="en-US" b="1" dirty="0" smtClean="0"/>
+                  <a:t> Op </a:t>
+                </a:r>
+                <a:r>
+                  <a:rPr lang="en-US" b="1" dirty="0" err="1" smtClean="0"/>
+                  <a:t>grond</a:t>
+                </a:r>
+                <a:r>
+                  <a:rPr lang="en-US" b="1" dirty="0" smtClean="0"/>
+                  <a:t> van </a:t>
+                </a:r>
+                <a:r>
+                  <a:rPr lang="en-US" b="1" dirty="0" err="1" smtClean="0"/>
+                  <a:t>ervaring</a:t>
+                </a:r>
+                <a:r>
+                  <a:rPr lang="en-US" b="1" dirty="0" smtClean="0"/>
+                  <a:t> is </a:t>
+                </a:r>
+                <a:r>
+                  <a:rPr lang="en-US" b="1" dirty="0" err="1" smtClean="0"/>
+                  <a:t>bekend</a:t>
+                </a:r>
+                <a:r>
+                  <a:rPr lang="en-US" b="1" dirty="0" smtClean="0"/>
+                  <a:t> </a:t>
+                </a:r>
+                <a:r>
+                  <a:rPr lang="en-US" b="1" dirty="0" err="1" smtClean="0"/>
+                  <a:t>dat</a:t>
+                </a:r>
+                <a:r>
+                  <a:rPr lang="en-US" b="1" dirty="0" smtClean="0"/>
+                  <a:t> </a:t>
+                </a:r>
+                <a14:m>
+                  <m:oMath xmlns:m="http://schemas.openxmlformats.org/officeDocument/2006/math">
+                    <m:r>
+                      <a:rPr lang="en-US" b="1" i="1" smtClean="0">
+                        <a:latin typeface="Cambria Math" panose="02040503050406030204" pitchFamily="18" charset="0"/>
+                      </a:rPr>
+                      <m:t>𝑿</m:t>
+                    </m:r>
+                  </m:oMath>
+                </a14:m>
+                <a:r>
+                  <a:rPr lang="en-US" b="1" dirty="0" smtClean="0"/>
+                  <a:t> normaal </a:t>
+                </a:r>
+                <a:r>
+                  <a:rPr lang="en-US" b="1" dirty="0" err="1" smtClean="0"/>
+                  <a:t>verdeeld</a:t>
+                </a:r>
+                <a:r>
+                  <a:rPr lang="en-US" b="1" dirty="0" smtClean="0"/>
+                  <a:t> is met </a:t>
+                </a:r>
+                <a14:m>
+                  <m:oMath xmlns:m="http://schemas.openxmlformats.org/officeDocument/2006/math">
+                    <m:r>
+                      <a:rPr lang="en-US" b="1" i="1" smtClean="0">
+                        <a:latin typeface="Cambria Math" panose="02040503050406030204" pitchFamily="18" charset="0"/>
+                      </a:rPr>
+                      <m:t>𝝁</m:t>
+                    </m:r>
+                    <m:r>
+                      <a:rPr lang="en-US" b="1" i="1" smtClean="0">
+                        <a:latin typeface="Cambria Math" panose="02040503050406030204" pitchFamily="18" charset="0"/>
+                      </a:rPr>
+                      <m:t>=</m:t>
+                    </m:r>
+                    <m:r>
+                      <a:rPr lang="en-US" b="1" i="1" smtClean="0">
+                        <a:latin typeface="Cambria Math" panose="02040503050406030204" pitchFamily="18" charset="0"/>
+                      </a:rPr>
+                      <m:t>𝟒𝟓</m:t>
+                    </m:r>
+                  </m:oMath>
+                </a14:m>
+                <a:r>
+                  <a:rPr lang="en-US" b="1" dirty="0" smtClean="0"/>
+                  <a:t> </a:t>
+                </a:r>
+                <a:r>
+                  <a:rPr lang="en-US" b="1" dirty="0" err="1" smtClean="0"/>
+                  <a:t>minuten</a:t>
+                </a:r>
+                <a:r>
+                  <a:rPr lang="en-US" b="1" dirty="0" smtClean="0"/>
+                  <a:t> </a:t>
+                </a:r>
+                <a:r>
+                  <a:rPr lang="en-US" b="1" dirty="0" err="1" smtClean="0"/>
+                  <a:t>en</a:t>
+                </a:r>
+                <a:r>
+                  <a:rPr lang="en-US" b="1" dirty="0" smtClean="0"/>
+                  <a:t> </a:t>
+                </a:r>
+                <a14:m>
+                  <m:oMath xmlns:m="http://schemas.openxmlformats.org/officeDocument/2006/math">
+                    <m:r>
+                      <a:rPr lang="en-US" b="1" i="1" smtClean="0">
+                        <a:latin typeface="Cambria Math" panose="02040503050406030204" pitchFamily="18" charset="0"/>
+                      </a:rPr>
+                      <m:t>𝝈</m:t>
+                    </m:r>
+                    <m:r>
+                      <a:rPr lang="en-US" b="1" i="1" smtClean="0">
+                        <a:latin typeface="Cambria Math" panose="02040503050406030204" pitchFamily="18" charset="0"/>
+                      </a:rPr>
+                      <m:t>=</m:t>
+                    </m:r>
+                    <m:r>
+                      <a:rPr lang="en-US" b="1" i="1" smtClean="0">
+                        <a:latin typeface="Cambria Math" panose="02040503050406030204" pitchFamily="18" charset="0"/>
+                      </a:rPr>
+                      <m:t>𝟏𝟎</m:t>
+                    </m:r>
+                  </m:oMath>
+                </a14:m>
+                <a:r>
+                  <a:rPr lang="en-US" b="1" dirty="0" smtClean="0"/>
+                  <a:t> </a:t>
+                </a:r>
+                <a:r>
+                  <a:rPr lang="en-US" b="1" dirty="0" err="1" smtClean="0"/>
+                  <a:t>minuten</a:t>
+                </a:r>
+                <a:r>
+                  <a:rPr lang="en-US" b="1" dirty="0" smtClean="0"/>
+                  <a:t> (in de </a:t>
+                </a:r>
+                <a:r>
+                  <a:rPr lang="en-US" b="1" dirty="0" err="1" smtClean="0"/>
+                  <a:t>tijdsduur</a:t>
+                </a:r>
+                <a:r>
+                  <a:rPr lang="en-US" b="1" dirty="0" smtClean="0"/>
+                  <a:t> </a:t>
+                </a:r>
+                <a14:m>
+                  <m:oMath xmlns:m="http://schemas.openxmlformats.org/officeDocument/2006/math">
+                    <m:r>
+                      <a:rPr lang="nl-NL" b="1" i="1" smtClean="0">
+                        <a:latin typeface="Cambria Math" panose="02040503050406030204" pitchFamily="18" charset="0"/>
+                      </a:rPr>
+                      <m:t>𝑿</m:t>
+                    </m:r>
+                  </m:oMath>
+                </a14:m>
+                <a:r>
+                  <a:rPr lang="en-US" b="1" dirty="0" smtClean="0"/>
+                  <a:t> is </a:t>
+                </a:r>
+                <a:r>
+                  <a:rPr lang="en-US" b="1" dirty="0" err="1" smtClean="0"/>
+                  <a:t>ook</a:t>
+                </a:r>
+                <a:r>
+                  <a:rPr lang="en-US" b="1" dirty="0" smtClean="0"/>
+                  <a:t> de </a:t>
+                </a:r>
+                <a:r>
+                  <a:rPr lang="en-US" b="1" dirty="0" err="1" smtClean="0"/>
+                  <a:t>reistijd</a:t>
+                </a:r>
+                <a:r>
+                  <a:rPr lang="en-US" b="1" dirty="0" smtClean="0"/>
+                  <a:t> </a:t>
+                </a:r>
+                <a:r>
+                  <a:rPr lang="en-US" b="1" dirty="0" err="1" smtClean="0"/>
+                  <a:t>opgenomen</a:t>
+                </a:r>
+                <a:r>
+                  <a:rPr lang="en-US" b="1" dirty="0" smtClean="0"/>
+                  <a:t>)</a:t>
+                </a:r>
+                <a14:m>
+                  <m:oMath xmlns:m="http://schemas.openxmlformats.org/officeDocument/2006/math">
+                    <m:r>
+                      <a:rPr lang="en-US" b="1" i="1" smtClean="0">
+                        <a:latin typeface="Cambria Math" panose="02040503050406030204" pitchFamily="18" charset="0"/>
+                      </a:rPr>
+                      <m:t>.</m:t>
+                    </m:r>
+                  </m:oMath>
+                </a14:m>
+                <a:r>
+                  <a:rPr lang="en-US" b="1" dirty="0" smtClean="0"/>
+                  <a:t> De </a:t>
+                </a:r>
+                <a:r>
+                  <a:rPr lang="en-US" b="1" dirty="0" err="1" smtClean="0"/>
+                  <a:t>tijdsduren</a:t>
+                </a:r>
+                <a:r>
+                  <a:rPr lang="en-US" b="1" dirty="0" smtClean="0"/>
+                  <a:t> van </a:t>
+                </a:r>
+                <a:r>
+                  <a:rPr lang="en-US" b="1" dirty="0" err="1" smtClean="0"/>
+                  <a:t>bezoeken</a:t>
+                </a:r>
+                <a:r>
+                  <a:rPr lang="en-US" b="1" dirty="0" smtClean="0"/>
+                  <a:t> </a:t>
+                </a:r>
+                <a:r>
+                  <a:rPr lang="en-US" b="1" dirty="0" err="1" smtClean="0"/>
+                  <a:t>zijn</a:t>
+                </a:r>
+                <a:r>
+                  <a:rPr lang="en-US" b="1" dirty="0" smtClean="0"/>
+                  <a:t> </a:t>
+                </a:r>
+                <a:r>
+                  <a:rPr lang="en-US" b="1" dirty="0" err="1" smtClean="0"/>
+                  <a:t>onderling</a:t>
+                </a:r>
+                <a:r>
+                  <a:rPr lang="en-US" b="1" dirty="0" smtClean="0"/>
+                  <a:t> </a:t>
+                </a:r>
+                <a:r>
+                  <a:rPr lang="en-US" b="1" dirty="0" err="1" smtClean="0"/>
+                  <a:t>onafhankelijk</a:t>
+                </a:r>
+                <a:r>
+                  <a:rPr lang="en-US" b="1" dirty="0" smtClean="0"/>
+                  <a:t>.</a:t>
+                </a:r>
+              </a:p>
+              <a:p>
+                <a:pPr marL="457200" indent="-457200" eaLnBrk="1" hangingPunct="1">
+                  <a:buAutoNum type="alphaLcParenR"/>
+                </a:pPr>
+                <a:r>
+                  <a:rPr lang="en-US" b="1" dirty="0" smtClean="0"/>
+                  <a:t>Hoe </a:t>
+                </a:r>
+                <a:r>
+                  <a:rPr lang="en-US" b="1" dirty="0" err="1" smtClean="0"/>
+                  <a:t>groot</a:t>
+                </a:r>
+                <a:r>
+                  <a:rPr lang="en-US" b="1" dirty="0" smtClean="0"/>
+                  <a:t> is de </a:t>
+                </a:r>
+                <a:r>
+                  <a:rPr lang="en-US" b="1" dirty="0" err="1" smtClean="0"/>
+                  <a:t>kans</a:t>
+                </a:r>
+                <a:r>
+                  <a:rPr lang="en-US" b="1" dirty="0" smtClean="0"/>
+                  <a:t> </a:t>
+                </a:r>
+                <a:r>
+                  <a:rPr lang="en-US" b="1" dirty="0" err="1" smtClean="0"/>
+                  <a:t>dat</a:t>
+                </a:r>
+                <a:r>
+                  <a:rPr lang="en-US" b="1" dirty="0" smtClean="0"/>
+                  <a:t> </a:t>
+                </a:r>
+                <a:r>
+                  <a:rPr lang="en-US" b="1" dirty="0" err="1" smtClean="0"/>
+                  <a:t>een</a:t>
+                </a:r>
+                <a:r>
+                  <a:rPr lang="en-US" b="1" dirty="0" smtClean="0"/>
+                  <a:t> </a:t>
+                </a:r>
+                <a:r>
+                  <a:rPr lang="en-US" b="1" dirty="0" err="1" smtClean="0"/>
+                  <a:t>willekeurig</a:t>
+                </a:r>
+                <a:r>
+                  <a:rPr lang="en-US" b="1" dirty="0" smtClean="0"/>
+                  <a:t> </a:t>
+                </a:r>
+                <a:r>
+                  <a:rPr lang="en-US" b="1" dirty="0" err="1" smtClean="0"/>
+                  <a:t>bezoek</a:t>
+                </a:r>
+                <a:r>
+                  <a:rPr lang="en-US" b="1" dirty="0" smtClean="0"/>
+                  <a:t> </a:t>
+                </a:r>
+                <a:r>
+                  <a:rPr lang="en-US" b="1" dirty="0" err="1" smtClean="0"/>
+                  <a:t>meer</a:t>
+                </a:r>
+                <a:r>
+                  <a:rPr lang="en-US" b="1" dirty="0" smtClean="0"/>
+                  <a:t> </a:t>
+                </a:r>
+                <a:r>
+                  <a:rPr lang="en-US" b="1" dirty="0" err="1" smtClean="0"/>
+                  <a:t>dan</a:t>
+                </a:r>
+                <a:r>
+                  <a:rPr lang="en-US" b="1" dirty="0" smtClean="0"/>
+                  <a:t> </a:t>
+                </a:r>
+                <a14:m>
+                  <m:oMath xmlns:m="http://schemas.openxmlformats.org/officeDocument/2006/math">
+                    <m:r>
+                      <a:rPr lang="en-US" b="1" i="1" dirty="0" smtClean="0">
+                        <a:latin typeface="Cambria Math" panose="02040503050406030204" pitchFamily="18" charset="0"/>
+                      </a:rPr>
+                      <m:t>𝟔𝟎</m:t>
+                    </m:r>
+                  </m:oMath>
+                </a14:m>
+                <a:r>
+                  <a:rPr lang="en-US" b="1" dirty="0" smtClean="0"/>
+                  <a:t> </a:t>
+                </a:r>
+                <a:r>
+                  <a:rPr lang="en-US" b="1" dirty="0" err="1" smtClean="0"/>
+                  <a:t>minuten</a:t>
+                </a:r>
+                <a:r>
+                  <a:rPr lang="en-US" b="1" dirty="0" smtClean="0"/>
+                  <a:t> </a:t>
+                </a:r>
+                <a:r>
+                  <a:rPr lang="en-US" b="1" dirty="0" err="1" smtClean="0"/>
+                  <a:t>vergt</a:t>
+                </a:r>
+                <a:r>
+                  <a:rPr lang="en-US" b="1" dirty="0" smtClean="0"/>
+                  <a:t>?</a:t>
+                </a:r>
+              </a:p>
+              <a:p>
+                <a:pPr eaLnBrk="1" hangingPunct="1"/>
+                <a:endParaRPr lang="en-US" b="1" dirty="0" smtClean="0"/>
+              </a:p>
+            </p:txBody>
+          </p:sp>
+        </mc:Choice>
+        <mc:Fallback xmlns="">
+          <p:sp>
+            <p:nvSpPr>
+              <p:cNvPr id="6147" name="Content Placeholder 2"/>
+              <p:cNvSpPr>
+                <a:spLocks noGrp="1" noRot="1" noChangeAspect="1" noMove="1" noResize="1" noEditPoints="1" noAdjustHandles="1" noChangeArrowheads="1" noChangeShapeType="1" noTextEdit="1"/>
+              </p:cNvSpPr>
+              <p:nvPr>
+                <p:ph idx="1"/>
+              </p:nvPr>
+            </p:nvSpPr>
+            <p:spPr>
+              <a:xfrm>
+                <a:off x="812800" y="1773238"/>
+                <a:ext cx="10539784" cy="4246562"/>
+              </a:xfrm>
+              <a:blipFill>
+                <a:blip r:embed="rId2"/>
+                <a:stretch>
+                  <a:fillRect l="-1619" t="-2009"/>
+                </a:stretch>
+              </a:blipFill>
+            </p:spPr>
+            <p:txBody>
+              <a:bodyPr/>
+              <a:lstStyle/>
+              <a:p>
+                <a:r>
+                  <a:rPr lang="nl-NL">
+                    <a:noFill/>
+                  </a:rPr>
+                  <a:t> </a:t>
+                </a:r>
+              </a:p>
+            </p:txBody>
+          </p:sp>
+        </mc:Fallback>
+      </mc:AlternateContent>
+      <p:sp>
+        <p:nvSpPr>
+          <p:cNvPr id="6148" name="Date Placeholder 3"/>
+          <p:cNvSpPr>
+            <a:spLocks noGrp="1"/>
+          </p:cNvSpPr>
+          <p:nvPr>
+            <p:ph type="dt" sz="quarter" idx="10"/>
+          </p:nvPr>
+        </p:nvSpPr>
+        <p:spPr bwMode="auto">
+          <a:noFill/>
+          <a:ln>
+            <a:miter lim="800000"/>
+            <a:headEnd/>
+            <a:tailEnd/>
+          </a:ln>
+        </p:spPr>
+        <p:txBody>
+          <a:bodyPr wrap="square" numCol="1" anchorCtr="0" compatLnSpc="1">
+            <a:prstTxWarp prst="textNoShape">
+              <a:avLst/>
+            </a:prstTxWarp>
+          </a:bodyPr>
+          <a:lstStyle/>
+          <a:p>
+            <a:r>
+              <a:rPr lang="nl-NL" smtClean="0"/>
+              <a:t>College 5b: de centrale limietstelling</a:t>
+            </a:r>
+          </a:p>
+        </p:txBody>
+      </p:sp>
+    </p:spTree>
+    <p:extLst>
+      <p:ext uri="{BB962C8B-B14F-4D97-AF65-F5344CB8AC3E}">
+        <p14:creationId xmlns:p14="http://schemas.microsoft.com/office/powerpoint/2010/main" val="1796914669"/>
+      </p:ext>
+    </p:extLst>
+  </p:cSld>
+  <p:clrMapOvr>
+    <a:masterClrMapping/>
+  </p:clrMapOvr>
+  <p:timing>
+    <p:tnLst>
+      <p:par>
+        <p:cTn id="1" dur="indefinite" restart="never" nodeType="tmRoot"/>
+      </p:par>
+    </p:tnLst>
+  </p:timing>
+</p:sld>
+</file>
+
+<file path=ppt/slides/slide13.xml><?xml version="1.0" encoding="utf-8"?>
+<p:sld xmlns:a="http://schemas.openxmlformats.org/drawingml/2006/main" xmlns:r="http://schemas.openxmlformats.org/officeDocument/2006/relationships" xmlns:p="http://schemas.openxmlformats.org/presentationml/2006/main">
+  <p:cSld>
+    <p:spTree>
+      <p:nvGrpSpPr>
+        <p:cNvPr id="1" name=""/>
+        <p:cNvGrpSpPr/>
+        <p:nvPr/>
+      </p:nvGrpSpPr>
+      <p:grpSpPr>
+        <a:xfrm>
+          <a:off x="0" y="0"/>
+          <a:ext cx="0" cy="0"/>
+          <a:chOff x="0" y="0"/>
+          <a:chExt cx="0" cy="0"/>
+        </a:xfrm>
+      </p:grpSpPr>
+      <p:sp>
+        <p:nvSpPr>
+          <p:cNvPr id="6146" name="Title 1"/>
+          <p:cNvSpPr>
+            <a:spLocks noGrp="1"/>
+          </p:cNvSpPr>
+          <p:nvPr>
+            <p:ph type="title"/>
+          </p:nvPr>
+        </p:nvSpPr>
+        <p:spPr/>
+        <p:txBody>
+          <a:bodyPr/>
+          <a:lstStyle/>
+          <a:p>
+            <a:pPr eaLnBrk="1" hangingPunct="1"/>
+            <a:r>
+              <a:rPr lang="en-US" dirty="0" smtClean="0"/>
+              <a:t>Buijs: </a:t>
+            </a:r>
+            <a:r>
+              <a:rPr lang="en-US" dirty="0" err="1" smtClean="0"/>
+              <a:t>opgave</a:t>
+            </a:r>
+            <a:r>
+              <a:rPr lang="en-US" dirty="0" smtClean="0"/>
+              <a:t> 5.12</a:t>
+            </a:r>
+            <a:endParaRPr lang="nl-NL" dirty="0" smtClean="0"/>
+          </a:p>
+        </p:txBody>
+      </p:sp>
+      <mc:AlternateContent xmlns:mc="http://schemas.openxmlformats.org/markup-compatibility/2006" xmlns:a14="http://schemas.microsoft.com/office/drawing/2010/main">
+        <mc:Choice Requires="a14">
           <p:sp>
             <p:nvSpPr>
               <p:cNvPr id="6147" name="Content Placeholder 2"/>
@@ -9960,7 +10684,6 @@
                   <a:rPr lang="en-US" dirty="0" smtClean="0"/>
                   <a:t>. </a:t>
                 </a:r>
-                <a:endParaRPr lang="en-US" dirty="0" smtClean="0"/>
               </a:p>
               <a:p>
                 <a:pPr eaLnBrk="1" hangingPunct="1"/>
@@ -10690,7 +11413,7 @@
             </p:txBody>
           </p:sp>
         </mc:Choice>
-        <mc:Fallback>
+        <mc:Fallback xmlns="">
           <p:sp>
             <p:nvSpPr>
               <p:cNvPr id="6147" name="Content Placeholder 2"/>
@@ -10781,7 +11504,7 @@
 </p:sld>
 </file>
 
-<file path=ppt/slides/slide13.xml><?xml version="1.0" encoding="utf-8"?>
+<file path=ppt/slides/slide14.xml><?xml version="1.0" encoding="utf-8"?>
 <p:sld xmlns:a="http://schemas.openxmlformats.org/drawingml/2006/main" xmlns:r="http://schemas.openxmlformats.org/officeDocument/2006/relationships" xmlns:p="http://schemas.openxmlformats.org/presentationml/2006/main">
   <p:cSld>
     <p:spTree>
@@ -11424,7 +12147,7 @@
 </p:sld>
 </file>
 
-<file path=ppt/slides/slide14.xml><?xml version="1.0" encoding="utf-8"?>
+<file path=ppt/slides/slide15.xml><?xml version="1.0" encoding="utf-8"?>
 <p:sld xmlns:a="http://schemas.openxmlformats.org/drawingml/2006/main" xmlns:r="http://schemas.openxmlformats.org/officeDocument/2006/relationships" xmlns:p="http://schemas.openxmlformats.org/presentationml/2006/main">
   <p:cSld>
     <p:spTree>
@@ -11441,8 +12164,8 @@
           <a:chExt cx="0" cy="0"/>
         </a:xfrm>
       </p:grpSpPr>
-      <mc:AlternateContent xmlns:mc="http://schemas.openxmlformats.org/markup-compatibility/2006">
-        <mc:Choice xmlns:a14="http://schemas.microsoft.com/office/drawing/2010/main" Requires="a14">
+      <mc:AlternateContent xmlns:mc="http://schemas.openxmlformats.org/markup-compatibility/2006" xmlns:a14="http://schemas.microsoft.com/office/drawing/2010/main">
+        <mc:Choice Requires="a14">
           <p:sp>
             <p:nvSpPr>
               <p:cNvPr id="6146" name="Title 1"/>
@@ -11586,7 +12309,7 @@
             </p:txBody>
           </p:sp>
         </mc:Choice>
-        <mc:Fallback>
+        <mc:Fallback xmlns="">
           <p:sp>
             <p:nvSpPr>
               <p:cNvPr id="6146" name="Title 1"/>
@@ -11624,8 +12347,8 @@
           </p:sp>
         </mc:Fallback>
       </mc:AlternateContent>
-      <mc:AlternateContent xmlns:mc="http://schemas.openxmlformats.org/markup-compatibility/2006">
-        <mc:Choice xmlns:a14="http://schemas.microsoft.com/office/drawing/2010/main" Requires="a14">
+      <mc:AlternateContent xmlns:mc="http://schemas.openxmlformats.org/markup-compatibility/2006" xmlns:a14="http://schemas.microsoft.com/office/drawing/2010/main">
+        <mc:Choice Requires="a14">
           <p:sp>
             <p:nvSpPr>
               <p:cNvPr id="6147" name="Content Placeholder 2"/>
@@ -11989,7 +12712,6 @@
                   <a:rPr lang="en-US" sz="2000" dirty="0" smtClean="0"/>
                   <a:t>.</a:t>
                 </a:r>
-                <a:endParaRPr lang="en-US" sz="2000" dirty="0" smtClean="0"/>
               </a:p>
               <a:p>
                 <a:endParaRPr lang="en-US" sz="1600" dirty="0"/>
@@ -12509,7 +13231,6 @@
                 <a:endParaRPr lang="en-US" sz="2000" dirty="0" smtClean="0"/>
               </a:p>
               <a:p>
-                <a:pPr/>
                 <a:endParaRPr lang="en-US" sz="1200" b="0" i="1" dirty="0" smtClean="0">
                   <a:latin typeface="Cambria Math" panose="02040503050406030204" pitchFamily="18" charset="0"/>
                 </a:endParaRPr>
@@ -13027,12 +13748,11 @@
                   <a:rPr lang="en-US" sz="2000" b="0" dirty="0" smtClean="0"/>
                   <a:t> </a:t>
                 </a:r>
-                <a:endParaRPr lang="en-US" sz="2000" b="0" dirty="0" smtClean="0"/>
               </a:p>
             </p:txBody>
           </p:sp>
         </mc:Choice>
-        <mc:Fallback>
+        <mc:Fallback xmlns="">
           <p:sp>
             <p:nvSpPr>
               <p:cNvPr id="6147" name="Content Placeholder 2"/>
@@ -13124,7 +13844,7 @@
 </p:sld>
 </file>
 
-<file path=ppt/slides/slide15.xml><?xml version="1.0" encoding="utf-8"?>
+<file path=ppt/slides/slide16.xml><?xml version="1.0" encoding="utf-8"?>
 <p:sld xmlns:a="http://schemas.openxmlformats.org/drawingml/2006/main" xmlns:r="http://schemas.openxmlformats.org/officeDocument/2006/relationships" xmlns:p="http://schemas.openxmlformats.org/presentationml/2006/main">
   <p:cSld>
     <p:spTree>
@@ -13141,8 +13861,8 @@
           <a:chExt cx="0" cy="0"/>
         </a:xfrm>
       </p:grpSpPr>
-      <mc:AlternateContent xmlns:mc="http://schemas.openxmlformats.org/markup-compatibility/2006">
-        <mc:Choice xmlns:a14="http://schemas.microsoft.com/office/drawing/2010/main" Requires="a14">
+      <mc:AlternateContent xmlns:mc="http://schemas.openxmlformats.org/markup-compatibility/2006" xmlns:a14="http://schemas.microsoft.com/office/drawing/2010/main">
+        <mc:Choice Requires="a14">
           <p:sp>
             <p:nvSpPr>
               <p:cNvPr id="6146" name="Title 1"/>
@@ -13286,7 +14006,7 @@
             </p:txBody>
           </p:sp>
         </mc:Choice>
-        <mc:Fallback>
+        <mc:Fallback xmlns="">
           <p:sp>
             <p:nvSpPr>
               <p:cNvPr id="6146" name="Title 1"/>
@@ -13353,7 +14073,6 @@
               <a:rPr lang="en-US" sz="2000" b="0" dirty="0" smtClean="0"/>
               <a:t> </a:t>
             </a:r>
-            <a:endParaRPr lang="en-US" sz="2000" b="0" dirty="0" smtClean="0"/>
           </a:p>
         </p:txBody>
       </p:sp>
@@ -13393,7 +14112,7 @@
       </p:sp>
       <p:pic>
         <p:nvPicPr>
-          <p:cNvPr id="3" name="Afbeelding 2"/>
+          <p:cNvPr id="5" name="Afbeelding 4"/>
           <p:cNvPicPr>
             <a:picLocks noChangeAspect="1"/>
           </p:cNvPicPr>
@@ -13401,13 +14120,13 @@
         </p:nvPicPr>
         <p:blipFill rotWithShape="1">
           <a:blip r:embed="rId3"/>
-          <a:srcRect l="34670" t="27991" r="3588"/>
+          <a:srcRect l="33077" t="28003" r="2999" b="1989"/>
           <a:stretch/>
         </p:blipFill>
         <p:spPr>
           <a:xfrm>
-            <a:off x="2603612" y="1844823"/>
-            <a:ext cx="6984776" cy="4412567"/>
+            <a:off x="2423592" y="1916831"/>
+            <a:ext cx="7344816" cy="4357094"/>
           </a:xfrm>
           <a:prstGeom prst="rect">
             <a:avLst/>
@@ -13434,7 +14153,7 @@
 </p:sld>
 </file>
 
-<file path=ppt/slides/slide16.xml><?xml version="1.0" encoding="utf-8"?>
+<file path=ppt/slides/slide17.xml><?xml version="1.0" encoding="utf-8"?>
 <p:sld xmlns:a="http://schemas.openxmlformats.org/drawingml/2006/main" xmlns:r="http://schemas.openxmlformats.org/officeDocument/2006/relationships" xmlns:p="http://schemas.openxmlformats.org/presentationml/2006/main">
   <p:cSld>
     <p:spTree>
@@ -14160,7 +14879,7 @@
 </p:sld>
 </file>
 
-<file path=ppt/slides/slide17.xml><?xml version="1.0" encoding="utf-8"?>
+<file path=ppt/slides/slide18.xml><?xml version="1.0" encoding="utf-8"?>
 <p:sld xmlns:a="http://schemas.openxmlformats.org/drawingml/2006/main" xmlns:r="http://schemas.openxmlformats.org/officeDocument/2006/relationships" xmlns:p="http://schemas.openxmlformats.org/presentationml/2006/main">
   <p:cSld>
     <p:spTree>
@@ -14177,8 +14896,8 @@
           <a:chExt cx="0" cy="0"/>
         </a:xfrm>
       </p:grpSpPr>
-      <mc:AlternateContent xmlns:mc="http://schemas.openxmlformats.org/markup-compatibility/2006">
-        <mc:Choice xmlns:a14="http://schemas.microsoft.com/office/drawing/2010/main" Requires="a14">
+      <mc:AlternateContent xmlns:mc="http://schemas.openxmlformats.org/markup-compatibility/2006" xmlns:a14="http://schemas.microsoft.com/office/drawing/2010/main">
+        <mc:Choice Requires="a14">
           <p:sp>
             <p:nvSpPr>
               <p:cNvPr id="6146" name="Title 1"/>
@@ -14302,7 +15021,7 @@
             </p:txBody>
           </p:sp>
         </mc:Choice>
-        <mc:Fallback>
+        <mc:Fallback xmlns="">
           <p:sp>
             <p:nvSpPr>
               <p:cNvPr id="6146" name="Title 1"/>
@@ -14340,8 +15059,8 @@
           </p:sp>
         </mc:Fallback>
       </mc:AlternateContent>
-      <mc:AlternateContent xmlns:mc="http://schemas.openxmlformats.org/markup-compatibility/2006">
-        <mc:Choice xmlns:a14="http://schemas.microsoft.com/office/drawing/2010/main" Requires="a14">
+      <mc:AlternateContent xmlns:mc="http://schemas.openxmlformats.org/markup-compatibility/2006" xmlns:a14="http://schemas.microsoft.com/office/drawing/2010/main">
+        <mc:Choice Requires="a14">
           <p:sp>
             <p:nvSpPr>
               <p:cNvPr id="6147" name="Content Placeholder 2"/>
@@ -15272,11 +15991,7 @@
                 </a:r>
                 <a:r>
                   <a:rPr lang="en-US" sz="2000" dirty="0" smtClean="0"/>
-                  <a:t> </a:t>
-                </a:r>
-                <a:r>
-                  <a:rPr lang="en-US" sz="2000" dirty="0" smtClean="0"/>
-                  <a:t>de </a:t>
+                  <a:t> de </a:t>
                 </a:r>
                 <a14:m>
                   <m:oMath xmlns:m="http://schemas.openxmlformats.org/officeDocument/2006/math">
@@ -15305,13 +16020,7 @@
                           <a:rPr lang="nl-NL" sz="2000" b="0" i="1" smtClean="0">
                             <a:latin typeface="Cambria Math" panose="02040503050406030204" pitchFamily="18" charset="0"/>
                           </a:rPr>
-                          <m:t>=450,</m:t>
-                        </m:r>
-                        <m:r>
-                          <a:rPr lang="nl-NL" sz="2000" b="0" i="1" smtClean="0">
-                            <a:latin typeface="Cambria Math" panose="02040503050406030204" pitchFamily="18" charset="0"/>
-                          </a:rPr>
-                          <m:t> </m:t>
+                          <m:t>=450, </m:t>
                         </m:r>
                         <m:r>
                           <a:rPr lang="nl-NL" sz="2000" b="0" i="1" smtClean="0">
@@ -15323,13 +16032,7 @@
                           <a:rPr lang="nl-NL" sz="2000" b="0" i="1" smtClean="0">
                             <a:latin typeface="Cambria Math" panose="02040503050406030204" pitchFamily="18" charset="0"/>
                           </a:rPr>
-                          <m:t>=31.6</m:t>
-                        </m:r>
-                        <m:r>
-                          <a:rPr lang="en-US" sz="2000" b="0" i="1" smtClean="0">
-                            <a:latin typeface="Cambria Math" panose="02040503050406030204" pitchFamily="18" charset="0"/>
-                          </a:rPr>
-                          <m:t>228</m:t>
+                          <m:t>=31.6228</m:t>
                         </m:r>
                       </m:e>
                     </m:d>
@@ -15345,11 +16048,7 @@
                 </a:r>
                 <a:r>
                   <a:rPr lang="en-US" sz="2000" dirty="0" smtClean="0"/>
-                  <a:t> </a:t>
-                </a:r>
-                <a:r>
-                  <a:rPr lang="en-US" sz="2000" dirty="0" smtClean="0"/>
-                  <a:t>van </a:t>
+                  <a:t> van </a:t>
                 </a:r>
                 <a14:m>
                   <m:oMath xmlns:m="http://schemas.openxmlformats.org/officeDocument/2006/math">
@@ -15560,13 +16259,7 @@
                         <a:rPr lang="nl-NL" sz="2000" b="0" i="1" smtClean="0">
                           <a:latin typeface="Cambria Math" panose="02040503050406030204" pitchFamily="18" charset="0"/>
                         </a:rPr>
-                        <m:t>48</m:t>
-                      </m:r>
-                      <m:r>
-                        <a:rPr lang="nl-NL" sz="2000" b="0" i="1" smtClean="0">
-                          <a:latin typeface="Cambria Math" panose="02040503050406030204" pitchFamily="18" charset="0"/>
-                        </a:rPr>
-                        <m:t>.</m:t>
+                        <m:t>48.</m:t>
                       </m:r>
                     </m:oMath>
                   </m:oMathPara>
@@ -15758,7 +16451,7 @@
             </p:txBody>
           </p:sp>
         </mc:Choice>
-        <mc:Fallback>
+        <mc:Fallback xmlns="">
           <p:sp>
             <p:nvSpPr>
               <p:cNvPr id="6147" name="Content Placeholder 2"/>
@@ -15834,263 +16527,6 @@
     <p:extLst>
       <p:ext uri="{BB962C8B-B14F-4D97-AF65-F5344CB8AC3E}">
         <p14:creationId xmlns:p14="http://schemas.microsoft.com/office/powerpoint/2010/main" val="1816245365"/>
-      </p:ext>
-    </p:extLst>
-  </p:cSld>
-  <p:clrMapOvr>
-    <a:masterClrMapping/>
-  </p:clrMapOvr>
-  <p:timing>
-    <p:tnLst>
-      <p:par>
-        <p:cTn id="1" dur="indefinite" restart="never" nodeType="tmRoot"/>
-      </p:par>
-    </p:tnLst>
-  </p:timing>
-</p:sld>
-</file>
-
-<file path=ppt/slides/slide18.xml><?xml version="1.0" encoding="utf-8"?>
-<p:sld xmlns:a="http://schemas.openxmlformats.org/drawingml/2006/main" xmlns:r="http://schemas.openxmlformats.org/officeDocument/2006/relationships" xmlns:p="http://schemas.openxmlformats.org/presentationml/2006/main">
-  <p:cSld>
-    <p:spTree>
-      <p:nvGrpSpPr>
-        <p:cNvPr id="1" name=""/>
-        <p:cNvGrpSpPr/>
-        <p:nvPr/>
-      </p:nvGrpSpPr>
-      <p:grpSpPr>
-        <a:xfrm>
-          <a:off x="0" y="0"/>
-          <a:ext cx="0" cy="0"/>
-          <a:chOff x="0" y="0"/>
-          <a:chExt cx="0" cy="0"/>
-        </a:xfrm>
-      </p:grpSpPr>
-      <mc:AlternateContent xmlns:mc="http://schemas.openxmlformats.org/markup-compatibility/2006">
-        <mc:Choice xmlns:a14="http://schemas.microsoft.com/office/drawing/2010/main" Requires="a14">
-          <p:sp>
-            <p:nvSpPr>
-              <p:cNvPr id="6146" name="Title 1"/>
-              <p:cNvSpPr>
-                <a:spLocks noGrp="1"/>
-              </p:cNvSpPr>
-              <p:nvPr>
-                <p:ph type="title"/>
-              </p:nvPr>
-            </p:nvSpPr>
-            <p:spPr>
-              <a:xfrm>
-                <a:off x="814916" y="1265241"/>
-                <a:ext cx="10465659" cy="800219"/>
-              </a:xfrm>
-            </p:spPr>
-            <p:txBody>
-              <a:bodyPr/>
-              <a:lstStyle/>
-              <a:p>
-                <a:r>
-                  <a:rPr lang="en-US" b="1" dirty="0" smtClean="0"/>
-                  <a:t>c) </a:t>
-                </a:r>
-                <a:r>
-                  <a:rPr lang="en-US" b="1" dirty="0" err="1" smtClean="0"/>
-                  <a:t>Binnen</a:t>
-                </a:r>
-                <a:r>
-                  <a:rPr lang="en-US" b="1" dirty="0" smtClean="0"/>
-                  <a:t> </a:t>
-                </a:r>
-                <a:r>
-                  <a:rPr lang="en-US" b="1" dirty="0" err="1" smtClean="0"/>
-                  <a:t>hoeveel</a:t>
-                </a:r>
-                <a:r>
-                  <a:rPr lang="en-US" b="1" dirty="0" smtClean="0"/>
-                  <a:t> </a:t>
-                </a:r>
-                <a:r>
-                  <a:rPr lang="en-US" b="1" dirty="0" err="1"/>
-                  <a:t>tijd</a:t>
-                </a:r>
-                <a:r>
-                  <a:rPr lang="en-US" b="1" dirty="0"/>
-                  <a:t> </a:t>
-                </a:r>
-                <a14:m>
-                  <m:oMath xmlns:m="http://schemas.openxmlformats.org/officeDocument/2006/math">
-                    <m:r>
-                      <a:rPr lang="en-US" b="1" i="1">
-                        <a:latin typeface="Cambria Math" panose="02040503050406030204" pitchFamily="18" charset="0"/>
-                      </a:rPr>
-                      <m:t>𝑻</m:t>
-                    </m:r>
-                  </m:oMath>
-                </a14:m>
-                <a:r>
-                  <a:rPr lang="en-US" b="1" dirty="0"/>
-                  <a:t> </a:t>
-                </a:r>
-                <a:r>
-                  <a:rPr lang="en-US" b="1" dirty="0" smtClean="0"/>
-                  <a:t>zijn met </a:t>
-                </a:r>
-                <a14:m>
-                  <m:oMath xmlns:m="http://schemas.openxmlformats.org/officeDocument/2006/math">
-                    <m:r>
-                      <a:rPr lang="en-US" b="1" i="1" dirty="0">
-                        <a:latin typeface="Cambria Math" panose="02040503050406030204" pitchFamily="18" charset="0"/>
-                      </a:rPr>
-                      <m:t>𝟗𝟓</m:t>
-                    </m:r>
-                    <m:r>
-                      <a:rPr lang="en-US" b="1" i="1" dirty="0">
-                        <a:latin typeface="Cambria Math" panose="02040503050406030204" pitchFamily="18" charset="0"/>
-                      </a:rPr>
-                      <m:t>%</m:t>
-                    </m:r>
-                  </m:oMath>
-                </a14:m>
-                <a:r>
-                  <a:rPr lang="en-US" b="1" dirty="0"/>
-                  <a:t> </a:t>
-                </a:r>
-                <a:r>
-                  <a:rPr lang="en-US" b="1" dirty="0" err="1"/>
-                  <a:t>kans</a:t>
-                </a:r>
-                <a:r>
-                  <a:rPr lang="en-US" b="1" dirty="0"/>
-                  <a:t> de </a:t>
-                </a:r>
-                <a:r>
-                  <a:rPr lang="en-US" b="1" dirty="0" err="1"/>
-                  <a:t>tien</a:t>
-                </a:r>
-                <a:r>
-                  <a:rPr lang="en-US" b="1" dirty="0"/>
-                  <a:t> </a:t>
-                </a:r>
-                <a:r>
-                  <a:rPr lang="en-US" b="1" dirty="0" err="1"/>
-                  <a:t>bezoeken</a:t>
-                </a:r>
-                <a:r>
-                  <a:rPr lang="en-US" b="1" dirty="0"/>
-                  <a:t> </a:t>
-                </a:r>
-                <a:r>
-                  <a:rPr lang="en-US" b="1" dirty="0" err="1" smtClean="0"/>
-                  <a:t>afgehandeld</a:t>
-                </a:r>
-                <a:r>
-                  <a:rPr lang="en-US" b="1" dirty="0" smtClean="0"/>
-                  <a:t>?</a:t>
-                </a:r>
-                <a:endParaRPr lang="nl-NL" dirty="0" smtClean="0"/>
-              </a:p>
-            </p:txBody>
-          </p:sp>
-        </mc:Choice>
-        <mc:Fallback>
-          <p:sp>
-            <p:nvSpPr>
-              <p:cNvPr id="6146" name="Title 1"/>
-              <p:cNvSpPr>
-                <a:spLocks noGrp="1" noRot="1" noChangeAspect="1" noMove="1" noResize="1" noEditPoints="1" noAdjustHandles="1" noChangeArrowheads="1" noChangeShapeType="1" noTextEdit="1"/>
-              </p:cNvSpPr>
-              <p:nvPr>
-                <p:ph type="title"/>
-              </p:nvPr>
-            </p:nvSpPr>
-            <p:spPr>
-              <a:xfrm>
-                <a:off x="814916" y="1265241"/>
-                <a:ext cx="10465659" cy="800219"/>
-              </a:xfrm>
-              <a:blipFill>
-                <a:blip r:embed="rId2"/>
-                <a:stretch>
-                  <a:fillRect l="-1923" t="-12977" r="-1399"/>
-                </a:stretch>
-              </a:blipFill>
-            </p:spPr>
-            <p:txBody>
-              <a:bodyPr/>
-              <a:lstStyle/>
-              <a:p>
-                <a:r>
-                  <a:rPr lang="nl-NL">
-                    <a:noFill/>
-                  </a:rPr>
-                  <a:t> </a:t>
-                </a:r>
-              </a:p>
-            </p:txBody>
-          </p:sp>
-        </mc:Fallback>
-      </mc:AlternateContent>
-      <p:sp>
-        <p:nvSpPr>
-          <p:cNvPr id="6148" name="Date Placeholder 3"/>
-          <p:cNvSpPr>
-            <a:spLocks noGrp="1"/>
-          </p:cNvSpPr>
-          <p:nvPr>
-            <p:ph type="dt" sz="quarter" idx="10"/>
-          </p:nvPr>
-        </p:nvSpPr>
-        <p:spPr bwMode="auto">
-          <a:noFill/>
-          <a:ln>
-            <a:miter lim="800000"/>
-            <a:headEnd/>
-            <a:tailEnd/>
-          </a:ln>
-        </p:spPr>
-        <p:txBody>
-          <a:bodyPr wrap="square" numCol="1" anchorCtr="0" compatLnSpc="1">
-            <a:prstTxWarp prst="textNoShape">
-              <a:avLst/>
-            </a:prstTxWarp>
-          </a:bodyPr>
-          <a:lstStyle/>
-          <a:p>
-            <a:r>
-              <a:rPr lang="nl-NL" smtClean="0"/>
-              <a:t>College 5b: de centrale limietstelling</a:t>
-            </a:r>
-            <a:endParaRPr lang="nl-NL" dirty="0" smtClean="0"/>
-          </a:p>
-        </p:txBody>
-      </p:sp>
-      <p:pic>
-        <p:nvPicPr>
-          <p:cNvPr id="4" name="Afbeelding 3"/>
-          <p:cNvPicPr>
-            <a:picLocks noChangeAspect="1"/>
-          </p:cNvPicPr>
-          <p:nvPr/>
-        </p:nvPicPr>
-        <p:blipFill rotWithShape="1">
-          <a:blip r:embed="rId3"/>
-          <a:srcRect l="34992" t="28003" r="3251" b="1989"/>
-          <a:stretch/>
-        </p:blipFill>
-        <p:spPr>
-          <a:xfrm>
-            <a:off x="2459597" y="1806926"/>
-            <a:ext cx="7272806" cy="4465758"/>
-          </a:xfrm>
-          <a:prstGeom prst="rect">
-            <a:avLst/>
-          </a:prstGeom>
-        </p:spPr>
-      </p:pic>
-    </p:spTree>
-    <p:extLst>
-      <p:ext uri="{BB962C8B-B14F-4D97-AF65-F5344CB8AC3E}">
-        <p14:creationId xmlns:p14="http://schemas.microsoft.com/office/powerpoint/2010/main" val="4079695833"/>
       </p:ext>
     </p:extLst>
   </p:cSld>
@@ -16124,62 +16560,22 @@
           <a:chExt cx="0" cy="0"/>
         </a:xfrm>
       </p:grpSpPr>
-      <p:sp>
-        <p:nvSpPr>
-          <p:cNvPr id="6146" name="Title 1"/>
-          <p:cNvSpPr>
-            <a:spLocks noGrp="1"/>
-          </p:cNvSpPr>
-          <p:nvPr>
-            <p:ph type="title"/>
-          </p:nvPr>
-        </p:nvSpPr>
-        <p:spPr/>
-        <p:txBody>
-          <a:bodyPr/>
-          <a:lstStyle/>
-          <a:p>
-            <a:pPr eaLnBrk="1" hangingPunct="1"/>
-            <a:r>
-              <a:rPr lang="en-US" dirty="0" err="1" smtClean="0"/>
-              <a:t>Verschil</a:t>
-            </a:r>
-            <a:r>
-              <a:rPr lang="en-US" dirty="0" smtClean="0"/>
-              <a:t> </a:t>
-            </a:r>
-            <a:r>
-              <a:rPr lang="en-US" dirty="0" err="1" smtClean="0"/>
-              <a:t>tussen</a:t>
-            </a:r>
-            <a:r>
-              <a:rPr lang="en-US" dirty="0" smtClean="0"/>
-              <a:t> twee </a:t>
-            </a:r>
-            <a:r>
-              <a:rPr lang="en-US" dirty="0" err="1" smtClean="0"/>
-              <a:t>kansvariabelen</a:t>
-            </a:r>
-            <a:endParaRPr lang="nl-NL" dirty="0" smtClean="0"/>
-          </a:p>
-        </p:txBody>
-      </p:sp>
       <mc:AlternateContent xmlns:mc="http://schemas.openxmlformats.org/markup-compatibility/2006" xmlns:a14="http://schemas.microsoft.com/office/drawing/2010/main">
         <mc:Choice Requires="a14">
           <p:sp>
             <p:nvSpPr>
-              <p:cNvPr id="6147" name="Content Placeholder 2"/>
+              <p:cNvPr id="6146" name="Title 1"/>
               <p:cNvSpPr>
                 <a:spLocks noGrp="1"/>
               </p:cNvSpPr>
               <p:nvPr>
-                <p:ph idx="1"/>
+                <p:ph type="title"/>
               </p:nvPr>
             </p:nvSpPr>
             <p:spPr>
               <a:xfrm>
-                <a:off x="812800" y="1773238"/>
-                <a:ext cx="11187856" cy="4246562"/>
+                <a:off x="814916" y="1265241"/>
+                <a:ext cx="10465659" cy="800219"/>
               </a:xfrm>
             </p:spPr>
             <p:txBody>
@@ -16187,651 +16583,104 @@
               <a:lstStyle/>
               <a:p>
                 <a:r>
-                  <a:rPr lang="en-US" dirty="0" smtClean="0"/>
-                  <a:t>Een </a:t>
-                </a:r>
-                <a:r>
-                  <a:rPr lang="en-US" dirty="0" err="1" smtClean="0"/>
-                  <a:t>militaire</a:t>
-                </a:r>
-                <a:r>
-                  <a:rPr lang="en-US" dirty="0"/>
-                  <a:t> </a:t>
-                </a:r>
-                <a:r>
-                  <a:rPr lang="en-US" dirty="0" err="1" smtClean="0"/>
-                  <a:t>eenheid</a:t>
-                </a:r>
-                <a:r>
-                  <a:rPr lang="en-US" dirty="0" smtClean="0"/>
-                  <a:t> </a:t>
-                </a:r>
-                <a:r>
-                  <a:rPr lang="en-US" dirty="0" err="1" smtClean="0"/>
-                  <a:t>wil</a:t>
-                </a:r>
-                <a:r>
-                  <a:rPr lang="en-US" dirty="0" smtClean="0"/>
-                  <a:t> </a:t>
-                </a:r>
-                <a:r>
-                  <a:rPr lang="en-US" dirty="0" err="1" smtClean="0"/>
-                  <a:t>evalueren</a:t>
-                </a:r>
-                <a:r>
-                  <a:rPr lang="en-US" dirty="0" smtClean="0"/>
-                  <a:t> of </a:t>
-                </a:r>
-                <a:r>
-                  <a:rPr lang="en-US" dirty="0" err="1" smtClean="0"/>
-                  <a:t>een</a:t>
-                </a:r>
-                <a:r>
-                  <a:rPr lang="en-US" dirty="0" smtClean="0"/>
-                  <a:t> </a:t>
-                </a:r>
-                <a:r>
-                  <a:rPr lang="en-US" dirty="0" err="1" smtClean="0"/>
-                  <a:t>nieuw</a:t>
-                </a:r>
-                <a:r>
-                  <a:rPr lang="en-US" dirty="0" smtClean="0"/>
-                  <a:t> </a:t>
-                </a:r>
-                <a:r>
-                  <a:rPr lang="en-US" dirty="0" err="1" smtClean="0"/>
-                  <a:t>noodprotocol</a:t>
-                </a:r>
-                <a:r>
-                  <a:rPr lang="en-US" dirty="0" smtClean="0"/>
-                  <a:t> </a:t>
-                </a:r>
-                <a:r>
-                  <a:rPr lang="en-US" dirty="0" err="1" smtClean="0"/>
-                  <a:t>leidt</a:t>
-                </a:r>
-                <a:r>
-                  <a:rPr lang="en-US" dirty="0" smtClean="0"/>
-                  <a:t> tot </a:t>
-                </a:r>
-                <a:r>
-                  <a:rPr lang="en-US" dirty="0" err="1" smtClean="0"/>
-                  <a:t>een</a:t>
-                </a:r>
-                <a:r>
-                  <a:rPr lang="en-US" dirty="0" smtClean="0"/>
-                  <a:t> </a:t>
-                </a:r>
-                <a:r>
-                  <a:rPr lang="en-US" dirty="0" err="1" smtClean="0"/>
-                  <a:t>snellere</a:t>
-                </a:r>
-                <a:r>
-                  <a:rPr lang="en-US" dirty="0" smtClean="0"/>
-                  <a:t> </a:t>
-                </a:r>
-                <a:r>
-                  <a:rPr lang="en-US" dirty="0" err="1" smtClean="0"/>
-                  <a:t>respons</a:t>
-                </a:r>
-                <a:r>
-                  <a:rPr lang="en-US" dirty="0" smtClean="0"/>
-                  <a:t> in </a:t>
-                </a:r>
-                <a:r>
-                  <a:rPr lang="en-US" dirty="0" err="1" smtClean="0"/>
-                  <a:t>crisissituaties</a:t>
-                </a:r>
-                <a:r>
-                  <a:rPr lang="en-US" dirty="0" smtClean="0"/>
-                  <a:t>, </a:t>
-                </a:r>
-                <a:r>
-                  <a:rPr lang="en-US" dirty="0" err="1" smtClean="0"/>
-                  <a:t>zoals</a:t>
-                </a:r>
-                <a:r>
-                  <a:rPr lang="en-US" dirty="0" smtClean="0"/>
-                  <a:t> </a:t>
-                </a:r>
-                <a:r>
-                  <a:rPr lang="en-US" dirty="0" err="1" smtClean="0"/>
-                  <a:t>natuurrampen</a:t>
-                </a:r>
-                <a:r>
-                  <a:rPr lang="en-US" dirty="0" smtClean="0"/>
-                  <a:t> of </a:t>
-                </a:r>
-                <a:r>
-                  <a:rPr lang="en-US" dirty="0" err="1" smtClean="0"/>
-                  <a:t>terroristische</a:t>
-                </a:r>
-                <a:r>
-                  <a:rPr lang="en-US" dirty="0" smtClean="0"/>
-                  <a:t> </a:t>
-                </a:r>
-                <a:r>
-                  <a:rPr lang="en-US" dirty="0" err="1" smtClean="0"/>
-                  <a:t>dreigingen</a:t>
-                </a:r>
-                <a:r>
-                  <a:rPr lang="en-US" dirty="0" smtClean="0"/>
-                  <a:t>. </a:t>
-                </a:r>
-              </a:p>
-              <a:p>
-                <a:pPr marL="342900" indent="-342900"/>
-                <a:endParaRPr lang="en-US" b="0" i="1" dirty="0" smtClean="0">
-                  <a:latin typeface="Cambria Math" panose="02040503050406030204" pitchFamily="18" charset="0"/>
-                </a:endParaRPr>
-              </a:p>
-              <a:p>
-                <a:pPr marL="342900" indent="-342900"/>
+                  <a:rPr lang="en-US" b="1" dirty="0" smtClean="0"/>
+                  <a:t>c) </a:t>
+                </a:r>
+                <a:r>
+                  <a:rPr lang="en-US" b="1" dirty="0" err="1" smtClean="0"/>
+                  <a:t>Binnen</a:t>
+                </a:r>
+                <a:r>
+                  <a:rPr lang="en-US" b="1" dirty="0" smtClean="0"/>
+                  <a:t> </a:t>
+                </a:r>
+                <a:r>
+                  <a:rPr lang="en-US" b="1" dirty="0" err="1" smtClean="0"/>
+                  <a:t>hoeveel</a:t>
+                </a:r>
+                <a:r>
+                  <a:rPr lang="en-US" b="1" dirty="0" smtClean="0"/>
+                  <a:t> </a:t>
+                </a:r>
+                <a:r>
+                  <a:rPr lang="en-US" b="1" dirty="0" err="1"/>
+                  <a:t>tijd</a:t>
+                </a:r>
+                <a:r>
+                  <a:rPr lang="en-US" b="1" dirty="0"/>
+                  <a:t> </a:t>
+                </a:r>
                 <a14:m>
                   <m:oMath xmlns:m="http://schemas.openxmlformats.org/officeDocument/2006/math">
-                    <m:sSub>
-                      <m:sSubPr>
-                        <m:ctrlPr>
-                          <a:rPr lang="en-US" b="0" i="1" smtClean="0">
-                            <a:latin typeface="Cambria Math" panose="02040503050406030204" pitchFamily="18" charset="0"/>
-                          </a:rPr>
-                        </m:ctrlPr>
-                      </m:sSubPr>
-                      <m:e>
-                        <m:r>
-                          <a:rPr lang="en-US" b="0" i="1" smtClean="0">
-                            <a:latin typeface="Cambria Math" panose="02040503050406030204" pitchFamily="18" charset="0"/>
-                          </a:rPr>
-                          <m:t>𝑋</m:t>
-                        </m:r>
-                      </m:e>
-                      <m:sub>
-                        <m:r>
-                          <a:rPr lang="en-US" b="0" i="1" smtClean="0">
-                            <a:latin typeface="Cambria Math" panose="02040503050406030204" pitchFamily="18" charset="0"/>
-                          </a:rPr>
-                          <m:t>𝐴</m:t>
-                        </m:r>
-                      </m:sub>
-                    </m:sSub>
-                  </m:oMath>
-                </a14:m>
-                <a:r>
-                  <a:rPr lang="en-US" dirty="0" smtClean="0"/>
-                  <a:t>: </a:t>
-                </a:r>
-                <a:r>
-                  <a:rPr lang="en-US" dirty="0" err="1" smtClean="0"/>
-                  <a:t>reactietijd</a:t>
-                </a:r>
-                <a:r>
-                  <a:rPr lang="en-US" dirty="0" smtClean="0"/>
-                  <a:t> van crisis response teams </a:t>
-                </a:r>
-                <a:r>
-                  <a:rPr lang="en-US" dirty="0" err="1" smtClean="0"/>
-                  <a:t>volgens</a:t>
-                </a:r>
-                <a:r>
-                  <a:rPr lang="en-US" dirty="0" smtClean="0"/>
-                  <a:t> het </a:t>
-                </a:r>
-                <a:r>
-                  <a:rPr lang="en-US" dirty="0" err="1" smtClean="0"/>
-                  <a:t>bestaande</a:t>
-                </a:r>
-                <a:r>
-                  <a:rPr lang="en-US" dirty="0" smtClean="0"/>
-                  <a:t> protocol (in </a:t>
-                </a:r>
-                <a:r>
-                  <a:rPr lang="en-US" dirty="0" err="1" smtClean="0"/>
-                  <a:t>minuten</a:t>
-                </a:r>
-                <a:r>
-                  <a:rPr lang="en-US" dirty="0" smtClean="0"/>
-                  <a:t>)</a:t>
-                </a:r>
-                <a:endParaRPr lang="en-US" b="0" dirty="0" smtClean="0"/>
-              </a:p>
-              <a:p>
-                <a:pPr marL="342900" indent="-342900"/>
-                <a:endParaRPr lang="en-US" b="0" i="1" dirty="0" smtClean="0">
-                  <a:latin typeface="Cambria Math" panose="02040503050406030204" pitchFamily="18" charset="0"/>
-                </a:endParaRPr>
-              </a:p>
-              <a:p>
-                <a:pPr marL="342900" indent="-342900"/>
-                <a14:m>
-                  <m:oMath xmlns:m="http://schemas.openxmlformats.org/officeDocument/2006/math">
-                    <m:sSub>
-                      <m:sSubPr>
-                        <m:ctrlPr>
-                          <a:rPr lang="en-US" b="0" i="1" smtClean="0">
-                            <a:latin typeface="Cambria Math" panose="02040503050406030204" pitchFamily="18" charset="0"/>
-                          </a:rPr>
-                        </m:ctrlPr>
-                      </m:sSubPr>
-                      <m:e>
-                        <m:r>
-                          <a:rPr lang="en-US" b="0" i="1" smtClean="0">
-                            <a:latin typeface="Cambria Math" panose="02040503050406030204" pitchFamily="18" charset="0"/>
-                          </a:rPr>
-                          <m:t>𝑋</m:t>
-                        </m:r>
-                      </m:e>
-                      <m:sub>
-                        <m:r>
-                          <a:rPr lang="en-US" b="0" i="1" smtClean="0">
-                            <a:latin typeface="Cambria Math" panose="02040503050406030204" pitchFamily="18" charset="0"/>
-                          </a:rPr>
-                          <m:t>𝐵</m:t>
-                        </m:r>
-                      </m:sub>
-                    </m:sSub>
                     <m:r>
-                      <a:rPr lang="en-US" b="0" i="1" smtClean="0">
+                      <a:rPr lang="en-US" b="1" i="1">
                         <a:latin typeface="Cambria Math" panose="02040503050406030204" pitchFamily="18" charset="0"/>
                       </a:rPr>
-                      <m:t>:</m:t>
+                      <m:t>𝑻</m:t>
                     </m:r>
                   </m:oMath>
                 </a14:m>
                 <a:r>
-                  <a:rPr lang="en-US" dirty="0" smtClean="0"/>
-                  <a:t> </a:t>
-                </a:r>
-                <a:r>
-                  <a:rPr lang="en-US" dirty="0" err="1" smtClean="0"/>
-                  <a:t>reactietijd</a:t>
-                </a:r>
-                <a:r>
-                  <a:rPr lang="en-US" dirty="0" smtClean="0"/>
-                  <a:t> </a:t>
-                </a:r>
-                <a:r>
-                  <a:rPr lang="en-US" dirty="0"/>
-                  <a:t>van crisis response teams </a:t>
-                </a:r>
-                <a:r>
-                  <a:rPr lang="en-US" dirty="0" err="1" smtClean="0"/>
-                  <a:t>volgens</a:t>
-                </a:r>
-                <a:r>
-                  <a:rPr lang="en-US" dirty="0" smtClean="0"/>
-                  <a:t> </a:t>
-                </a:r>
-                <a:r>
-                  <a:rPr lang="en-US" dirty="0"/>
-                  <a:t>het </a:t>
-                </a:r>
-                <a:r>
-                  <a:rPr lang="en-US" dirty="0" err="1" smtClean="0"/>
-                  <a:t>nieuwe</a:t>
-                </a:r>
-                <a:r>
-                  <a:rPr lang="en-US" dirty="0" smtClean="0"/>
-                  <a:t> </a:t>
-                </a:r>
-                <a:r>
-                  <a:rPr lang="en-US" dirty="0"/>
-                  <a:t>protocol </a:t>
-                </a:r>
-                <a:r>
-                  <a:rPr lang="en-US" dirty="0" smtClean="0"/>
-                  <a:t>(in </a:t>
-                </a:r>
-                <a:r>
-                  <a:rPr lang="en-US" dirty="0" err="1" smtClean="0"/>
-                  <a:t>minuten</a:t>
-                </a:r>
-                <a:r>
-                  <a:rPr lang="en-US" dirty="0" smtClean="0"/>
-                  <a:t>)</a:t>
-                </a:r>
-                <a:endParaRPr lang="en-US" dirty="0"/>
-              </a:p>
-              <a:p>
-                <a:pPr marL="342900" indent="-342900"/>
-                <a:endParaRPr lang="en-US" dirty="0" smtClean="0"/>
-              </a:p>
-              <a:p>
-                <a:pPr marL="342900" indent="-342900"/>
-                <a:endParaRPr lang="en-US" dirty="0"/>
-              </a:p>
-              <a:p>
-                <a:r>
-                  <a:rPr lang="en-US" dirty="0" err="1" smtClean="0"/>
-                  <a:t>Stel</a:t>
-                </a:r>
-                <a:r>
-                  <a:rPr lang="en-US" dirty="0" smtClean="0"/>
-                  <a:t> nu </a:t>
-                </a:r>
-                <a:r>
-                  <a:rPr lang="en-US" dirty="0" err="1" smtClean="0"/>
-                  <a:t>dat</a:t>
-                </a:r>
-                <a:r>
-                  <a:rPr lang="en-US" dirty="0" smtClean="0"/>
-                  <a:t> we </a:t>
-                </a:r>
-                <a:r>
-                  <a:rPr lang="en-US" dirty="0" err="1" smtClean="0"/>
-                  <a:t>weten</a:t>
-                </a:r>
-                <a:r>
-                  <a:rPr lang="en-US" dirty="0" smtClean="0"/>
-                  <a:t> </a:t>
-                </a:r>
-                <a:r>
-                  <a:rPr lang="en-US" dirty="0" err="1" smtClean="0"/>
-                  <a:t>dat</a:t>
-                </a:r>
-                <a:r>
-                  <a:rPr lang="en-US" dirty="0" smtClean="0"/>
-                  <a:t> </a:t>
+                  <a:rPr lang="en-US" b="1" dirty="0"/>
+                  <a:t> </a:t>
+                </a:r>
+                <a:r>
+                  <a:rPr lang="en-US" b="1" dirty="0" smtClean="0"/>
+                  <a:t>zijn met </a:t>
                 </a:r>
                 <a14:m>
                   <m:oMath xmlns:m="http://schemas.openxmlformats.org/officeDocument/2006/math">
-                    <m:sSub>
-                      <m:sSubPr>
-                        <m:ctrlPr>
-                          <a:rPr lang="en-US" b="0" i="1" smtClean="0">
-                            <a:latin typeface="Cambria Math" panose="02040503050406030204" pitchFamily="18" charset="0"/>
-                          </a:rPr>
-                        </m:ctrlPr>
-                      </m:sSubPr>
-                      <m:e>
-                        <m:r>
-                          <a:rPr lang="en-US" b="0" i="1" smtClean="0">
-                            <a:latin typeface="Cambria Math" panose="02040503050406030204" pitchFamily="18" charset="0"/>
-                          </a:rPr>
-                          <m:t>𝑋</m:t>
-                        </m:r>
-                      </m:e>
-                      <m:sub>
-                        <m:r>
-                          <a:rPr lang="en-US" b="0" i="1" smtClean="0">
-                            <a:latin typeface="Cambria Math" panose="02040503050406030204" pitchFamily="18" charset="0"/>
-                          </a:rPr>
-                          <m:t>𝐴</m:t>
-                        </m:r>
-                      </m:sub>
-                    </m:sSub>
                     <m:r>
-                      <a:rPr lang="en-US" b="0" i="1" smtClean="0">
+                      <a:rPr lang="en-US" b="1" i="1" dirty="0">
                         <a:latin typeface="Cambria Math" panose="02040503050406030204" pitchFamily="18" charset="0"/>
                       </a:rPr>
-                      <m:t>∼</m:t>
+                      <m:t>𝟗𝟓</m:t>
                     </m:r>
                     <m:r>
-                      <a:rPr lang="en-US" b="0" i="1" smtClean="0">
+                      <a:rPr lang="en-US" b="1" i="1" dirty="0">
                         <a:latin typeface="Cambria Math" panose="02040503050406030204" pitchFamily="18" charset="0"/>
                       </a:rPr>
-                      <m:t>𝑁</m:t>
-                    </m:r>
-                    <m:r>
-                      <a:rPr lang="en-US" b="0" i="1" smtClean="0">
-                        <a:latin typeface="Cambria Math" panose="02040503050406030204" pitchFamily="18" charset="0"/>
-                      </a:rPr>
-                      <m:t>(</m:t>
-                    </m:r>
-                    <m:sSub>
-                      <m:sSubPr>
-                        <m:ctrlPr>
-                          <a:rPr lang="en-US" b="0" i="1" smtClean="0">
-                            <a:latin typeface="Cambria Math" panose="02040503050406030204" pitchFamily="18" charset="0"/>
-                          </a:rPr>
-                        </m:ctrlPr>
-                      </m:sSubPr>
-                      <m:e>
-                        <m:r>
-                          <a:rPr lang="en-US" b="0" i="1" smtClean="0">
-                            <a:latin typeface="Cambria Math" panose="02040503050406030204" pitchFamily="18" charset="0"/>
-                          </a:rPr>
-                          <m:t>𝜇</m:t>
-                        </m:r>
-                      </m:e>
-                      <m:sub>
-                        <m:r>
-                          <a:rPr lang="en-US" b="0" i="1" smtClean="0">
-                            <a:latin typeface="Cambria Math" panose="02040503050406030204" pitchFamily="18" charset="0"/>
-                          </a:rPr>
-                          <m:t>𝐴</m:t>
-                        </m:r>
-                      </m:sub>
-                    </m:sSub>
-                    <m:r>
-                      <a:rPr lang="en-US" b="0" i="1" smtClean="0">
-                        <a:latin typeface="Cambria Math" panose="02040503050406030204" pitchFamily="18" charset="0"/>
-                      </a:rPr>
-                      <m:t>=50</m:t>
-                    </m:r>
-                    <m:r>
-                      <a:rPr lang="nl-NL" b="0" i="1" smtClean="0">
-                        <a:latin typeface="Cambria Math" panose="02040503050406030204" pitchFamily="18" charset="0"/>
-                      </a:rPr>
-                      <m:t>,</m:t>
-                    </m:r>
-                    <m:sSub>
-                      <m:sSubPr>
-                        <m:ctrlPr>
-                          <a:rPr lang="en-US" b="0" i="1" smtClean="0">
-                            <a:latin typeface="Cambria Math" panose="02040503050406030204" pitchFamily="18" charset="0"/>
-                          </a:rPr>
-                        </m:ctrlPr>
-                      </m:sSubPr>
-                      <m:e>
-                        <m:r>
-                          <a:rPr lang="en-US" b="0" i="1" smtClean="0">
-                            <a:latin typeface="Cambria Math" panose="02040503050406030204" pitchFamily="18" charset="0"/>
-                          </a:rPr>
-                          <m:t>𝜎</m:t>
-                        </m:r>
-                      </m:e>
-                      <m:sub>
-                        <m:r>
-                          <a:rPr lang="en-US" b="0" i="1" smtClean="0">
-                            <a:latin typeface="Cambria Math" panose="02040503050406030204" pitchFamily="18" charset="0"/>
-                          </a:rPr>
-                          <m:t>𝐴</m:t>
-                        </m:r>
-                      </m:sub>
-                    </m:sSub>
-                    <m:r>
-                      <a:rPr lang="en-US" b="0" i="1" smtClean="0">
-                        <a:latin typeface="Cambria Math" panose="02040503050406030204" pitchFamily="18" charset="0"/>
-                      </a:rPr>
-                      <m:t>=5)</m:t>
+                      <m:t>%</m:t>
                     </m:r>
                   </m:oMath>
                 </a14:m>
                 <a:r>
-                  <a:rPr lang="en-US" dirty="0" smtClean="0"/>
-                  <a:t> </a:t>
-                </a:r>
-                <a:r>
-                  <a:rPr lang="en-US" dirty="0" err="1" smtClean="0"/>
-                  <a:t>en</a:t>
-                </a:r>
-                <a:r>
-                  <a:rPr lang="en-US" dirty="0" smtClean="0"/>
-                  <a:t> </a:t>
-                </a:r>
-                <a14:m>
-                  <m:oMath xmlns:m="http://schemas.openxmlformats.org/officeDocument/2006/math">
-                    <m:sSub>
-                      <m:sSubPr>
-                        <m:ctrlPr>
-                          <a:rPr lang="en-US" b="0" i="1" smtClean="0">
-                            <a:latin typeface="Cambria Math" panose="02040503050406030204" pitchFamily="18" charset="0"/>
-                          </a:rPr>
-                        </m:ctrlPr>
-                      </m:sSubPr>
-                      <m:e>
-                        <m:r>
-                          <a:rPr lang="en-US" b="0" i="1" smtClean="0">
-                            <a:latin typeface="Cambria Math" panose="02040503050406030204" pitchFamily="18" charset="0"/>
-                          </a:rPr>
-                          <m:t>𝑋</m:t>
-                        </m:r>
-                      </m:e>
-                      <m:sub>
-                        <m:r>
-                          <a:rPr lang="en-US" b="0" i="1" smtClean="0">
-                            <a:latin typeface="Cambria Math" panose="02040503050406030204" pitchFamily="18" charset="0"/>
-                          </a:rPr>
-                          <m:t>𝐵</m:t>
-                        </m:r>
-                      </m:sub>
-                    </m:sSub>
-                    <m:r>
-                      <a:rPr lang="en-US" b="0" i="1" smtClean="0">
-                        <a:latin typeface="Cambria Math" panose="02040503050406030204" pitchFamily="18" charset="0"/>
-                      </a:rPr>
-                      <m:t>∼</m:t>
-                    </m:r>
-                    <m:r>
-                      <a:rPr lang="en-US" b="0" i="1" smtClean="0">
-                        <a:latin typeface="Cambria Math" panose="02040503050406030204" pitchFamily="18" charset="0"/>
-                      </a:rPr>
-                      <m:t>𝑁</m:t>
-                    </m:r>
-                    <m:r>
-                      <a:rPr lang="en-US" b="0" i="1" smtClean="0">
-                        <a:latin typeface="Cambria Math" panose="02040503050406030204" pitchFamily="18" charset="0"/>
-                      </a:rPr>
-                      <m:t>(</m:t>
-                    </m:r>
-                    <m:sSub>
-                      <m:sSubPr>
-                        <m:ctrlPr>
-                          <a:rPr lang="en-US" b="0" i="1" smtClean="0">
-                            <a:latin typeface="Cambria Math" panose="02040503050406030204" pitchFamily="18" charset="0"/>
-                          </a:rPr>
-                        </m:ctrlPr>
-                      </m:sSubPr>
-                      <m:e>
-                        <m:r>
-                          <a:rPr lang="en-US" b="0" i="1" smtClean="0">
-                            <a:latin typeface="Cambria Math" panose="02040503050406030204" pitchFamily="18" charset="0"/>
-                          </a:rPr>
-                          <m:t>𝜇</m:t>
-                        </m:r>
-                      </m:e>
-                      <m:sub>
-                        <m:r>
-                          <a:rPr lang="en-US" b="0" i="1" smtClean="0">
-                            <a:latin typeface="Cambria Math" panose="02040503050406030204" pitchFamily="18" charset="0"/>
-                          </a:rPr>
-                          <m:t>𝐵</m:t>
-                        </m:r>
-                      </m:sub>
-                    </m:sSub>
-                    <m:r>
-                      <a:rPr lang="en-US" b="0" i="1" smtClean="0">
-                        <a:latin typeface="Cambria Math" panose="02040503050406030204" pitchFamily="18" charset="0"/>
-                      </a:rPr>
-                      <m:t>=47</m:t>
-                    </m:r>
-                    <m:r>
-                      <a:rPr lang="nl-NL" b="0" i="1" smtClean="0">
-                        <a:latin typeface="Cambria Math" panose="02040503050406030204" pitchFamily="18" charset="0"/>
-                      </a:rPr>
-                      <m:t>, </m:t>
-                    </m:r>
-                    <m:sSub>
-                      <m:sSubPr>
-                        <m:ctrlPr>
-                          <a:rPr lang="en-US" b="0" i="1" smtClean="0">
-                            <a:latin typeface="Cambria Math" panose="02040503050406030204" pitchFamily="18" charset="0"/>
-                          </a:rPr>
-                        </m:ctrlPr>
-                      </m:sSubPr>
-                      <m:e>
-                        <m:r>
-                          <a:rPr lang="en-US" b="0" i="1" smtClean="0">
-                            <a:latin typeface="Cambria Math" panose="02040503050406030204" pitchFamily="18" charset="0"/>
-                          </a:rPr>
-                          <m:t>𝜎</m:t>
-                        </m:r>
-                      </m:e>
-                      <m:sub>
-                        <m:r>
-                          <a:rPr lang="en-US" b="0" i="1" smtClean="0">
-                            <a:latin typeface="Cambria Math" panose="02040503050406030204" pitchFamily="18" charset="0"/>
-                          </a:rPr>
-                          <m:t>𝐵</m:t>
-                        </m:r>
-                      </m:sub>
-                    </m:sSub>
-                    <m:r>
-                      <a:rPr lang="en-US" b="0" i="1" smtClean="0">
-                        <a:latin typeface="Cambria Math" panose="02040503050406030204" pitchFamily="18" charset="0"/>
-                      </a:rPr>
-                      <m:t>=2)</m:t>
-                    </m:r>
-                  </m:oMath>
-                </a14:m>
-                <a:endParaRPr lang="en-US" dirty="0"/>
-              </a:p>
-              <a:p>
-                <a:endParaRPr lang="en-US" dirty="0"/>
-              </a:p>
-              <a:p>
-                <a:endParaRPr lang="en-US" dirty="0" smtClean="0"/>
-              </a:p>
-              <a:p>
-                <a:pPr algn="ctr"/>
+                  <a:rPr lang="en-US" b="1" dirty="0"/>
+                  <a:t> </a:t>
+                </a:r>
+                <a:r>
+                  <a:rPr lang="en-US" b="1" dirty="0" err="1"/>
+                  <a:t>kans</a:t>
+                </a:r>
+                <a:r>
+                  <a:rPr lang="en-US" b="1" dirty="0"/>
+                  <a:t> de </a:t>
+                </a:r>
+                <a:r>
+                  <a:rPr lang="en-US" b="1" dirty="0" err="1"/>
+                  <a:t>tien</a:t>
+                </a:r>
+                <a:r>
+                  <a:rPr lang="en-US" b="1" dirty="0"/>
+                  <a:t> </a:t>
+                </a:r>
+                <a:r>
+                  <a:rPr lang="en-US" b="1" dirty="0" err="1"/>
+                  <a:t>bezoeken</a:t>
+                </a:r>
+                <a:r>
+                  <a:rPr lang="en-US" b="1" dirty="0"/>
+                  <a:t> </a:t>
+                </a:r>
                 <a:r>
                   <a:rPr lang="en-US" b="1" dirty="0" err="1" smtClean="0"/>
-                  <a:t>Welke</a:t>
+                  <a:t>afgehandeld</a:t>
                 </a:r>
                 <a:r>
                   <a:rPr lang="en-US" b="1" dirty="0" smtClean="0"/>
-                  <a:t> </a:t>
-                </a:r>
-                <a:r>
-                  <a:rPr lang="en-US" b="1" dirty="0" err="1" smtClean="0"/>
-                  <a:t>uitspraken</a:t>
-                </a:r>
-                <a:r>
-                  <a:rPr lang="en-US" b="1" dirty="0" smtClean="0"/>
-                  <a:t> </a:t>
-                </a:r>
-                <a:r>
-                  <a:rPr lang="en-US" b="1" dirty="0" err="1" smtClean="0"/>
-                  <a:t>kunnen</a:t>
-                </a:r>
-                <a:r>
-                  <a:rPr lang="en-US" b="1" dirty="0" smtClean="0"/>
-                  <a:t> we </a:t>
-                </a:r>
-                <a:r>
-                  <a:rPr lang="en-US" b="1" dirty="0" err="1" smtClean="0"/>
-                  <a:t>doen</a:t>
-                </a:r>
-                <a:r>
-                  <a:rPr lang="en-US" b="1" dirty="0" smtClean="0"/>
-                  <a:t> over </a:t>
-                </a:r>
-                <a:r>
-                  <a:rPr lang="en-US" b="1" dirty="0" err="1" smtClean="0"/>
-                  <a:t>welk</a:t>
-                </a:r>
-                <a:r>
-                  <a:rPr lang="en-US" b="1" dirty="0" smtClean="0"/>
-                  <a:t> protocol het </a:t>
-                </a:r>
-                <a:r>
-                  <a:rPr lang="en-US" b="1" dirty="0" err="1" smtClean="0"/>
-                  <a:t>meest</a:t>
-                </a:r>
-                <a:r>
-                  <a:rPr lang="en-US" b="1" dirty="0" smtClean="0"/>
-                  <a:t> efficient is?</a:t>
-                </a:r>
+                  <a:t>?</a:t>
+                </a:r>
+                <a:endParaRPr lang="nl-NL" dirty="0" smtClean="0"/>
               </a:p>
             </p:txBody>
           </p:sp>
@@ -16839,23 +16688,23 @@
         <mc:Fallback xmlns="">
           <p:sp>
             <p:nvSpPr>
-              <p:cNvPr id="6147" name="Content Placeholder 2"/>
+              <p:cNvPr id="6146" name="Title 1"/>
               <p:cNvSpPr>
                 <a:spLocks noGrp="1" noRot="1" noChangeAspect="1" noMove="1" noResize="1" noEditPoints="1" noAdjustHandles="1" noChangeArrowheads="1" noChangeShapeType="1" noTextEdit="1"/>
               </p:cNvSpPr>
               <p:nvPr>
-                <p:ph idx="1"/>
+                <p:ph type="title"/>
               </p:nvPr>
             </p:nvSpPr>
             <p:spPr>
               <a:xfrm>
-                <a:off x="812800" y="1773238"/>
-                <a:ext cx="11187856" cy="4246562"/>
+                <a:off x="814916" y="1265241"/>
+                <a:ext cx="10465659" cy="800219"/>
               </a:xfrm>
               <a:blipFill>
                 <a:blip r:embed="rId2"/>
                 <a:stretch>
-                  <a:fillRect l="-1525" t="-2009" b="-2582"/>
+                  <a:fillRect l="-1923" t="-12977" r="-1399"/>
                 </a:stretch>
               </a:blipFill>
             </p:spPr>
@@ -16904,13 +16753,37 @@
               <a:rPr lang="nl-NL" smtClean="0"/>
               <a:t>College 5b: de centrale limietstelling</a:t>
             </a:r>
+            <a:endParaRPr lang="nl-NL" dirty="0" smtClean="0"/>
           </a:p>
         </p:txBody>
       </p:sp>
+      <p:pic>
+        <p:nvPicPr>
+          <p:cNvPr id="4" name="Afbeelding 3"/>
+          <p:cNvPicPr>
+            <a:picLocks noChangeAspect="1"/>
+          </p:cNvPicPr>
+          <p:nvPr/>
+        </p:nvPicPr>
+        <p:blipFill rotWithShape="1">
+          <a:blip r:embed="rId3"/>
+          <a:srcRect l="34992" t="28003" r="3251" b="1989"/>
+          <a:stretch/>
+        </p:blipFill>
+        <p:spPr>
+          <a:xfrm>
+            <a:off x="2459597" y="1806926"/>
+            <a:ext cx="7272806" cy="4465758"/>
+          </a:xfrm>
+          <a:prstGeom prst="rect">
+            <a:avLst/>
+          </a:prstGeom>
+        </p:spPr>
+      </p:pic>
     </p:spTree>
     <p:extLst>
       <p:ext uri="{BB962C8B-B14F-4D97-AF65-F5344CB8AC3E}">
-        <p14:creationId xmlns:p14="http://schemas.microsoft.com/office/powerpoint/2010/main" val="1760505588"/>
+        <p14:creationId xmlns:p14="http://schemas.microsoft.com/office/powerpoint/2010/main" val="4079695833"/>
       </p:ext>
     </p:extLst>
   </p:cSld>
@@ -19572,6 +19445,1104 @@
             <a:pPr eaLnBrk="1" hangingPunct="1"/>
             <a:r>
               <a:rPr lang="en-US" dirty="0" err="1" smtClean="0"/>
+              <a:t>Toepassing</a:t>
+            </a:r>
+            <a:r>
+              <a:rPr lang="en-US" dirty="0" smtClean="0"/>
+              <a:t> van de </a:t>
+            </a:r>
+            <a:r>
+              <a:rPr lang="en-US" dirty="0" err="1" smtClean="0"/>
+              <a:t>normale</a:t>
+            </a:r>
+            <a:r>
+              <a:rPr lang="en-US" dirty="0" smtClean="0"/>
+              <a:t> </a:t>
+            </a:r>
+            <a:r>
+              <a:rPr lang="en-US" dirty="0" err="1" smtClean="0"/>
+              <a:t>verdeling</a:t>
+            </a:r>
+            <a:r>
+              <a:rPr lang="en-US" dirty="0" smtClean="0"/>
+              <a:t>: </a:t>
+            </a:r>
+            <a:r>
+              <a:rPr lang="en-US" dirty="0" err="1" smtClean="0"/>
+              <a:t>verschillen</a:t>
+            </a:r>
+            <a:r>
+              <a:rPr lang="en-US" dirty="0" smtClean="0"/>
+              <a:t> </a:t>
+            </a:r>
+            <a:r>
+              <a:rPr lang="en-US" dirty="0" err="1" smtClean="0"/>
+              <a:t>tussen</a:t>
+            </a:r>
+            <a:r>
+              <a:rPr lang="en-US" dirty="0" smtClean="0"/>
+              <a:t> </a:t>
+            </a:r>
+            <a:r>
+              <a:rPr lang="en-US" dirty="0" err="1" smtClean="0"/>
+              <a:t>populaties</a:t>
+            </a:r>
+            <a:endParaRPr lang="nl-NL" dirty="0" smtClean="0"/>
+          </a:p>
+        </p:txBody>
+      </p:sp>
+      <p:sp>
+        <p:nvSpPr>
+          <p:cNvPr id="6147" name="Content Placeholder 2"/>
+          <p:cNvSpPr>
+            <a:spLocks noGrp="1"/>
+          </p:cNvSpPr>
+          <p:nvPr>
+            <p:ph idx="1"/>
+          </p:nvPr>
+        </p:nvSpPr>
+        <p:spPr>
+          <a:xfrm>
+            <a:off x="812800" y="1773238"/>
+            <a:ext cx="11187856" cy="4246562"/>
+          </a:xfrm>
+        </p:spPr>
+        <p:txBody>
+          <a:bodyPr/>
+          <a:lstStyle/>
+          <a:p>
+            <a:r>
+              <a:rPr lang="nl-NL" sz="2400" dirty="0" smtClean="0"/>
+              <a:t>Een andere toepassing van de normale verdeling is het bekijken van verschillen tussen twee populaties:</a:t>
+            </a:r>
+          </a:p>
+          <a:p>
+            <a:endParaRPr lang="nl-NL" sz="2400" dirty="0"/>
+          </a:p>
+          <a:p>
+            <a:pPr marL="342900" indent="-342900">
+              <a:buFont typeface="Arial" panose="020B0604020202020204" pitchFamily="34" charset="0"/>
+              <a:buChar char="•"/>
+            </a:pPr>
+            <a:r>
+              <a:rPr lang="nl-NL" sz="2400" dirty="0" smtClean="0"/>
+              <a:t>Vergelijken van de reactietijd van cadetten en adelborsten</a:t>
+            </a:r>
+          </a:p>
+          <a:p>
+            <a:pPr marL="342900" indent="-342900">
+              <a:buFont typeface="Arial" panose="020B0604020202020204" pitchFamily="34" charset="0"/>
+              <a:buChar char="•"/>
+            </a:pPr>
+            <a:endParaRPr lang="nl-NL" sz="2400" dirty="0"/>
+          </a:p>
+          <a:p>
+            <a:pPr marL="342900" indent="-342900">
+              <a:buFont typeface="Arial" panose="020B0604020202020204" pitchFamily="34" charset="0"/>
+              <a:buChar char="•"/>
+            </a:pPr>
+            <a:r>
+              <a:rPr lang="nl-NL" sz="2400" dirty="0" smtClean="0"/>
+              <a:t>Vergelijken van het brandstofverbruik van een oud en nieuw type Boxer.</a:t>
+            </a:r>
+          </a:p>
+          <a:p>
+            <a:pPr marL="342900" indent="-342900">
+              <a:buFont typeface="Arial" panose="020B0604020202020204" pitchFamily="34" charset="0"/>
+              <a:buChar char="•"/>
+            </a:pPr>
+            <a:endParaRPr lang="nl-NL" sz="2400" dirty="0"/>
+          </a:p>
+          <a:p>
+            <a:pPr marL="342900" indent="-342900">
+              <a:buFont typeface="Arial" panose="020B0604020202020204" pitchFamily="34" charset="0"/>
+              <a:buChar char="•"/>
+            </a:pPr>
+            <a:r>
+              <a:rPr lang="nl-NL" sz="2400" dirty="0" smtClean="0"/>
+              <a:t>Vergelijken van de </a:t>
+            </a:r>
+            <a:r>
+              <a:rPr lang="nl-NL" sz="2400" dirty="0" err="1" smtClean="0"/>
+              <a:t>kogelwerendheid</a:t>
+            </a:r>
+            <a:r>
+              <a:rPr lang="nl-NL" sz="2400" dirty="0" smtClean="0"/>
+              <a:t> van twee types scherfvesten.</a:t>
+            </a:r>
+          </a:p>
+          <a:p>
+            <a:pPr marL="342900" indent="-342900">
+              <a:buFont typeface="Arial" panose="020B0604020202020204" pitchFamily="34" charset="0"/>
+              <a:buChar char="•"/>
+            </a:pPr>
+            <a:endParaRPr lang="nl-NL" sz="2400" b="1" dirty="0" smtClean="0"/>
+          </a:p>
+          <a:p>
+            <a:r>
+              <a:rPr lang="nl-NL" sz="2400" b="1" dirty="0" smtClean="0"/>
+              <a:t>Gemeenschappelijke deler: </a:t>
+            </a:r>
+          </a:p>
+          <a:p>
+            <a:r>
+              <a:rPr lang="nl-NL" sz="2400" dirty="0" smtClean="0"/>
+              <a:t>Construeer een </a:t>
+            </a:r>
+            <a:r>
+              <a:rPr lang="nl-NL" sz="2400" b="1" dirty="0" smtClean="0">
+                <a:solidFill>
+                  <a:schemeClr val="accent1"/>
+                </a:solidFill>
+              </a:rPr>
+              <a:t>verschilvariabele</a:t>
+            </a:r>
+            <a:r>
+              <a:rPr lang="nl-NL" sz="2400" b="1" dirty="0" smtClean="0"/>
+              <a:t> </a:t>
+            </a:r>
+            <a:r>
+              <a:rPr lang="nl-NL" sz="2400" dirty="0" smtClean="0"/>
+              <a:t>en bestudeer hiervan de kansverdeling.</a:t>
+            </a:r>
+          </a:p>
+          <a:p>
+            <a:pPr marL="342900" indent="-342900">
+              <a:buFont typeface="Arial" panose="020B0604020202020204" pitchFamily="34" charset="0"/>
+              <a:buChar char="•"/>
+            </a:pPr>
+            <a:endParaRPr lang="nl-NL" b="1" dirty="0"/>
+          </a:p>
+          <a:p>
+            <a:pPr marL="342900" indent="-342900">
+              <a:buFont typeface="Arial" panose="020B0604020202020204" pitchFamily="34" charset="0"/>
+              <a:buChar char="•"/>
+            </a:pPr>
+            <a:endParaRPr lang="en-US" b="1" dirty="0" smtClean="0"/>
+          </a:p>
+          <a:p>
+            <a:pPr marL="342900" indent="-342900">
+              <a:buFont typeface="Arial" panose="020B0604020202020204" pitchFamily="34" charset="0"/>
+              <a:buChar char="•"/>
+            </a:pPr>
+            <a:endParaRPr lang="en-US" b="1" dirty="0"/>
+          </a:p>
+          <a:p>
+            <a:pPr marL="342900" indent="-342900">
+              <a:buFont typeface="Arial" panose="020B0604020202020204" pitchFamily="34" charset="0"/>
+              <a:buChar char="•"/>
+            </a:pPr>
+            <a:endParaRPr lang="en-US" b="1" dirty="0" smtClean="0"/>
+          </a:p>
+        </p:txBody>
+      </p:sp>
+      <p:sp>
+        <p:nvSpPr>
+          <p:cNvPr id="6148" name="Date Placeholder 3"/>
+          <p:cNvSpPr>
+            <a:spLocks noGrp="1"/>
+          </p:cNvSpPr>
+          <p:nvPr>
+            <p:ph type="dt" sz="quarter" idx="10"/>
+          </p:nvPr>
+        </p:nvSpPr>
+        <p:spPr bwMode="auto">
+          <a:noFill/>
+          <a:ln>
+            <a:miter lim="800000"/>
+            <a:headEnd/>
+            <a:tailEnd/>
+          </a:ln>
+        </p:spPr>
+        <p:txBody>
+          <a:bodyPr wrap="square" numCol="1" anchorCtr="0" compatLnSpc="1">
+            <a:prstTxWarp prst="textNoShape">
+              <a:avLst/>
+            </a:prstTxWarp>
+          </a:bodyPr>
+          <a:lstStyle/>
+          <a:p>
+            <a:r>
+              <a:rPr lang="nl-NL" smtClean="0"/>
+              <a:t>College 5b: de centrale limietstelling</a:t>
+            </a:r>
+          </a:p>
+        </p:txBody>
+      </p:sp>
+    </p:spTree>
+    <p:extLst>
+      <p:ext uri="{BB962C8B-B14F-4D97-AF65-F5344CB8AC3E}">
+        <p14:creationId xmlns:p14="http://schemas.microsoft.com/office/powerpoint/2010/main" val="1760505588"/>
+      </p:ext>
+    </p:extLst>
+  </p:cSld>
+  <p:clrMapOvr>
+    <a:masterClrMapping/>
+  </p:clrMapOvr>
+  <p:timing>
+    <p:tnLst>
+      <p:par>
+        <p:cTn id="1" dur="indefinite" restart="never" nodeType="tmRoot"/>
+      </p:par>
+    </p:tnLst>
+  </p:timing>
+</p:sld>
+</file>
+
+<file path=ppt/slides/slide21.xml><?xml version="1.0" encoding="utf-8"?>
+<p:sld xmlns:a="http://schemas.openxmlformats.org/drawingml/2006/main" xmlns:r="http://schemas.openxmlformats.org/officeDocument/2006/relationships" xmlns:p="http://schemas.openxmlformats.org/presentationml/2006/main">
+  <p:cSld>
+    <p:spTree>
+      <p:nvGrpSpPr>
+        <p:cNvPr id="1" name=""/>
+        <p:cNvGrpSpPr/>
+        <p:nvPr/>
+      </p:nvGrpSpPr>
+      <p:grpSpPr>
+        <a:xfrm>
+          <a:off x="0" y="0"/>
+          <a:ext cx="0" cy="0"/>
+          <a:chOff x="0" y="0"/>
+          <a:chExt cx="0" cy="0"/>
+        </a:xfrm>
+      </p:grpSpPr>
+      <p:sp>
+        <p:nvSpPr>
+          <p:cNvPr id="6146" name="Title 1"/>
+          <p:cNvSpPr>
+            <a:spLocks noGrp="1"/>
+          </p:cNvSpPr>
+          <p:nvPr>
+            <p:ph type="title"/>
+          </p:nvPr>
+        </p:nvSpPr>
+        <p:spPr/>
+        <p:txBody>
+          <a:bodyPr/>
+          <a:lstStyle/>
+          <a:p>
+            <a:pPr eaLnBrk="1" hangingPunct="1"/>
+            <a:r>
+              <a:rPr lang="en-US" dirty="0" err="1" smtClean="0"/>
+              <a:t>Verschil</a:t>
+            </a:r>
+            <a:r>
+              <a:rPr lang="en-US" dirty="0" smtClean="0"/>
+              <a:t> </a:t>
+            </a:r>
+            <a:r>
+              <a:rPr lang="en-US" dirty="0" err="1" smtClean="0"/>
+              <a:t>tussen</a:t>
+            </a:r>
+            <a:r>
+              <a:rPr lang="en-US" dirty="0" smtClean="0"/>
+              <a:t> twee </a:t>
+            </a:r>
+            <a:r>
+              <a:rPr lang="en-US" dirty="0" err="1" smtClean="0"/>
+              <a:t>kansvariabelen</a:t>
+            </a:r>
+            <a:endParaRPr lang="nl-NL" dirty="0" smtClean="0"/>
+          </a:p>
+        </p:txBody>
+      </p:sp>
+      <mc:AlternateContent xmlns:mc="http://schemas.openxmlformats.org/markup-compatibility/2006" xmlns:a14="http://schemas.microsoft.com/office/drawing/2010/main">
+        <mc:Choice Requires="a14">
+          <p:sp>
+            <p:nvSpPr>
+              <p:cNvPr id="6147" name="Content Placeholder 2"/>
+              <p:cNvSpPr>
+                <a:spLocks noGrp="1"/>
+              </p:cNvSpPr>
+              <p:nvPr>
+                <p:ph idx="1"/>
+              </p:nvPr>
+            </p:nvSpPr>
+            <p:spPr>
+              <a:xfrm>
+                <a:off x="812800" y="1773238"/>
+                <a:ext cx="11187856" cy="4246562"/>
+              </a:xfrm>
+            </p:spPr>
+            <p:txBody>
+              <a:bodyPr/>
+              <a:lstStyle/>
+              <a:p>
+                <a:r>
+                  <a:rPr lang="en-US" dirty="0" smtClean="0"/>
+                  <a:t>Een </a:t>
+                </a:r>
+                <a:r>
+                  <a:rPr lang="en-US" dirty="0" err="1" smtClean="0"/>
+                  <a:t>militaire</a:t>
+                </a:r>
+                <a:r>
+                  <a:rPr lang="en-US" dirty="0"/>
+                  <a:t> </a:t>
+                </a:r>
+                <a:r>
+                  <a:rPr lang="en-US" dirty="0" err="1" smtClean="0"/>
+                  <a:t>eenheid</a:t>
+                </a:r>
+                <a:r>
+                  <a:rPr lang="en-US" dirty="0" smtClean="0"/>
+                  <a:t> </a:t>
+                </a:r>
+                <a:r>
+                  <a:rPr lang="en-US" dirty="0" err="1" smtClean="0"/>
+                  <a:t>wil</a:t>
+                </a:r>
+                <a:r>
+                  <a:rPr lang="en-US" dirty="0" smtClean="0"/>
+                  <a:t> </a:t>
+                </a:r>
+                <a:r>
+                  <a:rPr lang="en-US" dirty="0" err="1" smtClean="0"/>
+                  <a:t>evalueren</a:t>
+                </a:r>
+                <a:r>
+                  <a:rPr lang="en-US" dirty="0" smtClean="0"/>
+                  <a:t> of </a:t>
+                </a:r>
+                <a:r>
+                  <a:rPr lang="en-US" dirty="0" err="1" smtClean="0"/>
+                  <a:t>een</a:t>
+                </a:r>
+                <a:r>
+                  <a:rPr lang="en-US" dirty="0" smtClean="0"/>
+                  <a:t> </a:t>
+                </a:r>
+                <a:r>
+                  <a:rPr lang="en-US" dirty="0" err="1" smtClean="0"/>
+                  <a:t>nieuw</a:t>
+                </a:r>
+                <a:r>
+                  <a:rPr lang="en-US" dirty="0" smtClean="0"/>
+                  <a:t> </a:t>
+                </a:r>
+                <a:r>
+                  <a:rPr lang="en-US" dirty="0" err="1" smtClean="0"/>
+                  <a:t>noodprotocol</a:t>
+                </a:r>
+                <a:r>
+                  <a:rPr lang="en-US" dirty="0" smtClean="0"/>
+                  <a:t> </a:t>
+                </a:r>
+                <a:r>
+                  <a:rPr lang="en-US" dirty="0" err="1" smtClean="0"/>
+                  <a:t>leidt</a:t>
+                </a:r>
+                <a:r>
+                  <a:rPr lang="en-US" dirty="0" smtClean="0"/>
+                  <a:t> tot </a:t>
+                </a:r>
+                <a:r>
+                  <a:rPr lang="en-US" dirty="0" err="1" smtClean="0"/>
+                  <a:t>een</a:t>
+                </a:r>
+                <a:r>
+                  <a:rPr lang="en-US" dirty="0" smtClean="0"/>
+                  <a:t> </a:t>
+                </a:r>
+                <a:r>
+                  <a:rPr lang="en-US" dirty="0" err="1" smtClean="0"/>
+                  <a:t>snellere</a:t>
+                </a:r>
+                <a:r>
+                  <a:rPr lang="en-US" dirty="0" smtClean="0"/>
+                  <a:t> </a:t>
+                </a:r>
+                <a:r>
+                  <a:rPr lang="en-US" dirty="0" err="1" smtClean="0"/>
+                  <a:t>respons</a:t>
+                </a:r>
+                <a:r>
+                  <a:rPr lang="en-US" dirty="0" smtClean="0"/>
+                  <a:t> in </a:t>
+                </a:r>
+                <a:r>
+                  <a:rPr lang="en-US" dirty="0" err="1" smtClean="0"/>
+                  <a:t>crisissituaties</a:t>
+                </a:r>
+                <a:r>
+                  <a:rPr lang="en-US" dirty="0" smtClean="0"/>
+                  <a:t>, </a:t>
+                </a:r>
+                <a:r>
+                  <a:rPr lang="en-US" dirty="0" err="1" smtClean="0"/>
+                  <a:t>zoals</a:t>
+                </a:r>
+                <a:r>
+                  <a:rPr lang="en-US" dirty="0" smtClean="0"/>
+                  <a:t> </a:t>
+                </a:r>
+                <a:r>
+                  <a:rPr lang="en-US" dirty="0" err="1" smtClean="0"/>
+                  <a:t>natuurrampen</a:t>
+                </a:r>
+                <a:r>
+                  <a:rPr lang="en-US" dirty="0" smtClean="0"/>
+                  <a:t> of </a:t>
+                </a:r>
+                <a:r>
+                  <a:rPr lang="en-US" dirty="0" err="1" smtClean="0"/>
+                  <a:t>terroristische</a:t>
+                </a:r>
+                <a:r>
+                  <a:rPr lang="en-US" dirty="0" smtClean="0"/>
+                  <a:t> </a:t>
+                </a:r>
+                <a:r>
+                  <a:rPr lang="en-US" dirty="0" err="1" smtClean="0"/>
+                  <a:t>dreigingen</a:t>
+                </a:r>
+                <a:r>
+                  <a:rPr lang="en-US" dirty="0" smtClean="0"/>
+                  <a:t>. </a:t>
+                </a:r>
+              </a:p>
+              <a:p>
+                <a:pPr marL="342900" indent="-342900"/>
+                <a:endParaRPr lang="en-US" b="0" i="1" dirty="0" smtClean="0">
+                  <a:latin typeface="Cambria Math" panose="02040503050406030204" pitchFamily="18" charset="0"/>
+                </a:endParaRPr>
+              </a:p>
+              <a:p>
+                <a:pPr marL="342900" indent="-342900"/>
+                <a14:m>
+                  <m:oMath xmlns:m="http://schemas.openxmlformats.org/officeDocument/2006/math">
+                    <m:sSub>
+                      <m:sSubPr>
+                        <m:ctrlPr>
+                          <a:rPr lang="en-US" b="0" i="1" smtClean="0">
+                            <a:latin typeface="Cambria Math" panose="02040503050406030204" pitchFamily="18" charset="0"/>
+                          </a:rPr>
+                        </m:ctrlPr>
+                      </m:sSubPr>
+                      <m:e>
+                        <m:r>
+                          <a:rPr lang="en-US" b="0" i="1" smtClean="0">
+                            <a:latin typeface="Cambria Math" panose="02040503050406030204" pitchFamily="18" charset="0"/>
+                          </a:rPr>
+                          <m:t>𝑋</m:t>
+                        </m:r>
+                      </m:e>
+                      <m:sub>
+                        <m:r>
+                          <a:rPr lang="en-US" b="0" i="1" smtClean="0">
+                            <a:latin typeface="Cambria Math" panose="02040503050406030204" pitchFamily="18" charset="0"/>
+                          </a:rPr>
+                          <m:t>𝐴</m:t>
+                        </m:r>
+                      </m:sub>
+                    </m:sSub>
+                  </m:oMath>
+                </a14:m>
+                <a:r>
+                  <a:rPr lang="en-US" dirty="0" smtClean="0"/>
+                  <a:t>: </a:t>
+                </a:r>
+                <a:r>
+                  <a:rPr lang="en-US" dirty="0" err="1" smtClean="0"/>
+                  <a:t>reactietijd</a:t>
+                </a:r>
+                <a:r>
+                  <a:rPr lang="en-US" dirty="0" smtClean="0"/>
+                  <a:t> van crisis response teams </a:t>
+                </a:r>
+                <a:r>
+                  <a:rPr lang="en-US" dirty="0" err="1" smtClean="0"/>
+                  <a:t>volgens</a:t>
+                </a:r>
+                <a:r>
+                  <a:rPr lang="en-US" dirty="0" smtClean="0"/>
+                  <a:t> het </a:t>
+                </a:r>
+                <a:r>
+                  <a:rPr lang="en-US" dirty="0" err="1" smtClean="0"/>
+                  <a:t>bestaande</a:t>
+                </a:r>
+                <a:r>
+                  <a:rPr lang="en-US" dirty="0" smtClean="0"/>
+                  <a:t> protocol (in </a:t>
+                </a:r>
+                <a:r>
+                  <a:rPr lang="en-US" dirty="0" err="1" smtClean="0"/>
+                  <a:t>minuten</a:t>
+                </a:r>
+                <a:r>
+                  <a:rPr lang="en-US" dirty="0" smtClean="0"/>
+                  <a:t>)</a:t>
+                </a:r>
+                <a:endParaRPr lang="en-US" b="0" dirty="0" smtClean="0"/>
+              </a:p>
+              <a:p>
+                <a:pPr marL="342900" indent="-342900"/>
+                <a:endParaRPr lang="en-US" b="0" i="1" dirty="0" smtClean="0">
+                  <a:latin typeface="Cambria Math" panose="02040503050406030204" pitchFamily="18" charset="0"/>
+                </a:endParaRPr>
+              </a:p>
+              <a:p>
+                <a:pPr marL="342900" indent="-342900"/>
+                <a14:m>
+                  <m:oMath xmlns:m="http://schemas.openxmlformats.org/officeDocument/2006/math">
+                    <m:sSub>
+                      <m:sSubPr>
+                        <m:ctrlPr>
+                          <a:rPr lang="en-US" b="0" i="1" smtClean="0">
+                            <a:latin typeface="Cambria Math" panose="02040503050406030204" pitchFamily="18" charset="0"/>
+                          </a:rPr>
+                        </m:ctrlPr>
+                      </m:sSubPr>
+                      <m:e>
+                        <m:r>
+                          <a:rPr lang="en-US" b="0" i="1" smtClean="0">
+                            <a:latin typeface="Cambria Math" panose="02040503050406030204" pitchFamily="18" charset="0"/>
+                          </a:rPr>
+                          <m:t>𝑋</m:t>
+                        </m:r>
+                      </m:e>
+                      <m:sub>
+                        <m:r>
+                          <a:rPr lang="en-US" b="0" i="1" smtClean="0">
+                            <a:latin typeface="Cambria Math" panose="02040503050406030204" pitchFamily="18" charset="0"/>
+                          </a:rPr>
+                          <m:t>𝐵</m:t>
+                        </m:r>
+                      </m:sub>
+                    </m:sSub>
+                    <m:r>
+                      <a:rPr lang="en-US" b="0" i="1" smtClean="0">
+                        <a:latin typeface="Cambria Math" panose="02040503050406030204" pitchFamily="18" charset="0"/>
+                      </a:rPr>
+                      <m:t>:</m:t>
+                    </m:r>
+                  </m:oMath>
+                </a14:m>
+                <a:r>
+                  <a:rPr lang="en-US" dirty="0" smtClean="0"/>
+                  <a:t> </a:t>
+                </a:r>
+                <a:r>
+                  <a:rPr lang="en-US" dirty="0" err="1" smtClean="0"/>
+                  <a:t>reactietijd</a:t>
+                </a:r>
+                <a:r>
+                  <a:rPr lang="en-US" dirty="0" smtClean="0"/>
+                  <a:t> </a:t>
+                </a:r>
+                <a:r>
+                  <a:rPr lang="en-US" dirty="0"/>
+                  <a:t>van crisis response teams </a:t>
+                </a:r>
+                <a:r>
+                  <a:rPr lang="en-US" dirty="0" err="1" smtClean="0"/>
+                  <a:t>volgens</a:t>
+                </a:r>
+                <a:r>
+                  <a:rPr lang="en-US" dirty="0" smtClean="0"/>
+                  <a:t> </a:t>
+                </a:r>
+                <a:r>
+                  <a:rPr lang="en-US" dirty="0"/>
+                  <a:t>het </a:t>
+                </a:r>
+                <a:r>
+                  <a:rPr lang="en-US" dirty="0" err="1" smtClean="0"/>
+                  <a:t>nieuwe</a:t>
+                </a:r>
+                <a:r>
+                  <a:rPr lang="en-US" dirty="0" smtClean="0"/>
+                  <a:t> </a:t>
+                </a:r>
+                <a:r>
+                  <a:rPr lang="en-US" dirty="0"/>
+                  <a:t>protocol </a:t>
+                </a:r>
+                <a:r>
+                  <a:rPr lang="en-US" dirty="0" smtClean="0"/>
+                  <a:t>(in </a:t>
+                </a:r>
+                <a:r>
+                  <a:rPr lang="en-US" dirty="0" err="1" smtClean="0"/>
+                  <a:t>minuten</a:t>
+                </a:r>
+                <a:r>
+                  <a:rPr lang="en-US" dirty="0" smtClean="0"/>
+                  <a:t>)</a:t>
+                </a:r>
+                <a:endParaRPr lang="en-US" dirty="0"/>
+              </a:p>
+              <a:p>
+                <a:pPr marL="342900" indent="-342900"/>
+                <a:endParaRPr lang="en-US" dirty="0" smtClean="0"/>
+              </a:p>
+              <a:p>
+                <a:pPr marL="342900" indent="-342900"/>
+                <a:endParaRPr lang="en-US" dirty="0"/>
+              </a:p>
+              <a:p>
+                <a:r>
+                  <a:rPr lang="en-US" dirty="0" err="1" smtClean="0"/>
+                  <a:t>Stel</a:t>
+                </a:r>
+                <a:r>
+                  <a:rPr lang="en-US" dirty="0" smtClean="0"/>
+                  <a:t> nu </a:t>
+                </a:r>
+                <a:r>
+                  <a:rPr lang="en-US" dirty="0" err="1" smtClean="0"/>
+                  <a:t>dat</a:t>
+                </a:r>
+                <a:r>
+                  <a:rPr lang="en-US" dirty="0" smtClean="0"/>
+                  <a:t> we </a:t>
+                </a:r>
+                <a:r>
+                  <a:rPr lang="en-US" dirty="0" err="1" smtClean="0"/>
+                  <a:t>weten</a:t>
+                </a:r>
+                <a:r>
+                  <a:rPr lang="en-US" dirty="0" smtClean="0"/>
+                  <a:t> </a:t>
+                </a:r>
+                <a:r>
+                  <a:rPr lang="en-US" dirty="0" err="1" smtClean="0"/>
+                  <a:t>dat</a:t>
+                </a:r>
+                <a:r>
+                  <a:rPr lang="en-US" dirty="0" smtClean="0"/>
+                  <a:t> </a:t>
+                </a:r>
+                <a14:m>
+                  <m:oMath xmlns:m="http://schemas.openxmlformats.org/officeDocument/2006/math">
+                    <m:sSub>
+                      <m:sSubPr>
+                        <m:ctrlPr>
+                          <a:rPr lang="en-US" b="0" i="1" smtClean="0">
+                            <a:latin typeface="Cambria Math" panose="02040503050406030204" pitchFamily="18" charset="0"/>
+                          </a:rPr>
+                        </m:ctrlPr>
+                      </m:sSubPr>
+                      <m:e>
+                        <m:r>
+                          <a:rPr lang="en-US" b="0" i="1" smtClean="0">
+                            <a:latin typeface="Cambria Math" panose="02040503050406030204" pitchFamily="18" charset="0"/>
+                          </a:rPr>
+                          <m:t>𝑋</m:t>
+                        </m:r>
+                      </m:e>
+                      <m:sub>
+                        <m:r>
+                          <a:rPr lang="en-US" b="0" i="1" smtClean="0">
+                            <a:latin typeface="Cambria Math" panose="02040503050406030204" pitchFamily="18" charset="0"/>
+                          </a:rPr>
+                          <m:t>𝐴</m:t>
+                        </m:r>
+                      </m:sub>
+                    </m:sSub>
+                    <m:r>
+                      <a:rPr lang="en-US" b="0" i="1" smtClean="0">
+                        <a:latin typeface="Cambria Math" panose="02040503050406030204" pitchFamily="18" charset="0"/>
+                      </a:rPr>
+                      <m:t>∼</m:t>
+                    </m:r>
+                    <m:r>
+                      <a:rPr lang="en-US" b="0" i="1" smtClean="0">
+                        <a:latin typeface="Cambria Math" panose="02040503050406030204" pitchFamily="18" charset="0"/>
+                      </a:rPr>
+                      <m:t>𝑁</m:t>
+                    </m:r>
+                    <m:r>
+                      <a:rPr lang="en-US" b="0" i="1" smtClean="0">
+                        <a:latin typeface="Cambria Math" panose="02040503050406030204" pitchFamily="18" charset="0"/>
+                      </a:rPr>
+                      <m:t>(</m:t>
+                    </m:r>
+                    <m:sSub>
+                      <m:sSubPr>
+                        <m:ctrlPr>
+                          <a:rPr lang="en-US" b="0" i="1" smtClean="0">
+                            <a:latin typeface="Cambria Math" panose="02040503050406030204" pitchFamily="18" charset="0"/>
+                          </a:rPr>
+                        </m:ctrlPr>
+                      </m:sSubPr>
+                      <m:e>
+                        <m:r>
+                          <a:rPr lang="en-US" b="0" i="1" smtClean="0">
+                            <a:latin typeface="Cambria Math" panose="02040503050406030204" pitchFamily="18" charset="0"/>
+                          </a:rPr>
+                          <m:t>𝜇</m:t>
+                        </m:r>
+                      </m:e>
+                      <m:sub>
+                        <m:r>
+                          <a:rPr lang="en-US" b="0" i="1" smtClean="0">
+                            <a:latin typeface="Cambria Math" panose="02040503050406030204" pitchFamily="18" charset="0"/>
+                          </a:rPr>
+                          <m:t>𝐴</m:t>
+                        </m:r>
+                      </m:sub>
+                    </m:sSub>
+                    <m:r>
+                      <a:rPr lang="en-US" b="0" i="1" smtClean="0">
+                        <a:latin typeface="Cambria Math" panose="02040503050406030204" pitchFamily="18" charset="0"/>
+                      </a:rPr>
+                      <m:t>=50</m:t>
+                    </m:r>
+                    <m:r>
+                      <a:rPr lang="nl-NL" b="0" i="1" smtClean="0">
+                        <a:latin typeface="Cambria Math" panose="02040503050406030204" pitchFamily="18" charset="0"/>
+                      </a:rPr>
+                      <m:t>,</m:t>
+                    </m:r>
+                    <m:sSub>
+                      <m:sSubPr>
+                        <m:ctrlPr>
+                          <a:rPr lang="en-US" b="0" i="1" smtClean="0">
+                            <a:latin typeface="Cambria Math" panose="02040503050406030204" pitchFamily="18" charset="0"/>
+                          </a:rPr>
+                        </m:ctrlPr>
+                      </m:sSubPr>
+                      <m:e>
+                        <m:r>
+                          <a:rPr lang="en-US" b="0" i="1" smtClean="0">
+                            <a:latin typeface="Cambria Math" panose="02040503050406030204" pitchFamily="18" charset="0"/>
+                          </a:rPr>
+                          <m:t>𝜎</m:t>
+                        </m:r>
+                      </m:e>
+                      <m:sub>
+                        <m:r>
+                          <a:rPr lang="en-US" b="0" i="1" smtClean="0">
+                            <a:latin typeface="Cambria Math" panose="02040503050406030204" pitchFamily="18" charset="0"/>
+                          </a:rPr>
+                          <m:t>𝐴</m:t>
+                        </m:r>
+                      </m:sub>
+                    </m:sSub>
+                    <m:r>
+                      <a:rPr lang="en-US" b="0" i="1" smtClean="0">
+                        <a:latin typeface="Cambria Math" panose="02040503050406030204" pitchFamily="18" charset="0"/>
+                      </a:rPr>
+                      <m:t>=5)</m:t>
+                    </m:r>
+                  </m:oMath>
+                </a14:m>
+                <a:r>
+                  <a:rPr lang="en-US" dirty="0" smtClean="0"/>
+                  <a:t> </a:t>
+                </a:r>
+                <a:r>
+                  <a:rPr lang="en-US" dirty="0" err="1" smtClean="0"/>
+                  <a:t>en</a:t>
+                </a:r>
+                <a:r>
+                  <a:rPr lang="en-US" dirty="0" smtClean="0"/>
+                  <a:t> </a:t>
+                </a:r>
+                <a14:m>
+                  <m:oMath xmlns:m="http://schemas.openxmlformats.org/officeDocument/2006/math">
+                    <m:sSub>
+                      <m:sSubPr>
+                        <m:ctrlPr>
+                          <a:rPr lang="en-US" b="0" i="1" smtClean="0">
+                            <a:latin typeface="Cambria Math" panose="02040503050406030204" pitchFamily="18" charset="0"/>
+                          </a:rPr>
+                        </m:ctrlPr>
+                      </m:sSubPr>
+                      <m:e>
+                        <m:r>
+                          <a:rPr lang="en-US" b="0" i="1" smtClean="0">
+                            <a:latin typeface="Cambria Math" panose="02040503050406030204" pitchFamily="18" charset="0"/>
+                          </a:rPr>
+                          <m:t>𝑋</m:t>
+                        </m:r>
+                      </m:e>
+                      <m:sub>
+                        <m:r>
+                          <a:rPr lang="en-US" b="0" i="1" smtClean="0">
+                            <a:latin typeface="Cambria Math" panose="02040503050406030204" pitchFamily="18" charset="0"/>
+                          </a:rPr>
+                          <m:t>𝐵</m:t>
+                        </m:r>
+                      </m:sub>
+                    </m:sSub>
+                    <m:r>
+                      <a:rPr lang="en-US" b="0" i="1" smtClean="0">
+                        <a:latin typeface="Cambria Math" panose="02040503050406030204" pitchFamily="18" charset="0"/>
+                      </a:rPr>
+                      <m:t>∼</m:t>
+                    </m:r>
+                    <m:r>
+                      <a:rPr lang="en-US" b="0" i="1" smtClean="0">
+                        <a:latin typeface="Cambria Math" panose="02040503050406030204" pitchFamily="18" charset="0"/>
+                      </a:rPr>
+                      <m:t>𝑁</m:t>
+                    </m:r>
+                    <m:r>
+                      <a:rPr lang="en-US" b="0" i="1" smtClean="0">
+                        <a:latin typeface="Cambria Math" panose="02040503050406030204" pitchFamily="18" charset="0"/>
+                      </a:rPr>
+                      <m:t>(</m:t>
+                    </m:r>
+                    <m:sSub>
+                      <m:sSubPr>
+                        <m:ctrlPr>
+                          <a:rPr lang="en-US" b="0" i="1" smtClean="0">
+                            <a:latin typeface="Cambria Math" panose="02040503050406030204" pitchFamily="18" charset="0"/>
+                          </a:rPr>
+                        </m:ctrlPr>
+                      </m:sSubPr>
+                      <m:e>
+                        <m:r>
+                          <a:rPr lang="en-US" b="0" i="1" smtClean="0">
+                            <a:latin typeface="Cambria Math" panose="02040503050406030204" pitchFamily="18" charset="0"/>
+                          </a:rPr>
+                          <m:t>𝜇</m:t>
+                        </m:r>
+                      </m:e>
+                      <m:sub>
+                        <m:r>
+                          <a:rPr lang="en-US" b="0" i="1" smtClean="0">
+                            <a:latin typeface="Cambria Math" panose="02040503050406030204" pitchFamily="18" charset="0"/>
+                          </a:rPr>
+                          <m:t>𝐵</m:t>
+                        </m:r>
+                      </m:sub>
+                    </m:sSub>
+                    <m:r>
+                      <a:rPr lang="en-US" b="0" i="1" smtClean="0">
+                        <a:latin typeface="Cambria Math" panose="02040503050406030204" pitchFamily="18" charset="0"/>
+                      </a:rPr>
+                      <m:t>=47</m:t>
+                    </m:r>
+                    <m:r>
+                      <a:rPr lang="nl-NL" b="0" i="1" smtClean="0">
+                        <a:latin typeface="Cambria Math" panose="02040503050406030204" pitchFamily="18" charset="0"/>
+                      </a:rPr>
+                      <m:t>, </m:t>
+                    </m:r>
+                    <m:sSub>
+                      <m:sSubPr>
+                        <m:ctrlPr>
+                          <a:rPr lang="en-US" b="0" i="1" smtClean="0">
+                            <a:latin typeface="Cambria Math" panose="02040503050406030204" pitchFamily="18" charset="0"/>
+                          </a:rPr>
+                        </m:ctrlPr>
+                      </m:sSubPr>
+                      <m:e>
+                        <m:r>
+                          <a:rPr lang="en-US" b="0" i="1" smtClean="0">
+                            <a:latin typeface="Cambria Math" panose="02040503050406030204" pitchFamily="18" charset="0"/>
+                          </a:rPr>
+                          <m:t>𝜎</m:t>
+                        </m:r>
+                      </m:e>
+                      <m:sub>
+                        <m:r>
+                          <a:rPr lang="en-US" b="0" i="1" smtClean="0">
+                            <a:latin typeface="Cambria Math" panose="02040503050406030204" pitchFamily="18" charset="0"/>
+                          </a:rPr>
+                          <m:t>𝐵</m:t>
+                        </m:r>
+                      </m:sub>
+                    </m:sSub>
+                    <m:r>
+                      <a:rPr lang="en-US" b="0" i="1" smtClean="0">
+                        <a:latin typeface="Cambria Math" panose="02040503050406030204" pitchFamily="18" charset="0"/>
+                      </a:rPr>
+                      <m:t>=2)</m:t>
+                    </m:r>
+                  </m:oMath>
+                </a14:m>
+                <a:endParaRPr lang="en-US" dirty="0"/>
+              </a:p>
+              <a:p>
+                <a:endParaRPr lang="en-US" dirty="0"/>
+              </a:p>
+              <a:p>
+                <a:endParaRPr lang="en-US" dirty="0" smtClean="0"/>
+              </a:p>
+              <a:p>
+                <a:r>
+                  <a:rPr lang="en-US" b="1" dirty="0" err="1" smtClean="0"/>
+                  <a:t>Welke</a:t>
+                </a:r>
+                <a:r>
+                  <a:rPr lang="en-US" b="1" dirty="0" smtClean="0"/>
+                  <a:t> </a:t>
+                </a:r>
+                <a:r>
+                  <a:rPr lang="en-US" b="1" dirty="0" err="1" smtClean="0"/>
+                  <a:t>uitspraken</a:t>
+                </a:r>
+                <a:r>
+                  <a:rPr lang="en-US" b="1" dirty="0" smtClean="0"/>
+                  <a:t> </a:t>
+                </a:r>
+                <a:r>
+                  <a:rPr lang="en-US" b="1" dirty="0" err="1" smtClean="0"/>
+                  <a:t>kunnen</a:t>
+                </a:r>
+                <a:r>
+                  <a:rPr lang="en-US" b="1" dirty="0" smtClean="0"/>
+                  <a:t> we </a:t>
+                </a:r>
+                <a:r>
+                  <a:rPr lang="en-US" b="1" dirty="0" err="1" smtClean="0"/>
+                  <a:t>doen</a:t>
+                </a:r>
+                <a:r>
+                  <a:rPr lang="en-US" b="1" dirty="0" smtClean="0"/>
+                  <a:t> over </a:t>
+                </a:r>
+                <a:r>
+                  <a:rPr lang="en-US" b="1" dirty="0" err="1" smtClean="0"/>
+                  <a:t>welk</a:t>
+                </a:r>
+                <a:r>
+                  <a:rPr lang="en-US" b="1" dirty="0" smtClean="0"/>
+                  <a:t> protocol het </a:t>
+                </a:r>
+                <a:r>
+                  <a:rPr lang="en-US" b="1" dirty="0" err="1" smtClean="0"/>
+                  <a:t>meest</a:t>
+                </a:r>
+                <a:r>
+                  <a:rPr lang="en-US" b="1" dirty="0" smtClean="0"/>
+                  <a:t> efficient is?</a:t>
+                </a:r>
+              </a:p>
+            </p:txBody>
+          </p:sp>
+        </mc:Choice>
+        <mc:Fallback xmlns="">
+          <p:sp>
+            <p:nvSpPr>
+              <p:cNvPr id="6147" name="Content Placeholder 2"/>
+              <p:cNvSpPr>
+                <a:spLocks noGrp="1" noRot="1" noChangeAspect="1" noMove="1" noResize="1" noEditPoints="1" noAdjustHandles="1" noChangeArrowheads="1" noChangeShapeType="1" noTextEdit="1"/>
+              </p:cNvSpPr>
+              <p:nvPr>
+                <p:ph idx="1"/>
+              </p:nvPr>
+            </p:nvSpPr>
+            <p:spPr>
+              <a:xfrm>
+                <a:off x="812800" y="1773238"/>
+                <a:ext cx="11187856" cy="4246562"/>
+              </a:xfrm>
+              <a:blipFill>
+                <a:blip r:embed="rId2"/>
+                <a:stretch>
+                  <a:fillRect l="-1525" t="-2009" b="-2582"/>
+                </a:stretch>
+              </a:blipFill>
+            </p:spPr>
+            <p:txBody>
+              <a:bodyPr/>
+              <a:lstStyle/>
+              <a:p>
+                <a:r>
+                  <a:rPr lang="nl-NL">
+                    <a:noFill/>
+                  </a:rPr>
+                  <a:t> </a:t>
+                </a:r>
+              </a:p>
+            </p:txBody>
+          </p:sp>
+        </mc:Fallback>
+      </mc:AlternateContent>
+      <p:sp>
+        <p:nvSpPr>
+          <p:cNvPr id="6148" name="Date Placeholder 3"/>
+          <p:cNvSpPr>
+            <a:spLocks noGrp="1"/>
+          </p:cNvSpPr>
+          <p:nvPr>
+            <p:ph type="dt" sz="quarter" idx="10"/>
+          </p:nvPr>
+        </p:nvSpPr>
+        <p:spPr bwMode="auto">
+          <a:noFill/>
+          <a:ln>
+            <a:miter lim="800000"/>
+            <a:headEnd/>
+            <a:tailEnd/>
+          </a:ln>
+        </p:spPr>
+        <p:txBody>
+          <a:bodyPr wrap="square" numCol="1" anchorCtr="0" compatLnSpc="1">
+            <a:prstTxWarp prst="textNoShape">
+              <a:avLst/>
+            </a:prstTxWarp>
+          </a:bodyPr>
+          <a:lstStyle/>
+          <a:p>
+            <a:r>
+              <a:rPr lang="nl-NL" smtClean="0"/>
+              <a:t>College 5b: de centrale limietstelling</a:t>
+            </a:r>
+          </a:p>
+        </p:txBody>
+      </p:sp>
+    </p:spTree>
+    <p:extLst>
+      <p:ext uri="{BB962C8B-B14F-4D97-AF65-F5344CB8AC3E}">
+        <p14:creationId xmlns:p14="http://schemas.microsoft.com/office/powerpoint/2010/main" val="4188287378"/>
+      </p:ext>
+    </p:extLst>
+  </p:cSld>
+  <p:clrMapOvr>
+    <a:masterClrMapping/>
+  </p:clrMapOvr>
+  <p:timing>
+    <p:tnLst>
+      <p:par>
+        <p:cTn id="1" dur="indefinite" restart="never" nodeType="tmRoot"/>
+      </p:par>
+    </p:tnLst>
+  </p:timing>
+</p:sld>
+</file>
+
+<file path=ppt/slides/slide22.xml><?xml version="1.0" encoding="utf-8"?>
+<p:sld xmlns:a="http://schemas.openxmlformats.org/drawingml/2006/main" xmlns:r="http://schemas.openxmlformats.org/officeDocument/2006/relationships" xmlns:p="http://schemas.openxmlformats.org/presentationml/2006/main">
+  <p:cSld>
+    <p:spTree>
+      <p:nvGrpSpPr>
+        <p:cNvPr id="1" name=""/>
+        <p:cNvGrpSpPr/>
+        <p:nvPr/>
+      </p:nvGrpSpPr>
+      <p:grpSpPr>
+        <a:xfrm>
+          <a:off x="0" y="0"/>
+          <a:ext cx="0" cy="0"/>
+          <a:chOff x="0" y="0"/>
+          <a:chExt cx="0" cy="0"/>
+        </a:xfrm>
+      </p:grpSpPr>
+      <p:sp>
+        <p:nvSpPr>
+          <p:cNvPr id="6146" name="Title 1"/>
+          <p:cNvSpPr>
+            <a:spLocks noGrp="1"/>
+          </p:cNvSpPr>
+          <p:nvPr>
+            <p:ph type="title"/>
+          </p:nvPr>
+        </p:nvSpPr>
+        <p:spPr/>
+        <p:txBody>
+          <a:bodyPr/>
+          <a:lstStyle/>
+          <a:p>
+            <a:pPr eaLnBrk="1" hangingPunct="1"/>
+            <a:r>
+              <a:rPr lang="en-US" dirty="0" err="1" smtClean="0"/>
               <a:t>Verschil</a:t>
             </a:r>
             <a:r>
@@ -20900,7 +21871,7 @@
 </p:sld>
 </file>
 
-<file path=ppt/slides/slide21.xml><?xml version="1.0" encoding="utf-8"?>
+<file path=ppt/slides/slide23.xml><?xml version="1.0" encoding="utf-8"?>
 <p:sld xmlns:a="http://schemas.openxmlformats.org/drawingml/2006/main" xmlns:r="http://schemas.openxmlformats.org/officeDocument/2006/relationships" xmlns:p="http://schemas.openxmlformats.org/presentationml/2006/main">
   <p:cSld>
     <p:spTree>
@@ -21825,7 +22796,25 @@
                         <a:rPr lang="en-US" b="0" i="1" smtClean="0">
                           <a:latin typeface="Cambria Math" panose="02040503050406030204" pitchFamily="18" charset="0"/>
                         </a:rPr>
-                        <m:t>≈0,7113</m:t>
+                        <m:t>≈0</m:t>
+                      </m:r>
+                      <m:r>
+                        <a:rPr lang="nl-NL" b="0" i="1" smtClean="0">
+                          <a:latin typeface="Cambria Math" panose="02040503050406030204" pitchFamily="18" charset="0"/>
+                        </a:rPr>
+                        <m:t>.</m:t>
+                      </m:r>
+                      <m:r>
+                        <a:rPr lang="en-US" b="0" i="1" smtClean="0">
+                          <a:latin typeface="Cambria Math" panose="02040503050406030204" pitchFamily="18" charset="0"/>
+                        </a:rPr>
+                        <m:t>7113</m:t>
+                      </m:r>
+                      <m:r>
+                        <a:rPr lang="nl-NL" b="0" i="1" smtClean="0">
+                          <a:latin typeface="Cambria Math" panose="02040503050406030204" pitchFamily="18" charset="0"/>
+                        </a:rPr>
+                        <m:t>.</m:t>
                       </m:r>
                     </m:oMath>
                   </m:oMathPara>
@@ -22017,210 +23006,14 @@
   <p:timing>
     <p:tnLst>
       <p:par>
-        <p:cTn id="1" dur="indefinite" restart="never" nodeType="tmRoot">
-          <p:childTnLst>
-            <p:seq concurrent="1" nextAc="seek">
-              <p:cTn id="2" dur="indefinite" nodeType="mainSeq">
-                <p:childTnLst>
-                  <p:par>
-                    <p:cTn id="3" fill="hold">
-                      <p:stCondLst>
-                        <p:cond delay="indefinite"/>
-                      </p:stCondLst>
-                      <p:childTnLst>
-                        <p:par>
-                          <p:cTn id="4" fill="hold">
-                            <p:stCondLst>
-                              <p:cond delay="0"/>
-                            </p:stCondLst>
-                            <p:childTnLst>
-                              <p:par>
-                                <p:cTn id="5" presetID="1" presetClass="entr" presetSubtype="0" fill="hold" nodeType="clickEffect">
-                                  <p:stCondLst>
-                                    <p:cond delay="0"/>
-                                  </p:stCondLst>
-                                  <p:childTnLst>
-                                    <p:set>
-                                      <p:cBhvr>
-                                        <p:cTn id="6" dur="1" fill="hold">
-                                          <p:stCondLst>
-                                            <p:cond delay="0"/>
-                                          </p:stCondLst>
-                                        </p:cTn>
-                                        <p:tgtEl>
-                                          <p:spTgt spid="6147">
-                                            <p:txEl>
-                                              <p:pRg st="3" end="3"/>
-                                            </p:txEl>
-                                          </p:spTgt>
-                                        </p:tgtEl>
-                                        <p:attrNameLst>
-                                          <p:attrName>style.visibility</p:attrName>
-                                        </p:attrNameLst>
-                                      </p:cBhvr>
-                                      <p:to>
-                                        <p:strVal val="visible"/>
-                                      </p:to>
-                                    </p:set>
-                                  </p:childTnLst>
-                                </p:cTn>
-                              </p:par>
-                              <p:par>
-                                <p:cTn id="7" presetID="1" presetClass="entr" presetSubtype="0" fill="hold" nodeType="withEffect">
-                                  <p:stCondLst>
-                                    <p:cond delay="0"/>
-                                  </p:stCondLst>
-                                  <p:childTnLst>
-                                    <p:set>
-                                      <p:cBhvr>
-                                        <p:cTn id="8" dur="1" fill="hold">
-                                          <p:stCondLst>
-                                            <p:cond delay="0"/>
-                                          </p:stCondLst>
-                                        </p:cTn>
-                                        <p:tgtEl>
-                                          <p:spTgt spid="6147">
-                                            <p:txEl>
-                                              <p:pRg st="5" end="5"/>
-                                            </p:txEl>
-                                          </p:spTgt>
-                                        </p:tgtEl>
-                                        <p:attrNameLst>
-                                          <p:attrName>style.visibility</p:attrName>
-                                        </p:attrNameLst>
-                                      </p:cBhvr>
-                                      <p:to>
-                                        <p:strVal val="visible"/>
-                                      </p:to>
-                                    </p:set>
-                                  </p:childTnLst>
-                                </p:cTn>
-                              </p:par>
-                              <p:par>
-                                <p:cTn id="9" presetID="1" presetClass="entr" presetSubtype="0" fill="hold" nodeType="withEffect">
-                                  <p:stCondLst>
-                                    <p:cond delay="0"/>
-                                  </p:stCondLst>
-                                  <p:childTnLst>
-                                    <p:set>
-                                      <p:cBhvr>
-                                        <p:cTn id="10" dur="1" fill="hold">
-                                          <p:stCondLst>
-                                            <p:cond delay="0"/>
-                                          </p:stCondLst>
-                                        </p:cTn>
-                                        <p:tgtEl>
-                                          <p:spTgt spid="6147">
-                                            <p:txEl>
-                                              <p:pRg st="6" end="6"/>
-                                            </p:txEl>
-                                          </p:spTgt>
-                                        </p:tgtEl>
-                                        <p:attrNameLst>
-                                          <p:attrName>style.visibility</p:attrName>
-                                        </p:attrNameLst>
-                                      </p:cBhvr>
-                                      <p:to>
-                                        <p:strVal val="visible"/>
-                                      </p:to>
-                                    </p:set>
-                                  </p:childTnLst>
-                                </p:cTn>
-                              </p:par>
-                              <p:par>
-                                <p:cTn id="11" presetID="1" presetClass="entr" presetSubtype="0" fill="hold" nodeType="withEffect">
-                                  <p:stCondLst>
-                                    <p:cond delay="0"/>
-                                  </p:stCondLst>
-                                  <p:childTnLst>
-                                    <p:set>
-                                      <p:cBhvr>
-                                        <p:cTn id="12" dur="1" fill="hold">
-                                          <p:stCondLst>
-                                            <p:cond delay="0"/>
-                                          </p:stCondLst>
-                                        </p:cTn>
-                                        <p:tgtEl>
-                                          <p:spTgt spid="6147">
-                                            <p:txEl>
-                                              <p:pRg st="8" end="8"/>
-                                            </p:txEl>
-                                          </p:spTgt>
-                                        </p:tgtEl>
-                                        <p:attrNameLst>
-                                          <p:attrName>style.visibility</p:attrName>
-                                        </p:attrNameLst>
-                                      </p:cBhvr>
-                                      <p:to>
-                                        <p:strVal val="visible"/>
-                                      </p:to>
-                                    </p:set>
-                                  </p:childTnLst>
-                                </p:cTn>
-                              </p:par>
-                              <p:par>
-                                <p:cTn id="13" presetID="1" presetClass="entr" presetSubtype="0" fill="hold" nodeType="withEffect">
-                                  <p:stCondLst>
-                                    <p:cond delay="0"/>
-                                  </p:stCondLst>
-                                  <p:childTnLst>
-                                    <p:set>
-                                      <p:cBhvr>
-                                        <p:cTn id="14" dur="1" fill="hold">
-                                          <p:stCondLst>
-                                            <p:cond delay="0"/>
-                                          </p:stCondLst>
-                                        </p:cTn>
-                                        <p:tgtEl>
-                                          <p:spTgt spid="6147">
-                                            <p:txEl>
-                                              <p:pRg st="10" end="10"/>
-                                            </p:txEl>
-                                          </p:spTgt>
-                                        </p:tgtEl>
-                                        <p:attrNameLst>
-                                          <p:attrName>style.visibility</p:attrName>
-                                        </p:attrNameLst>
-                                      </p:cBhvr>
-                                      <p:to>
-                                        <p:strVal val="visible"/>
-                                      </p:to>
-                                    </p:set>
-                                  </p:childTnLst>
-                                </p:cTn>
-                              </p:par>
-                            </p:childTnLst>
-                          </p:cTn>
-                        </p:par>
-                      </p:childTnLst>
-                    </p:cTn>
-                  </p:par>
-                </p:childTnLst>
-              </p:cTn>
-              <p:prevCondLst>
-                <p:cond evt="onPrev" delay="0">
-                  <p:tgtEl>
-                    <p:sldTgt/>
-                  </p:tgtEl>
-                </p:cond>
-              </p:prevCondLst>
-              <p:nextCondLst>
-                <p:cond evt="onNext" delay="0">
-                  <p:tgtEl>
-                    <p:sldTgt/>
-                  </p:tgtEl>
-                </p:cond>
-              </p:nextCondLst>
-            </p:seq>
-          </p:childTnLst>
-        </p:cTn>
+        <p:cTn id="1" dur="indefinite" restart="never" nodeType="tmRoot"/>
       </p:par>
     </p:tnLst>
   </p:timing>
 </p:sld>
 </file>
 
-<file path=ppt/slides/slide22.xml><?xml version="1.0" encoding="utf-8"?>
+<file path=ppt/slides/slide24.xml><?xml version="1.0" encoding="utf-8"?>
 <p:sld xmlns:a="http://schemas.openxmlformats.org/drawingml/2006/main" xmlns:r="http://schemas.openxmlformats.org/officeDocument/2006/relationships" xmlns:p="http://schemas.openxmlformats.org/presentationml/2006/main">
   <p:cSld>
     <p:spTree>
@@ -24116,7 +24909,539 @@
 </p:sld>
 </file>
 
-<file path=ppt/slides/slide23.xml><?xml version="1.0" encoding="utf-8"?>
+<file path=ppt/slides/slide25.xml><?xml version="1.0" encoding="utf-8"?>
+<p:sld xmlns:a="http://schemas.openxmlformats.org/drawingml/2006/main" xmlns:r="http://schemas.openxmlformats.org/officeDocument/2006/relationships" xmlns:p="http://schemas.openxmlformats.org/presentationml/2006/main">
+  <p:cSld>
+    <p:spTree>
+      <p:nvGrpSpPr>
+        <p:cNvPr id="1" name=""/>
+        <p:cNvGrpSpPr/>
+        <p:nvPr/>
+      </p:nvGrpSpPr>
+      <p:grpSpPr>
+        <a:xfrm>
+          <a:off x="0" y="0"/>
+          <a:ext cx="0" cy="0"/>
+          <a:chOff x="0" y="0"/>
+          <a:chExt cx="0" cy="0"/>
+        </a:xfrm>
+      </p:grpSpPr>
+      <p:sp>
+        <p:nvSpPr>
+          <p:cNvPr id="6146" name="Title 1"/>
+          <p:cNvSpPr>
+            <a:spLocks noGrp="1"/>
+          </p:cNvSpPr>
+          <p:nvPr>
+            <p:ph type="title"/>
+          </p:nvPr>
+        </p:nvSpPr>
+        <p:spPr/>
+        <p:txBody>
+          <a:bodyPr/>
+          <a:lstStyle/>
+          <a:p>
+            <a:pPr eaLnBrk="1" hangingPunct="1"/>
+            <a:r>
+              <a:rPr lang="en-US" dirty="0" err="1" smtClean="0"/>
+              <a:t>Samenvatting</a:t>
+            </a:r>
+            <a:endParaRPr lang="nl-NL" dirty="0" smtClean="0"/>
+          </a:p>
+        </p:txBody>
+      </p:sp>
+      <p:sp>
+        <p:nvSpPr>
+          <p:cNvPr id="6147" name="Content Placeholder 2"/>
+          <p:cNvSpPr>
+            <a:spLocks noGrp="1"/>
+          </p:cNvSpPr>
+          <p:nvPr>
+            <p:ph idx="1"/>
+          </p:nvPr>
+        </p:nvSpPr>
+        <p:spPr>
+          <a:xfrm>
+            <a:off x="812800" y="1773238"/>
+            <a:ext cx="10899824" cy="4246562"/>
+          </a:xfrm>
+        </p:spPr>
+        <p:txBody>
+          <a:bodyPr/>
+          <a:lstStyle/>
+          <a:p>
+            <a:pPr marL="342900" indent="-342900">
+              <a:buFont typeface="Arial" panose="020B0604020202020204" pitchFamily="34" charset="0"/>
+              <a:buChar char="•"/>
+            </a:pPr>
+            <a:endParaRPr lang="en-US" sz="2400" b="1" dirty="0" smtClean="0"/>
+          </a:p>
+          <a:p>
+            <a:pPr marL="342900" indent="-342900">
+              <a:buFont typeface="Arial" panose="020B0604020202020204" pitchFamily="34" charset="0"/>
+              <a:buChar char="•"/>
+            </a:pPr>
+            <a:r>
+              <a:rPr lang="en-US" sz="2400" b="1" dirty="0" err="1" smtClean="0"/>
+              <a:t>Waarom</a:t>
+            </a:r>
+            <a:r>
+              <a:rPr lang="en-US" sz="2400" b="1" dirty="0" smtClean="0"/>
+              <a:t> </a:t>
+            </a:r>
+            <a:r>
+              <a:rPr lang="en-US" sz="2400" b="1" dirty="0"/>
+              <a:t>is de </a:t>
+            </a:r>
+            <a:r>
+              <a:rPr lang="en-US" sz="2400" b="1" dirty="0" err="1"/>
+              <a:t>centrale</a:t>
+            </a:r>
+            <a:r>
+              <a:rPr lang="en-US" sz="2400" b="1" dirty="0"/>
+              <a:t> </a:t>
+            </a:r>
+            <a:r>
+              <a:rPr lang="en-US" sz="2400" b="1" dirty="0" err="1"/>
+              <a:t>limietstelling</a:t>
+            </a:r>
+            <a:r>
+              <a:rPr lang="en-US" sz="2400" b="1" dirty="0"/>
+              <a:t> (CLS) zo </a:t>
+            </a:r>
+            <a:r>
+              <a:rPr lang="en-US" sz="2400" b="1" dirty="0" err="1" smtClean="0"/>
+              <a:t>krachtig</a:t>
+            </a:r>
+            <a:r>
+              <a:rPr lang="en-US" sz="2400" b="1" dirty="0" smtClean="0"/>
+              <a:t>?</a:t>
+            </a:r>
+          </a:p>
+          <a:p>
+            <a:pPr marL="717550" lvl="1" indent="-342900">
+              <a:buFont typeface="Arial" panose="020B0604020202020204" pitchFamily="34" charset="0"/>
+              <a:buChar char="•"/>
+            </a:pPr>
+            <a:r>
+              <a:rPr lang="en-US" sz="2000" dirty="0" err="1" smtClean="0"/>
+              <a:t>Maakt</a:t>
+            </a:r>
+            <a:r>
+              <a:rPr lang="en-US" sz="2000" dirty="0" smtClean="0"/>
+              <a:t> </a:t>
+            </a:r>
+            <a:r>
+              <a:rPr lang="en-US" sz="2000" dirty="0" err="1" smtClean="0"/>
+              <a:t>bestuderen</a:t>
+            </a:r>
+            <a:r>
+              <a:rPr lang="en-US" sz="2000" dirty="0" smtClean="0"/>
+              <a:t> </a:t>
+            </a:r>
+            <a:r>
+              <a:rPr lang="en-US" sz="2000" dirty="0" err="1" smtClean="0"/>
+              <a:t>mogelijk</a:t>
+            </a:r>
+            <a:r>
+              <a:rPr lang="en-US" sz="2000" dirty="0" smtClean="0"/>
+              <a:t> van </a:t>
+            </a:r>
+            <a:r>
+              <a:rPr lang="en-US" sz="2000" dirty="0" err="1" smtClean="0"/>
+              <a:t>sommen</a:t>
+            </a:r>
+            <a:r>
+              <a:rPr lang="en-US" sz="2000" dirty="0" smtClean="0"/>
+              <a:t>/</a:t>
+            </a:r>
+            <a:r>
+              <a:rPr lang="en-US" sz="2000" dirty="0" err="1" smtClean="0"/>
+              <a:t>gemiddelden</a:t>
+            </a:r>
+            <a:r>
+              <a:rPr lang="en-US" sz="2000" dirty="0" smtClean="0"/>
+              <a:t> van </a:t>
+            </a:r>
+            <a:r>
+              <a:rPr lang="en-US" sz="2000" dirty="0" err="1" smtClean="0"/>
+              <a:t>kansvariabelen</a:t>
+            </a:r>
+            <a:r>
+              <a:rPr lang="en-US" sz="2000" dirty="0" smtClean="0"/>
+              <a:t>.</a:t>
+            </a:r>
+            <a:endParaRPr lang="en-US" sz="2000" dirty="0"/>
+          </a:p>
+          <a:p>
+            <a:pPr marL="717550" lvl="1" indent="-342900">
+              <a:buFont typeface="Arial" panose="020B0604020202020204" pitchFamily="34" charset="0"/>
+              <a:buChar char="•"/>
+            </a:pPr>
+            <a:r>
+              <a:rPr lang="en-US" sz="2000" dirty="0" err="1"/>
+              <a:t>O</a:t>
+            </a:r>
+            <a:r>
+              <a:rPr lang="en-US" sz="2000" dirty="0" err="1" smtClean="0"/>
+              <a:t>rde</a:t>
+            </a:r>
+            <a:r>
+              <a:rPr lang="en-US" sz="2000" i="1" dirty="0" smtClean="0"/>
+              <a:t> </a:t>
+            </a:r>
+            <a:r>
+              <a:rPr lang="en-US" sz="2000" dirty="0"/>
+              <a:t>in de </a:t>
+            </a:r>
+            <a:r>
+              <a:rPr lang="en-US" sz="2000" dirty="0" smtClean="0"/>
+              <a:t>chaos (</a:t>
+            </a:r>
+            <a:r>
+              <a:rPr lang="en-US" sz="2000" dirty="0" err="1" smtClean="0"/>
+              <a:t>hetzelfde</a:t>
+            </a:r>
+            <a:r>
+              <a:rPr lang="en-US" sz="2000" dirty="0" smtClean="0"/>
+              <a:t> </a:t>
+            </a:r>
+            <a:r>
+              <a:rPr lang="en-US" sz="2000" dirty="0" err="1" smtClean="0"/>
+              <a:t>voorspelbare</a:t>
+            </a:r>
+            <a:r>
+              <a:rPr lang="en-US" sz="2000" dirty="0" smtClean="0"/>
+              <a:t> patroon </a:t>
+            </a:r>
+            <a:r>
+              <a:rPr lang="en-US" sz="2000" dirty="0" err="1" smtClean="0"/>
+              <a:t>bij</a:t>
+            </a:r>
+            <a:r>
+              <a:rPr lang="en-US" sz="2000" dirty="0" smtClean="0"/>
+              <a:t> </a:t>
+            </a:r>
+            <a:r>
+              <a:rPr lang="en-US" sz="2000" dirty="0" err="1" smtClean="0"/>
+              <a:t>zeer</a:t>
+            </a:r>
+            <a:r>
+              <a:rPr lang="en-US" sz="2000" dirty="0" smtClean="0"/>
+              <a:t> </a:t>
+            </a:r>
+            <a:r>
+              <a:rPr lang="en-US" sz="2000" dirty="0" err="1" smtClean="0"/>
+              <a:t>uiteenlopende</a:t>
+            </a:r>
+            <a:r>
+              <a:rPr lang="en-US" sz="2000" dirty="0" smtClean="0"/>
+              <a:t> </a:t>
+            </a:r>
+            <a:r>
+              <a:rPr lang="en-US" sz="2000" dirty="0" err="1" smtClean="0"/>
+              <a:t>kansverdelingen</a:t>
+            </a:r>
+            <a:r>
+              <a:rPr lang="en-US" sz="2000" dirty="0" smtClean="0"/>
+              <a:t>)</a:t>
+            </a:r>
+            <a:endParaRPr lang="en-US" sz="2000" i="1" dirty="0"/>
+          </a:p>
+          <a:p>
+            <a:pPr marL="717550" lvl="1" indent="-342900">
+              <a:buFont typeface="Arial" panose="020B0604020202020204" pitchFamily="34" charset="0"/>
+              <a:buChar char="•"/>
+            </a:pPr>
+            <a:r>
+              <a:rPr lang="en-US" sz="2000" dirty="0" err="1" smtClean="0"/>
+              <a:t>Veel</a:t>
+            </a:r>
+            <a:r>
+              <a:rPr lang="en-US" sz="2000" dirty="0" smtClean="0"/>
+              <a:t> </a:t>
+            </a:r>
+            <a:r>
+              <a:rPr lang="en-US" sz="2000" dirty="0" err="1"/>
+              <a:t>statistische</a:t>
+            </a:r>
+            <a:r>
+              <a:rPr lang="en-US" sz="2000" dirty="0"/>
+              <a:t> </a:t>
+            </a:r>
+            <a:r>
+              <a:rPr lang="en-US" sz="2000" dirty="0" err="1"/>
+              <a:t>methoden</a:t>
+            </a:r>
+            <a:r>
+              <a:rPr lang="en-US" sz="2000" dirty="0"/>
+              <a:t> </a:t>
+            </a:r>
+            <a:r>
+              <a:rPr lang="en-US" sz="2000" dirty="0" err="1"/>
+              <a:t>leunen</a:t>
+            </a:r>
+            <a:r>
+              <a:rPr lang="en-US" sz="2000" dirty="0"/>
+              <a:t> op de </a:t>
+            </a:r>
+            <a:r>
+              <a:rPr lang="en-US" sz="2000" dirty="0" err="1"/>
+              <a:t>schouders</a:t>
+            </a:r>
+            <a:r>
+              <a:rPr lang="en-US" sz="2000" dirty="0"/>
+              <a:t> van de </a:t>
+            </a:r>
+            <a:r>
+              <a:rPr lang="en-US" sz="2000" dirty="0" smtClean="0"/>
+              <a:t>CLS (</a:t>
+            </a:r>
+            <a:r>
+              <a:rPr lang="en-US" sz="2000" dirty="0" err="1" smtClean="0"/>
+              <a:t>schattingen</a:t>
+            </a:r>
+            <a:r>
+              <a:rPr lang="en-US" sz="2000" dirty="0" smtClean="0"/>
+              <a:t>, </a:t>
+            </a:r>
+            <a:r>
+              <a:rPr lang="en-US" sz="2000" dirty="0" err="1" smtClean="0"/>
+              <a:t>betrouwbaarheid</a:t>
+            </a:r>
+            <a:r>
+              <a:rPr lang="en-US" sz="2000" dirty="0" smtClean="0"/>
+              <a:t>, …)</a:t>
+            </a:r>
+            <a:endParaRPr lang="en-US" sz="2000" dirty="0"/>
+          </a:p>
+          <a:p>
+            <a:endParaRPr lang="en-US" sz="2000" dirty="0" smtClean="0"/>
+          </a:p>
+          <a:p>
+            <a:endParaRPr lang="en-US" sz="2000" dirty="0"/>
+          </a:p>
+          <a:p>
+            <a:pPr marL="342900" indent="-342900">
+              <a:buFont typeface="Arial" panose="020B0604020202020204" pitchFamily="34" charset="0"/>
+              <a:buChar char="•"/>
+            </a:pPr>
+            <a:endParaRPr lang="en-US" sz="2400" b="1" dirty="0" smtClean="0"/>
+          </a:p>
+          <a:p>
+            <a:pPr marL="342900" indent="-342900">
+              <a:buFont typeface="Arial" panose="020B0604020202020204" pitchFamily="34" charset="0"/>
+              <a:buChar char="•"/>
+            </a:pPr>
+            <a:r>
+              <a:rPr lang="en-US" sz="2400" b="1" dirty="0" err="1" smtClean="0"/>
+              <a:t>Verschilvariabelen</a:t>
+            </a:r>
+            <a:r>
+              <a:rPr lang="en-US" sz="2400" b="1" dirty="0" smtClean="0"/>
+              <a:t>:</a:t>
+            </a:r>
+            <a:endParaRPr lang="en-US" sz="2400" dirty="0" smtClean="0"/>
+          </a:p>
+          <a:p>
+            <a:pPr marL="717550" lvl="1" indent="-342900">
+              <a:buFont typeface="Arial" panose="020B0604020202020204" pitchFamily="34" charset="0"/>
+              <a:buChar char="•"/>
+            </a:pPr>
+            <a:r>
+              <a:rPr lang="en-US" sz="2000" dirty="0" err="1" smtClean="0"/>
+              <a:t>Hiermee</a:t>
+            </a:r>
+            <a:r>
+              <a:rPr lang="en-US" sz="2000" dirty="0" smtClean="0"/>
+              <a:t> </a:t>
+            </a:r>
+            <a:r>
+              <a:rPr lang="en-US" sz="2000" dirty="0" err="1" smtClean="0"/>
+              <a:t>kunnen</a:t>
+            </a:r>
+            <a:r>
+              <a:rPr lang="en-US" sz="2000" dirty="0" smtClean="0"/>
+              <a:t> we </a:t>
+            </a:r>
+            <a:r>
+              <a:rPr lang="en-US" sz="2000" dirty="0" err="1" smtClean="0"/>
+              <a:t>effecten</a:t>
+            </a:r>
+            <a:r>
+              <a:rPr lang="en-US" sz="2000" dirty="0" smtClean="0"/>
+              <a:t> </a:t>
+            </a:r>
+            <a:r>
+              <a:rPr lang="en-US" sz="2000" dirty="0" err="1" smtClean="0"/>
+              <a:t>bestuderen</a:t>
+            </a:r>
+            <a:r>
+              <a:rPr lang="en-US" sz="2000" dirty="0" smtClean="0"/>
+              <a:t> van oud versus </a:t>
+            </a:r>
+            <a:r>
+              <a:rPr lang="en-US" sz="2000" dirty="0" err="1" smtClean="0"/>
+              <a:t>nieuw</a:t>
+            </a:r>
+            <a:r>
+              <a:rPr lang="en-US" sz="2000" smtClean="0"/>
+              <a:t>.</a:t>
+            </a:r>
+            <a:endParaRPr lang="en-US" sz="2000" dirty="0" smtClean="0"/>
+          </a:p>
+          <a:p>
+            <a:pPr marL="717550" lvl="1" indent="-342900">
+              <a:buFont typeface="Arial" panose="020B0604020202020204" pitchFamily="34" charset="0"/>
+              <a:buChar char="•"/>
+            </a:pPr>
+            <a:r>
+              <a:rPr lang="en-US" sz="2000" dirty="0" smtClean="0"/>
+              <a:t>Basis van </a:t>
+            </a:r>
+            <a:r>
+              <a:rPr lang="en-US" sz="2000" dirty="0" err="1" smtClean="0"/>
+              <a:t>statistische</a:t>
+            </a:r>
+            <a:r>
+              <a:rPr lang="en-US" sz="2000" dirty="0" smtClean="0"/>
+              <a:t> </a:t>
+            </a:r>
+            <a:r>
+              <a:rPr lang="en-US" sz="2000" dirty="0" err="1" smtClean="0"/>
+              <a:t>toetsen</a:t>
+            </a:r>
+            <a:r>
+              <a:rPr lang="en-US" sz="2000" dirty="0" smtClean="0"/>
+              <a:t> om twee </a:t>
+            </a:r>
+            <a:r>
+              <a:rPr lang="en-US" sz="2000" dirty="0" err="1"/>
+              <a:t>onafhankelijke</a:t>
+            </a:r>
+            <a:r>
+              <a:rPr lang="en-US" sz="2000" dirty="0"/>
+              <a:t> </a:t>
+            </a:r>
+            <a:r>
+              <a:rPr lang="en-US" sz="2000" dirty="0" err="1" smtClean="0"/>
+              <a:t>populaties</a:t>
+            </a:r>
+            <a:r>
+              <a:rPr lang="en-US" sz="2000" dirty="0" smtClean="0"/>
+              <a:t> </a:t>
+            </a:r>
+            <a:r>
+              <a:rPr lang="en-US" sz="2000" dirty="0" err="1" smtClean="0"/>
+              <a:t>te</a:t>
+            </a:r>
+            <a:r>
+              <a:rPr lang="en-US" sz="2000" dirty="0" smtClean="0"/>
+              <a:t> </a:t>
+            </a:r>
+            <a:r>
+              <a:rPr lang="en-US" sz="2000" dirty="0" err="1" smtClean="0"/>
+              <a:t>vergelijken</a:t>
+            </a:r>
+            <a:r>
+              <a:rPr lang="en-US" sz="2000" dirty="0" smtClean="0"/>
+              <a:t>.</a:t>
+            </a:r>
+            <a:endParaRPr lang="en-US" sz="2000" dirty="0" smtClean="0"/>
+          </a:p>
+          <a:p>
+            <a:pPr marL="717550" lvl="1" indent="-342900">
+              <a:buFont typeface="Arial" panose="020B0604020202020204" pitchFamily="34" charset="0"/>
+              <a:buChar char="•"/>
+            </a:pPr>
+            <a:endParaRPr lang="en-US" sz="2400" dirty="0"/>
+          </a:p>
+        </p:txBody>
+      </p:sp>
+      <p:sp>
+        <p:nvSpPr>
+          <p:cNvPr id="6148" name="Date Placeholder 3"/>
+          <p:cNvSpPr>
+            <a:spLocks noGrp="1"/>
+          </p:cNvSpPr>
+          <p:nvPr>
+            <p:ph type="dt" sz="quarter" idx="10"/>
+          </p:nvPr>
+        </p:nvSpPr>
+        <p:spPr bwMode="auto">
+          <a:noFill/>
+          <a:ln>
+            <a:miter lim="800000"/>
+            <a:headEnd/>
+            <a:tailEnd/>
+          </a:ln>
+        </p:spPr>
+        <p:txBody>
+          <a:bodyPr wrap="square" numCol="1" anchorCtr="0" compatLnSpc="1">
+            <a:prstTxWarp prst="textNoShape">
+              <a:avLst/>
+            </a:prstTxWarp>
+          </a:bodyPr>
+          <a:lstStyle/>
+          <a:p>
+            <a:pPr marL="0" marR="0" lvl="0" indent="0" algn="l" defTabSz="914400" rtl="0" eaLnBrk="0" fontAlgn="base" latinLnBrk="0" hangingPunct="0">
+              <a:lnSpc>
+                <a:spcPct val="100000"/>
+              </a:lnSpc>
+              <a:spcBef>
+                <a:spcPct val="50000"/>
+              </a:spcBef>
+              <a:spcAft>
+                <a:spcPct val="0"/>
+              </a:spcAft>
+              <a:buClrTx/>
+              <a:buSzTx/>
+              <a:buFontTx/>
+              <a:buNone/>
+              <a:tabLst/>
+              <a:defRPr/>
+            </a:pPr>
+            <a:r>
+              <a:rPr kumimoji="0" lang="nl-NL" sz="1100" b="0" i="0" u="none" strike="noStrike" kern="1200" cap="none" spc="0" normalizeH="0" baseline="0" noProof="0" smtClean="0">
+                <a:ln>
+                  <a:noFill/>
+                </a:ln>
+                <a:solidFill>
+                  <a:srgbClr val="FFFFFF"/>
+                </a:solidFill>
+                <a:effectLst/>
+                <a:uLnTx/>
+                <a:uFillTx/>
+                <a:latin typeface="Verdana" pitchFamily="34" charset="0"/>
+                <a:ea typeface="+mn-ea"/>
+                <a:cs typeface="+mn-cs"/>
+              </a:rPr>
+              <a:t>College 5b: de centrale limietstelling</a:t>
+            </a:r>
+          </a:p>
+        </p:txBody>
+      </p:sp>
+    </p:spTree>
+    <p:extLst>
+      <p:ext uri="{BB962C8B-B14F-4D97-AF65-F5344CB8AC3E}">
+        <p14:creationId xmlns:p14="http://schemas.microsoft.com/office/powerpoint/2010/main" val="733800204"/>
+      </p:ext>
+    </p:extLst>
+  </p:cSld>
+  <p:clrMapOvr>
+    <a:masterClrMapping/>
+  </p:clrMapOvr>
+  <p:timing>
+    <p:tnLst>
+      <p:par>
+        <p:cTn id="1" dur="indefinite" restart="never" nodeType="tmRoot"/>
+      </p:par>
+    </p:tnLst>
+  </p:timing>
+</p:sld>
+</file>
+
+<file path=ppt/slides/slide26.xml><?xml version="1.0" encoding="utf-8"?>
 <p:sld xmlns:a="http://schemas.openxmlformats.org/drawingml/2006/main" xmlns:r="http://schemas.openxmlformats.org/officeDocument/2006/relationships" xmlns:p="http://schemas.openxmlformats.org/presentationml/2006/main">
   <p:cSld>
     <p:spTree>
@@ -26123,38 +27448,7 @@
                       <a:rPr lang="nl-NL" b="0" i="1" smtClean="0">
                         <a:latin typeface="Cambria Math" panose="02040503050406030204" pitchFamily="18" charset="0"/>
                       </a:rPr>
-                      <m:t>50×85×</m:t>
-                    </m:r>
-                    <m:f>
-                      <m:fPr>
-                        <m:ctrlPr>
-                          <a:rPr lang="nl-NL" b="0" i="1" smtClean="0">
-                            <a:latin typeface="Cambria Math" panose="02040503050406030204" pitchFamily="18" charset="0"/>
-                          </a:rPr>
-                        </m:ctrlPr>
-                      </m:fPr>
-                      <m:num>
-                        <m:r>
-                          <a:rPr lang="nl-NL" b="0" i="1" smtClean="0">
-                            <a:latin typeface="Cambria Math" panose="02040503050406030204" pitchFamily="18" charset="0"/>
-                          </a:rPr>
-                          <m:t>500</m:t>
-                        </m:r>
-                      </m:num>
-                      <m:den>
-                        <m:r>
-                          <a:rPr lang="nl-NL" b="0" i="1" smtClean="0">
-                            <a:latin typeface="Cambria Math" panose="02040503050406030204" pitchFamily="18" charset="0"/>
-                          </a:rPr>
-                          <m:t>100</m:t>
-                        </m:r>
-                      </m:den>
-                    </m:f>
-                    <m:r>
-                      <a:rPr lang="nl-NL" b="0" i="1" smtClean="0">
-                        <a:latin typeface="Cambria Math" panose="02040503050406030204" pitchFamily="18" charset="0"/>
-                      </a:rPr>
-                      <m:t>=21250</m:t>
+                      <m:t>50×85=4250</m:t>
                     </m:r>
                   </m:oMath>
                 </a14:m>
@@ -26291,10 +27585,10 @@
                 <a14:m>
                   <m:oMath xmlns:m="http://schemas.openxmlformats.org/officeDocument/2006/math">
                     <m:r>
-                      <a:rPr lang="en-US" b="1" i="1" dirty="0" smtClean="0">
+                      <a:rPr lang="nl-NL" b="1" i="1" dirty="0" smtClean="0">
                         <a:latin typeface="Cambria Math" panose="02040503050406030204" pitchFamily="18" charset="0"/>
                       </a:rPr>
-                      <m:t>𝟖𝟓𝟎𝟎</m:t>
+                      <m:t>𝟒𝟐𝟓𝟎</m:t>
                     </m:r>
                   </m:oMath>
                 </a14:m>
@@ -26341,7 +27635,7 @@
               <a:blipFill>
                 <a:blip r:embed="rId3"/>
                 <a:stretch>
-                  <a:fillRect l="-1586" t="-2296" b="-6600"/>
+                  <a:fillRect l="-1586" t="-2296" b="-3013"/>
                 </a:stretch>
               </a:blipFill>
             </p:spPr>
@@ -26406,159 +27700,7 @@
   <p:timing>
     <p:tnLst>
       <p:par>
-        <p:cTn id="1" dur="indefinite" restart="never" nodeType="tmRoot">
-          <p:childTnLst>
-            <p:seq concurrent="1" nextAc="seek">
-              <p:cTn id="2" dur="indefinite" nodeType="mainSeq">
-                <p:childTnLst>
-                  <p:par>
-                    <p:cTn id="3" fill="hold">
-                      <p:stCondLst>
-                        <p:cond delay="indefinite"/>
-                      </p:stCondLst>
-                      <p:childTnLst>
-                        <p:par>
-                          <p:cTn id="4" fill="hold">
-                            <p:stCondLst>
-                              <p:cond delay="0"/>
-                            </p:stCondLst>
-                            <p:childTnLst>
-                              <p:par>
-                                <p:cTn id="5" presetID="1" presetClass="entr" presetSubtype="0" fill="hold" nodeType="clickEffect">
-                                  <p:stCondLst>
-                                    <p:cond delay="0"/>
-                                  </p:stCondLst>
-                                  <p:childTnLst>
-                                    <p:set>
-                                      <p:cBhvr>
-                                        <p:cTn id="6" dur="1" fill="hold">
-                                          <p:stCondLst>
-                                            <p:cond delay="0"/>
-                                          </p:stCondLst>
-                                        </p:cTn>
-                                        <p:tgtEl>
-                                          <p:spTgt spid="6147">
-                                            <p:txEl>
-                                              <p:pRg st="5" end="5"/>
-                                            </p:txEl>
-                                          </p:spTgt>
-                                        </p:tgtEl>
-                                        <p:attrNameLst>
-                                          <p:attrName>style.visibility</p:attrName>
-                                        </p:attrNameLst>
-                                      </p:cBhvr>
-                                      <p:to>
-                                        <p:strVal val="visible"/>
-                                      </p:to>
-                                    </p:set>
-                                  </p:childTnLst>
-                                </p:cTn>
-                              </p:par>
-                            </p:childTnLst>
-                          </p:cTn>
-                        </p:par>
-                      </p:childTnLst>
-                    </p:cTn>
-                  </p:par>
-                  <p:par>
-                    <p:cTn id="7" fill="hold">
-                      <p:stCondLst>
-                        <p:cond delay="indefinite"/>
-                      </p:stCondLst>
-                      <p:childTnLst>
-                        <p:par>
-                          <p:cTn id="8" fill="hold">
-                            <p:stCondLst>
-                              <p:cond delay="0"/>
-                            </p:stCondLst>
-                            <p:childTnLst>
-                              <p:par>
-                                <p:cTn id="9" presetID="1" presetClass="entr" presetSubtype="0" fill="hold" nodeType="clickEffect">
-                                  <p:stCondLst>
-                                    <p:cond delay="0"/>
-                                  </p:stCondLst>
-                                  <p:childTnLst>
-                                    <p:set>
-                                      <p:cBhvr>
-                                        <p:cTn id="10" dur="1" fill="hold">
-                                          <p:stCondLst>
-                                            <p:cond delay="0"/>
-                                          </p:stCondLst>
-                                        </p:cTn>
-                                        <p:tgtEl>
-                                          <p:spTgt spid="6147">
-                                            <p:txEl>
-                                              <p:pRg st="10" end="10"/>
-                                            </p:txEl>
-                                          </p:spTgt>
-                                        </p:tgtEl>
-                                        <p:attrNameLst>
-                                          <p:attrName>style.visibility</p:attrName>
-                                        </p:attrNameLst>
-                                      </p:cBhvr>
-                                      <p:to>
-                                        <p:strVal val="visible"/>
-                                      </p:to>
-                                    </p:set>
-                                  </p:childTnLst>
-                                </p:cTn>
-                              </p:par>
-                              <p:par>
-                                <p:cTn id="11" presetID="1" presetClass="entr" presetSubtype="0" fill="hold" nodeType="withEffect">
-                                  <p:stCondLst>
-                                    <p:cond delay="0"/>
-                                  </p:stCondLst>
-                                  <p:childTnLst>
-                                    <p:set>
-                                      <p:cBhvr>
-                                        <p:cTn id="12" dur="1" fill="hold">
-                                          <p:stCondLst>
-                                            <p:cond delay="0"/>
-                                          </p:stCondLst>
-                                        </p:cTn>
-                                        <p:tgtEl>
-                                          <p:spTgt spid="6147">
-                                            <p:txEl>
-                                              <p:pRg st="11" end="11"/>
-                                            </p:txEl>
-                                          </p:spTgt>
-                                        </p:tgtEl>
-                                        <p:attrNameLst>
-                                          <p:attrName>style.visibility</p:attrName>
-                                        </p:attrNameLst>
-                                      </p:cBhvr>
-                                      <p:to>
-                                        <p:strVal val="visible"/>
-                                      </p:to>
-                                    </p:set>
-                                  </p:childTnLst>
-                                </p:cTn>
-                              </p:par>
-                            </p:childTnLst>
-                          </p:cTn>
-                        </p:par>
-                      </p:childTnLst>
-                    </p:cTn>
-                  </p:par>
-                </p:childTnLst>
-              </p:cTn>
-              <p:prevCondLst>
-                <p:cond evt="onPrev" delay="0">
-                  <p:tgtEl>
-                    <p:sldTgt/>
-                  </p:tgtEl>
-                </p:cond>
-              </p:prevCondLst>
-              <p:nextCondLst>
-                <p:cond evt="onNext" delay="0">
-                  <p:tgtEl>
-                    <p:sldTgt/>
-                  </p:tgtEl>
-                </p:cond>
-              </p:nextCondLst>
-            </p:seq>
-          </p:childTnLst>
-        </p:cTn>
+        <p:cTn id="1" dur="indefinite" restart="never" nodeType="tmRoot"/>
       </p:par>
     </p:tnLst>
   </p:timing>
@@ -27170,8 +28312,8 @@
           </a:p>
         </p:txBody>
       </p:sp>
-      <mc:AlternateContent xmlns:mc="http://schemas.openxmlformats.org/markup-compatibility/2006">
-        <mc:Choice xmlns:a14="http://schemas.microsoft.com/office/drawing/2010/main" Requires="a14">
+      <mc:AlternateContent xmlns:mc="http://schemas.openxmlformats.org/markup-compatibility/2006" xmlns:a14="http://schemas.microsoft.com/office/drawing/2010/main">
+        <mc:Choice Requires="a14">
           <p:sp>
             <p:nvSpPr>
               <p:cNvPr id="6147" name="Content Placeholder 2"/>
@@ -27194,8 +28336,19 @@
               <a:p>
                 <a:pPr eaLnBrk="1" hangingPunct="1"/>
                 <a:r>
-                  <a:rPr lang="nl-NL" dirty="0" smtClean="0"/>
-                  <a:t>De centrale limietstelling geeft ons een verrassend krachtig antwoord op precies deze vraag.</a:t>
+                  <a:rPr lang="nl-NL" sz="2400" dirty="0" smtClean="0"/>
+                  <a:t>De centrale limietstelling geeft ons een verrassend krachtig antwoord op deze vraag.</a:t>
+                </a:r>
+              </a:p>
+              <a:p>
+                <a:pPr eaLnBrk="1" hangingPunct="1"/>
+                <a:endParaRPr lang="nl-NL" sz="2400" dirty="0" smtClean="0"/>
+              </a:p>
+              <a:p>
+                <a:pPr eaLnBrk="1" hangingPunct="1"/>
+                <a:r>
+                  <a:rPr lang="nl-NL" sz="2400" dirty="0" smtClean="0"/>
+                  <a:t>Hiervoor hebben we twee aannames nodig:</a:t>
                 </a:r>
               </a:p>
               <a:p>
@@ -27223,40 +28376,23 @@
                 </a:pPr>
                 <a:r>
                   <a:rPr lang="nl-NL" sz="2000" dirty="0" smtClean="0"/>
-                  <a:t>Het brandstofverbruik van Boxer </a:t>
-                </a:r>
-                <a14:m>
-                  <m:oMath xmlns:m="http://schemas.openxmlformats.org/officeDocument/2006/math">
-                    <m:r>
-                      <a:rPr lang="nl-NL" sz="2000" b="0" i="1" smtClean="0">
-                        <a:latin typeface="Cambria Math" panose="02040503050406030204" pitchFamily="18" charset="0"/>
-                      </a:rPr>
-                      <m:t>1</m:t>
-                    </m:r>
-                  </m:oMath>
-                </a14:m>
+                  <a:t>Het brandstofverbruik van het ene Boxer-pantservoertuig</a:t>
+                </a:r>
                 <a:r>
                   <a:rPr lang="nl-NL" sz="2000" b="1" dirty="0" smtClean="0"/>
                   <a:t> </a:t>
                 </a:r>
                 <a:r>
                   <a:rPr lang="nl-NL" sz="2000" dirty="0" smtClean="0"/>
-                  <a:t>heeft geen invloed op het verbruik van Boxer </a:t>
-                </a:r>
-                <a14:m>
-                  <m:oMath xmlns:m="http://schemas.openxmlformats.org/officeDocument/2006/math">
-                    <m:r>
-                      <a:rPr lang="nl-NL" sz="2000" b="0" i="1" smtClean="0">
-                        <a:latin typeface="Cambria Math" panose="02040503050406030204" pitchFamily="18" charset="0"/>
-                      </a:rPr>
-                      <m:t>2</m:t>
-                    </m:r>
-                  </m:oMath>
-                </a14:m>
-                <a:r>
-                  <a:rPr lang="nl-NL" sz="2000" b="1" dirty="0" smtClean="0"/>
-                  <a:t>.</a:t>
-                </a:r>
+                  <a:t>heeft geen invloed op het verbruik van een ander pantservoertuig.</a:t>
+                </a:r>
+                <a:endParaRPr lang="nl-NL" sz="2000" b="1" dirty="0" smtClean="0"/>
+              </a:p>
+              <a:p>
+                <a:pPr marL="457200" indent="-457200">
+                  <a:buFont typeface="Arial" panose="020B0604020202020204" pitchFamily="34" charset="0"/>
+                  <a:buChar char="•"/>
+                </a:pPr>
                 <a:endParaRPr lang="nl-NL" sz="2000" b="1" dirty="0"/>
               </a:p>
               <a:p>
@@ -27314,6 +28450,13 @@
               <a:p>
                 <a:pPr eaLnBrk="1" hangingPunct="1"/>
                 <a:endParaRPr lang="nl-NL" dirty="0"/>
+              </a:p>
+              <a:p>
+                <a:pPr eaLnBrk="1" hangingPunct="1"/>
+                <a:r>
+                  <a:rPr lang="nl-NL" b="1" dirty="0" smtClean="0"/>
+                  <a:t>Merk op: het maakt niet uit wat de originele kansverdeling is (uniform, normaal, …)!</a:t>
+                </a:r>
               </a:p>
               <a:p>
                 <a:pPr eaLnBrk="1" hangingPunct="1"/>
@@ -27329,7 +28472,7 @@
             </p:txBody>
           </p:sp>
         </mc:Choice>
-        <mc:Fallback>
+        <mc:Fallback xmlns="">
           <p:sp>
             <p:nvSpPr>
               <p:cNvPr id="6147" name="Content Placeholder 2"/>
@@ -27348,7 +28491,7 @@
               <a:blipFill>
                 <a:blip r:embed="rId3"/>
                 <a:stretch>
-                  <a:fillRect l="-1597" t="-2009"/>
+                  <a:fillRect l="-1711" t="-2296" b="-1865"/>
                 </a:stretch>
               </a:blipFill>
             </p:spPr>
@@ -27400,687 +28543,6 @@
           </a:p>
         </p:txBody>
       </p:sp>
-      <mc:AlternateContent xmlns:mc="http://schemas.openxmlformats.org/markup-compatibility/2006">
-        <mc:Choice xmlns:a14="http://schemas.microsoft.com/office/drawing/2010/main" Requires="a14">
-          <p:sp>
-            <p:nvSpPr>
-              <p:cNvPr id="2" name="Tekstvak 1"/>
-              <p:cNvSpPr txBox="1"/>
-              <p:nvPr/>
-            </p:nvSpPr>
-            <p:spPr>
-              <a:xfrm>
-                <a:off x="797030" y="4005064"/>
-                <a:ext cx="11044769" cy="2276392"/>
-              </a:xfrm>
-              <a:prstGeom prst="rect">
-                <a:avLst/>
-              </a:prstGeom>
-              <a:solidFill>
-                <a:schemeClr val="bg2">
-                  <a:lumMod val="20000"/>
-                  <a:lumOff val="80000"/>
-                </a:schemeClr>
-              </a:solidFill>
-              <a:ln w="38100"/>
-              <a:effectLst>
-                <a:softEdge rad="31750"/>
-              </a:effectLst>
-            </p:spPr>
-            <p:style>
-              <a:lnRef idx="2">
-                <a:schemeClr val="accent1"/>
-              </a:lnRef>
-              <a:fillRef idx="1">
-                <a:schemeClr val="lt1"/>
-              </a:fillRef>
-              <a:effectRef idx="0">
-                <a:schemeClr val="accent1"/>
-              </a:effectRef>
-              <a:fontRef idx="minor">
-                <a:schemeClr val="dk1"/>
-              </a:fontRef>
-            </p:style>
-            <p:txBody>
-              <a:bodyPr wrap="square" rtlCol="0">
-                <a:spAutoFit/>
-              </a:bodyPr>
-              <a:lstStyle/>
-              <a:p>
-                <a:pPr eaLnBrk="1" hangingPunct="1"/>
-                <a:r>
-                  <a:rPr lang="nl-NL" b="1" dirty="0" smtClean="0">
-                    <a:solidFill>
-                      <a:srgbClr val="0070C0"/>
-                    </a:solidFill>
-                    <a:latin typeface="+mn-lt"/>
-                  </a:rPr>
-                  <a:t>Centrale limietstelling:</a:t>
-                </a:r>
-                <a:r>
-                  <a:rPr lang="nl-NL" dirty="0">
-                    <a:solidFill>
-                      <a:srgbClr val="0070C0"/>
-                    </a:solidFill>
-                    <a:latin typeface="+mn-lt"/>
-                  </a:rPr>
-                  <a:t> </a:t>
-                </a:r>
-              </a:p>
-              <a:p>
-                <a:r>
-                  <a:rPr lang="nl-NL" dirty="0">
-                    <a:latin typeface="+mn-lt"/>
-                  </a:rPr>
-                  <a:t>Voor onafhankelijke en gelijk verdeelde </a:t>
-                </a:r>
-                <a:r>
-                  <a:rPr lang="nl-NL" dirty="0" err="1">
-                    <a:latin typeface="+mn-lt"/>
-                  </a:rPr>
-                  <a:t>kansvariabelen</a:t>
-                </a:r>
-                <a:r>
-                  <a:rPr lang="nl-NL" dirty="0">
-                    <a:latin typeface="+mn-lt"/>
-                  </a:rPr>
-                  <a:t> </a:t>
-                </a:r>
-                <a14:m>
-                  <m:oMath xmlns:m="http://schemas.openxmlformats.org/officeDocument/2006/math">
-                    <m:sSub>
-                      <m:sSubPr>
-                        <m:ctrlPr>
-                          <a:rPr lang="nl-NL" i="1">
-                            <a:latin typeface="+mn-lt"/>
-                          </a:rPr>
-                        </m:ctrlPr>
-                      </m:sSubPr>
-                      <m:e>
-                        <m:r>
-                          <a:rPr lang="nl-NL" i="1">
-                            <a:latin typeface="+mn-lt"/>
-                          </a:rPr>
-                          <m:t>𝑋</m:t>
-                        </m:r>
-                      </m:e>
-                      <m:sub>
-                        <m:r>
-                          <a:rPr lang="nl-NL" i="1">
-                            <a:latin typeface="+mn-lt"/>
-                          </a:rPr>
-                          <m:t>1</m:t>
-                        </m:r>
-                      </m:sub>
-                    </m:sSub>
-                    <m:r>
-                      <a:rPr lang="nl-NL" i="1">
-                        <a:latin typeface="+mn-lt"/>
-                      </a:rPr>
-                      <m:t>, …</m:t>
-                    </m:r>
-                    <m:sSub>
-                      <m:sSubPr>
-                        <m:ctrlPr>
-                          <a:rPr lang="nl-NL" i="1">
-                            <a:latin typeface="+mn-lt"/>
-                          </a:rPr>
-                        </m:ctrlPr>
-                      </m:sSubPr>
-                      <m:e>
-                        <m:r>
-                          <a:rPr lang="nl-NL" i="1">
-                            <a:latin typeface="+mn-lt"/>
-                          </a:rPr>
-                          <m:t>𝑋</m:t>
-                        </m:r>
-                      </m:e>
-                      <m:sub>
-                        <m:r>
-                          <a:rPr lang="nl-NL" i="1">
-                            <a:latin typeface="+mn-lt"/>
-                          </a:rPr>
-                          <m:t>𝑛</m:t>
-                        </m:r>
-                      </m:sub>
-                    </m:sSub>
-                  </m:oMath>
-                </a14:m>
-                <a:r>
-                  <a:rPr lang="nl-NL" dirty="0">
-                    <a:latin typeface="+mn-lt"/>
-                  </a:rPr>
-                  <a:t> </a:t>
-                </a:r>
-                <a:r>
-                  <a:rPr lang="nl-NL" dirty="0" smtClean="0">
-                    <a:latin typeface="+mn-lt"/>
-                  </a:rPr>
-                  <a:t>met verwachtingswaarde </a:t>
-                </a:r>
-                <a14:m>
-                  <m:oMath xmlns:m="http://schemas.openxmlformats.org/officeDocument/2006/math">
-                    <m:r>
-                      <a:rPr lang="nl-NL" b="0" i="1" smtClean="0">
-                        <a:latin typeface="Cambria Math" panose="02040503050406030204" pitchFamily="18" charset="0"/>
-                      </a:rPr>
-                      <m:t>𝜇</m:t>
-                    </m:r>
-                  </m:oMath>
-                </a14:m>
-                <a:r>
-                  <a:rPr lang="nl-NL" dirty="0" smtClean="0">
-                    <a:latin typeface="+mn-lt"/>
-                  </a:rPr>
-                  <a:t> en standaardafwijking </a:t>
-                </a:r>
-                <a14:m>
-                  <m:oMath xmlns:m="http://schemas.openxmlformats.org/officeDocument/2006/math">
-                    <m:r>
-                      <a:rPr lang="nl-NL" b="0" i="1" smtClean="0">
-                        <a:latin typeface="Cambria Math" panose="02040503050406030204" pitchFamily="18" charset="0"/>
-                      </a:rPr>
-                      <m:t>𝜎</m:t>
-                    </m:r>
-                  </m:oMath>
-                </a14:m>
-                <a:r>
-                  <a:rPr lang="nl-NL" dirty="0" smtClean="0">
-                    <a:latin typeface="+mn-lt"/>
-                  </a:rPr>
-                  <a:t> geldt </a:t>
-                </a:r>
-                <a:r>
-                  <a:rPr lang="nl-NL" i="1" dirty="0">
-                    <a:latin typeface="+mn-lt"/>
-                  </a:rPr>
-                  <a:t>(bij benadering) </a:t>
-                </a:r>
-                <a:r>
-                  <a:rPr lang="nl-NL" dirty="0">
-                    <a:latin typeface="+mn-lt"/>
-                  </a:rPr>
-                  <a:t>dat:</a:t>
-                </a:r>
-              </a:p>
-              <a:p>
-                <a:pPr marL="342900" indent="-342900" eaLnBrk="1" hangingPunct="1">
-                  <a:buFont typeface="Arial" panose="020B0604020202020204" pitchFamily="34" charset="0"/>
-                  <a:buChar char="•"/>
-                </a:pPr>
-                <a:endParaRPr lang="nl-NL" dirty="0" smtClean="0"/>
-              </a:p>
-              <a:p>
-                <a:pPr marL="342900" indent="-342900" eaLnBrk="1" hangingPunct="1">
-                  <a:buFont typeface="Arial" panose="020B0604020202020204" pitchFamily="34" charset="0"/>
-                  <a:buChar char="•"/>
-                </a:pPr>
-                <a:r>
-                  <a:rPr lang="nl-NL" dirty="0" smtClean="0"/>
-                  <a:t>d</a:t>
-                </a:r>
-                <a:r>
-                  <a:rPr lang="nl-NL" dirty="0" smtClean="0">
-                    <a:latin typeface="+mn-lt"/>
-                  </a:rPr>
-                  <a:t>e </a:t>
-                </a:r>
-                <a:r>
-                  <a:rPr lang="nl-NL" dirty="0">
-                    <a:latin typeface="+mn-lt"/>
-                  </a:rPr>
-                  <a:t>som </a:t>
-                </a:r>
-                <a14:m>
-                  <m:oMath xmlns:m="http://schemas.openxmlformats.org/officeDocument/2006/math">
-                    <m:nary>
-                      <m:naryPr>
-                        <m:chr m:val="∑"/>
-                        <m:ctrlPr>
-                          <a:rPr lang="nl-NL" i="1">
-                            <a:latin typeface="+mn-lt"/>
-                          </a:rPr>
-                        </m:ctrlPr>
-                      </m:naryPr>
-                      <m:sub>
-                        <m:r>
-                          <a:rPr lang="nl-NL" i="1">
-                            <a:latin typeface="+mn-lt"/>
-                          </a:rPr>
-                          <m:t>𝑖</m:t>
-                        </m:r>
-                        <m:r>
-                          <a:rPr lang="nl-NL" i="1">
-                            <a:latin typeface="+mn-lt"/>
-                          </a:rPr>
-                          <m:t>=1</m:t>
-                        </m:r>
-                      </m:sub>
-                      <m:sup>
-                        <m:r>
-                          <a:rPr lang="nl-NL" i="1">
-                            <a:latin typeface="+mn-lt"/>
-                          </a:rPr>
-                          <m:t>𝑛</m:t>
-                        </m:r>
-                      </m:sup>
-                      <m:e>
-                        <m:sSub>
-                          <m:sSubPr>
-                            <m:ctrlPr>
-                              <a:rPr lang="nl-NL" i="1">
-                                <a:latin typeface="+mn-lt"/>
-                              </a:rPr>
-                            </m:ctrlPr>
-                          </m:sSubPr>
-                          <m:e>
-                            <m:r>
-                              <a:rPr lang="nl-NL" i="1">
-                                <a:latin typeface="+mn-lt"/>
-                              </a:rPr>
-                              <m:t>𝑋</m:t>
-                            </m:r>
-                          </m:e>
-                          <m:sub>
-                            <m:r>
-                              <a:rPr lang="nl-NL" i="1">
-                                <a:latin typeface="+mn-lt"/>
-                              </a:rPr>
-                              <m:t>𝑖</m:t>
-                            </m:r>
-                          </m:sub>
-                        </m:sSub>
-                      </m:e>
-                    </m:nary>
-                  </m:oMath>
-                </a14:m>
-                <a:r>
-                  <a:rPr lang="nl-NL" dirty="0">
-                    <a:latin typeface="+mn-lt"/>
-                  </a:rPr>
-                  <a:t> </a:t>
-                </a:r>
-                <a:r>
-                  <a:rPr lang="nl-NL" dirty="0" smtClean="0">
-                    <a:latin typeface="+mn-lt"/>
-                  </a:rPr>
-                  <a:t>normaal </a:t>
-                </a:r>
-                <a:r>
-                  <a:rPr lang="nl-NL" dirty="0">
-                    <a:latin typeface="+mn-lt"/>
-                  </a:rPr>
-                  <a:t>verdeeld is met parameters </a:t>
-                </a:r>
-                <a14:m>
-                  <m:oMath xmlns:m="http://schemas.openxmlformats.org/officeDocument/2006/math">
-                    <m:r>
-                      <a:rPr lang="nl-NL" i="1">
-                        <a:latin typeface="+mn-lt"/>
-                      </a:rPr>
-                      <m:t>𝑛</m:t>
-                    </m:r>
-                    <m:r>
-                      <a:rPr lang="nl-NL" i="1">
-                        <a:latin typeface="+mn-lt"/>
-                      </a:rPr>
-                      <m:t>⋅</m:t>
-                    </m:r>
-                    <m:r>
-                      <a:rPr lang="nl-NL" i="1">
-                        <a:latin typeface="+mn-lt"/>
-                      </a:rPr>
-                      <m:t>𝜇</m:t>
-                    </m:r>
-                  </m:oMath>
-                </a14:m>
-                <a:r>
-                  <a:rPr lang="nl-NL" i="1" dirty="0">
-                    <a:latin typeface="+mn-lt"/>
-                  </a:rPr>
-                  <a:t> </a:t>
-                </a:r>
-                <a:r>
-                  <a:rPr lang="nl-NL" dirty="0">
-                    <a:latin typeface="+mn-lt"/>
-                  </a:rPr>
-                  <a:t>en </a:t>
-                </a:r>
-                <a14:m>
-                  <m:oMath xmlns:m="http://schemas.openxmlformats.org/officeDocument/2006/math">
-                    <m:rad>
-                      <m:radPr>
-                        <m:degHide m:val="on"/>
-                        <m:ctrlPr>
-                          <a:rPr lang="nl-NL" i="1">
-                            <a:latin typeface="+mn-lt"/>
-                          </a:rPr>
-                        </m:ctrlPr>
-                      </m:radPr>
-                      <m:deg/>
-                      <m:e>
-                        <m:r>
-                          <a:rPr lang="nl-NL" i="1">
-                            <a:latin typeface="+mn-lt"/>
-                          </a:rPr>
-                          <m:t>𝑛</m:t>
-                        </m:r>
-                      </m:e>
-                    </m:rad>
-                    <m:r>
-                      <a:rPr lang="nl-NL" i="1">
-                        <a:latin typeface="+mn-lt"/>
-                      </a:rPr>
-                      <m:t>⋅</m:t>
-                    </m:r>
-                    <m:r>
-                      <a:rPr lang="nl-NL" i="1">
-                        <a:latin typeface="+mn-lt"/>
-                      </a:rPr>
-                      <m:t>𝜎</m:t>
-                    </m:r>
-                  </m:oMath>
-                </a14:m>
-                <a:r>
-                  <a:rPr lang="nl-NL" i="1" dirty="0" smtClean="0">
-                    <a:latin typeface="+mn-lt"/>
-                  </a:rPr>
-                  <a:t>.</a:t>
-                </a:r>
-                <a:endParaRPr lang="nl-NL" i="1" dirty="0">
-                  <a:latin typeface="+mn-lt"/>
-                </a:endParaRPr>
-              </a:p>
-              <a:p>
-                <a:pPr marL="342900" indent="-342900" eaLnBrk="1" hangingPunct="1">
-                  <a:buFont typeface="Arial" panose="020B0604020202020204" pitchFamily="34" charset="0"/>
-                  <a:buChar char="•"/>
-                </a:pPr>
-                <a:r>
-                  <a:rPr lang="nl-NL" dirty="0" smtClean="0"/>
-                  <a:t>h</a:t>
-                </a:r>
-                <a:r>
-                  <a:rPr lang="nl-NL" dirty="0" smtClean="0">
-                    <a:latin typeface="+mn-lt"/>
-                  </a:rPr>
-                  <a:t>et </a:t>
-                </a:r>
-                <a:r>
-                  <a:rPr lang="nl-NL" dirty="0">
-                    <a:latin typeface="+mn-lt"/>
-                  </a:rPr>
-                  <a:t>gemiddelde </a:t>
-                </a:r>
-                <a14:m>
-                  <m:oMath xmlns:m="http://schemas.openxmlformats.org/officeDocument/2006/math">
-                    <m:bar>
-                      <m:barPr>
-                        <m:pos m:val="top"/>
-                        <m:ctrlPr>
-                          <a:rPr lang="nl-NL" i="1">
-                            <a:latin typeface="+mn-lt"/>
-                          </a:rPr>
-                        </m:ctrlPr>
-                      </m:barPr>
-                      <m:e>
-                        <m:r>
-                          <a:rPr lang="nl-NL" i="1">
-                            <a:latin typeface="+mn-lt"/>
-                          </a:rPr>
-                          <m:t>𝑋</m:t>
-                        </m:r>
-                      </m:e>
-                    </m:bar>
-                    <m:r>
-                      <a:rPr lang="nl-NL" i="1">
-                        <a:latin typeface="+mn-lt"/>
-                      </a:rPr>
-                      <m:t>=</m:t>
-                    </m:r>
-                    <m:f>
-                      <m:fPr>
-                        <m:ctrlPr>
-                          <a:rPr lang="nl-NL" i="1">
-                            <a:latin typeface="+mn-lt"/>
-                          </a:rPr>
-                        </m:ctrlPr>
-                      </m:fPr>
-                      <m:num>
-                        <m:sSub>
-                          <m:sSubPr>
-                            <m:ctrlPr>
-                              <a:rPr lang="nl-NL" i="1">
-                                <a:latin typeface="+mn-lt"/>
-                              </a:rPr>
-                            </m:ctrlPr>
-                          </m:sSubPr>
-                          <m:e>
-                            <m:r>
-                              <a:rPr lang="nl-NL" i="1">
-                                <a:latin typeface="+mn-lt"/>
-                              </a:rPr>
-                              <m:t>𝑋</m:t>
-                            </m:r>
-                          </m:e>
-                          <m:sub>
-                            <m:r>
-                              <a:rPr lang="nl-NL" i="1">
-                                <a:latin typeface="+mn-lt"/>
-                              </a:rPr>
-                              <m:t>1</m:t>
-                            </m:r>
-                          </m:sub>
-                        </m:sSub>
-                        <m:r>
-                          <a:rPr lang="nl-NL" i="1">
-                            <a:latin typeface="+mn-lt"/>
-                          </a:rPr>
-                          <m:t>+</m:t>
-                        </m:r>
-                        <m:sSub>
-                          <m:sSubPr>
-                            <m:ctrlPr>
-                              <a:rPr lang="nl-NL" i="1">
-                                <a:latin typeface="+mn-lt"/>
-                              </a:rPr>
-                            </m:ctrlPr>
-                          </m:sSubPr>
-                          <m:e>
-                            <m:r>
-                              <a:rPr lang="nl-NL" i="1">
-                                <a:latin typeface="+mn-lt"/>
-                              </a:rPr>
-                              <m:t>𝑋</m:t>
-                            </m:r>
-                          </m:e>
-                          <m:sub>
-                            <m:r>
-                              <a:rPr lang="nl-NL" i="1">
-                                <a:latin typeface="+mn-lt"/>
-                              </a:rPr>
-                              <m:t>2</m:t>
-                            </m:r>
-                          </m:sub>
-                        </m:sSub>
-                        <m:r>
-                          <a:rPr lang="nl-NL" i="1">
-                            <a:latin typeface="+mn-lt"/>
-                          </a:rPr>
-                          <m:t>+…+</m:t>
-                        </m:r>
-                        <m:sSub>
-                          <m:sSubPr>
-                            <m:ctrlPr>
-                              <a:rPr lang="nl-NL" i="1">
-                                <a:latin typeface="+mn-lt"/>
-                              </a:rPr>
-                            </m:ctrlPr>
-                          </m:sSubPr>
-                          <m:e>
-                            <m:r>
-                              <a:rPr lang="nl-NL" i="1">
-                                <a:latin typeface="+mn-lt"/>
-                              </a:rPr>
-                              <m:t>𝑋</m:t>
-                            </m:r>
-                          </m:e>
-                          <m:sub>
-                            <m:r>
-                              <a:rPr lang="nl-NL" i="1">
-                                <a:latin typeface="+mn-lt"/>
-                              </a:rPr>
-                              <m:t>𝑛</m:t>
-                            </m:r>
-                          </m:sub>
-                        </m:sSub>
-                      </m:num>
-                      <m:den>
-                        <m:r>
-                          <a:rPr lang="nl-NL" i="1">
-                            <a:latin typeface="+mn-lt"/>
-                          </a:rPr>
-                          <m:t>𝑛</m:t>
-                        </m:r>
-                      </m:den>
-                    </m:f>
-                  </m:oMath>
-                </a14:m>
-                <a:r>
-                  <a:rPr lang="nl-NL" i="1" dirty="0">
-                    <a:latin typeface="+mn-lt"/>
-                  </a:rPr>
-                  <a:t> </a:t>
-                </a:r>
-                <a:r>
-                  <a:rPr lang="nl-NL" dirty="0">
-                    <a:latin typeface="+mn-lt"/>
-                  </a:rPr>
-                  <a:t>normaal verdeeld is met parameters </a:t>
-                </a:r>
-                <a14:m>
-                  <m:oMath xmlns:m="http://schemas.openxmlformats.org/officeDocument/2006/math">
-                    <m:r>
-                      <a:rPr lang="nl-NL" i="1">
-                        <a:latin typeface="+mn-lt"/>
-                      </a:rPr>
-                      <m:t>𝜇</m:t>
-                    </m:r>
-                  </m:oMath>
-                </a14:m>
-                <a:r>
-                  <a:rPr lang="nl-NL" i="1" dirty="0">
-                    <a:latin typeface="+mn-lt"/>
-                  </a:rPr>
-                  <a:t> </a:t>
-                </a:r>
-                <a:r>
-                  <a:rPr lang="nl-NL" dirty="0">
-                    <a:latin typeface="+mn-lt"/>
-                  </a:rPr>
-                  <a:t>en</a:t>
-                </a:r>
-                <a:r>
-                  <a:rPr lang="nl-NL" i="1" dirty="0">
-                    <a:latin typeface="+mn-lt"/>
-                  </a:rPr>
-                  <a:t> </a:t>
-                </a:r>
-                <a14:m>
-                  <m:oMath xmlns:m="http://schemas.openxmlformats.org/officeDocument/2006/math">
-                    <m:f>
-                      <m:fPr>
-                        <m:ctrlPr>
-                          <a:rPr lang="nl-NL" i="1">
-                            <a:latin typeface="+mn-lt"/>
-                          </a:rPr>
-                        </m:ctrlPr>
-                      </m:fPr>
-                      <m:num>
-                        <m:r>
-                          <a:rPr lang="nl-NL" i="1">
-                            <a:latin typeface="+mn-lt"/>
-                          </a:rPr>
-                          <m:t>𝜎</m:t>
-                        </m:r>
-                      </m:num>
-                      <m:den>
-                        <m:rad>
-                          <m:radPr>
-                            <m:degHide m:val="on"/>
-                            <m:ctrlPr>
-                              <a:rPr lang="nl-NL" i="1">
-                                <a:latin typeface="+mn-lt"/>
-                              </a:rPr>
-                            </m:ctrlPr>
-                          </m:radPr>
-                          <m:deg/>
-                          <m:e>
-                            <m:r>
-                              <a:rPr lang="nl-NL" i="1">
-                                <a:latin typeface="+mn-lt"/>
-                              </a:rPr>
-                              <m:t>𝑛</m:t>
-                            </m:r>
-                          </m:e>
-                        </m:rad>
-                      </m:den>
-                    </m:f>
-                  </m:oMath>
-                </a14:m>
-                <a:r>
-                  <a:rPr lang="nl-NL" i="1" dirty="0">
-                    <a:latin typeface="+mn-lt"/>
-                  </a:rPr>
-                  <a:t>.</a:t>
-                </a:r>
-              </a:p>
-            </p:txBody>
-          </p:sp>
-        </mc:Choice>
-        <mc:Fallback>
-          <p:sp>
-            <p:nvSpPr>
-              <p:cNvPr id="2" name="Tekstvak 1"/>
-              <p:cNvSpPr txBox="1">
-                <a:spLocks noRot="1" noChangeAspect="1" noMove="1" noResize="1" noEditPoints="1" noAdjustHandles="1" noChangeArrowheads="1" noChangeShapeType="1" noTextEdit="1"/>
-              </p:cNvSpPr>
-              <p:nvPr/>
-            </p:nvSpPr>
-            <p:spPr>
-              <a:xfrm>
-                <a:off x="797030" y="4005064"/>
-                <a:ext cx="11044769" cy="2276392"/>
-              </a:xfrm>
-              <a:prstGeom prst="rect">
-                <a:avLst/>
-              </a:prstGeom>
-              <a:blipFill>
-                <a:blip r:embed="rId4"/>
-                <a:stretch>
-                  <a:fillRect l="-550" t="-1055" r="-110" b="-13456"/>
-                </a:stretch>
-              </a:blipFill>
-              <a:ln w="38100"/>
-              <a:effectLst>
-                <a:softEdge rad="31750"/>
-              </a:effectLst>
-            </p:spPr>
-            <p:txBody>
-              <a:bodyPr/>
-              <a:lstStyle/>
-              <a:p>
-                <a:r>
-                  <a:rPr lang="nl-NL">
-                    <a:noFill/>
-                  </a:rPr>
-                  <a:t> </a:t>
-                </a:r>
-              </a:p>
-            </p:txBody>
-          </p:sp>
-        </mc:Fallback>
-      </mc:AlternateContent>
     </p:spTree>
     <p:extLst>
       <p:ext uri="{BB962C8B-B14F-4D97-AF65-F5344CB8AC3E}">
@@ -28135,15 +28597,802 @@
           <a:p>
             <a:pPr eaLnBrk="1" hangingPunct="1"/>
             <a:r>
+              <a:rPr lang="en-US" dirty="0" smtClean="0"/>
+              <a:t>De </a:t>
+            </a:r>
+            <a:r>
               <a:rPr lang="en-US" dirty="0" err="1" smtClean="0"/>
-              <a:t>Voorbeeld</a:t>
+              <a:t>centrale</a:t>
+            </a:r>
+            <a:r>
+              <a:rPr lang="en-US" dirty="0" smtClean="0"/>
+              <a:t> </a:t>
+            </a:r>
+            <a:r>
+              <a:rPr lang="en-US" dirty="0" err="1" smtClean="0"/>
+              <a:t>limietstelling</a:t>
             </a:r>
             <a:endParaRPr lang="nl-NL" dirty="0" smtClean="0"/>
           </a:p>
         </p:txBody>
       </p:sp>
-      <mc:AlternateContent xmlns:mc="http://schemas.openxmlformats.org/markup-compatibility/2006">
-        <mc:Choice xmlns:a14="http://schemas.microsoft.com/office/drawing/2010/main" Requires="a14">
+      <p:sp>
+        <p:nvSpPr>
+          <p:cNvPr id="6147" name="Content Placeholder 2"/>
+          <p:cNvSpPr>
+            <a:spLocks noGrp="1"/>
+          </p:cNvSpPr>
+          <p:nvPr>
+            <p:ph idx="1"/>
+          </p:nvPr>
+        </p:nvSpPr>
+        <p:spPr>
+          <a:xfrm>
+            <a:off x="812800" y="1773238"/>
+            <a:ext cx="10683800" cy="4246562"/>
+          </a:xfrm>
+        </p:spPr>
+        <p:txBody>
+          <a:bodyPr/>
+          <a:lstStyle/>
+          <a:p>
+            <a:pPr eaLnBrk="1" hangingPunct="1"/>
+            <a:endParaRPr lang="nl-NL" b="1" dirty="0"/>
+          </a:p>
+          <a:p>
+            <a:pPr marL="342900" indent="-342900" eaLnBrk="1" hangingPunct="1">
+              <a:buFont typeface="Arial" panose="020B0604020202020204" pitchFamily="34" charset="0"/>
+              <a:buChar char="•"/>
+            </a:pPr>
+            <a:endParaRPr lang="en-US" b="1" dirty="0" smtClean="0"/>
+          </a:p>
+        </p:txBody>
+      </p:sp>
+      <p:sp>
+        <p:nvSpPr>
+          <p:cNvPr id="6148" name="Date Placeholder 3"/>
+          <p:cNvSpPr>
+            <a:spLocks noGrp="1"/>
+          </p:cNvSpPr>
+          <p:nvPr>
+            <p:ph type="dt" sz="quarter" idx="10"/>
+          </p:nvPr>
+        </p:nvSpPr>
+        <p:spPr bwMode="auto">
+          <a:noFill/>
+          <a:ln>
+            <a:miter lim="800000"/>
+            <a:headEnd/>
+            <a:tailEnd/>
+          </a:ln>
+        </p:spPr>
+        <p:txBody>
+          <a:bodyPr wrap="square" numCol="1" anchorCtr="0" compatLnSpc="1">
+            <a:prstTxWarp prst="textNoShape">
+              <a:avLst/>
+            </a:prstTxWarp>
+          </a:bodyPr>
+          <a:lstStyle/>
+          <a:p>
+            <a:r>
+              <a:rPr lang="nl-NL" smtClean="0"/>
+              <a:t>College 5b: de centrale limietstelling</a:t>
+            </a:r>
+          </a:p>
+        </p:txBody>
+      </p:sp>
+      <mc:AlternateContent xmlns:mc="http://schemas.openxmlformats.org/markup-compatibility/2006" xmlns:a14="http://schemas.microsoft.com/office/drawing/2010/main">
+        <mc:Choice Requires="a14">
+          <p:sp>
+            <p:nvSpPr>
+              <p:cNvPr id="2" name="Tekstvak 1"/>
+              <p:cNvSpPr txBox="1"/>
+              <p:nvPr/>
+            </p:nvSpPr>
+            <p:spPr>
+              <a:xfrm>
+                <a:off x="624430" y="1842047"/>
+                <a:ext cx="11060539" cy="4108945"/>
+              </a:xfrm>
+              <a:prstGeom prst="rect">
+                <a:avLst/>
+              </a:prstGeom>
+              <a:solidFill>
+                <a:schemeClr val="bg2">
+                  <a:lumMod val="20000"/>
+                  <a:lumOff val="80000"/>
+                </a:schemeClr>
+              </a:solidFill>
+              <a:ln w="38100"/>
+              <a:effectLst>
+                <a:softEdge rad="31750"/>
+              </a:effectLst>
+            </p:spPr>
+            <p:style>
+              <a:lnRef idx="2">
+                <a:schemeClr val="accent1"/>
+              </a:lnRef>
+              <a:fillRef idx="1">
+                <a:schemeClr val="lt1"/>
+              </a:fillRef>
+              <a:effectRef idx="0">
+                <a:schemeClr val="accent1"/>
+              </a:effectRef>
+              <a:fontRef idx="minor">
+                <a:schemeClr val="dk1"/>
+              </a:fontRef>
+            </p:style>
+            <p:txBody>
+              <a:bodyPr wrap="square" rtlCol="0" anchor="ctr">
+                <a:spAutoFit/>
+              </a:bodyPr>
+              <a:lstStyle/>
+              <a:p>
+                <a:r>
+                  <a:rPr lang="nl-NL" sz="2400" dirty="0" smtClean="0"/>
+                  <a:t>Voor </a:t>
+                </a:r>
+                <a:r>
+                  <a:rPr lang="nl-NL" sz="2400" dirty="0"/>
+                  <a:t>onafhankelijke en gelijk verdeelde </a:t>
+                </a:r>
+                <a:r>
+                  <a:rPr lang="nl-NL" sz="2400" dirty="0" err="1"/>
+                  <a:t>kansvariabelen</a:t>
+                </a:r>
+                <a:r>
+                  <a:rPr lang="nl-NL" sz="2400" dirty="0"/>
+                  <a:t> </a:t>
+                </a:r>
+                <a14:m>
+                  <m:oMath xmlns:m="http://schemas.openxmlformats.org/officeDocument/2006/math">
+                    <m:sSub>
+                      <m:sSubPr>
+                        <m:ctrlPr>
+                          <a:rPr lang="nl-NL" sz="2400" i="1">
+                            <a:latin typeface="Cambria Math" panose="02040503050406030204" pitchFamily="18" charset="0"/>
+                          </a:rPr>
+                        </m:ctrlPr>
+                      </m:sSubPr>
+                      <m:e>
+                        <m:r>
+                          <a:rPr lang="nl-NL" sz="2400" i="1">
+                            <a:latin typeface="Cambria Math" panose="02040503050406030204" pitchFamily="18" charset="0"/>
+                          </a:rPr>
+                          <m:t>𝑋</m:t>
+                        </m:r>
+                      </m:e>
+                      <m:sub>
+                        <m:r>
+                          <a:rPr lang="nl-NL" sz="2400" i="1">
+                            <a:latin typeface="Cambria Math" panose="02040503050406030204" pitchFamily="18" charset="0"/>
+                          </a:rPr>
+                          <m:t>1</m:t>
+                        </m:r>
+                      </m:sub>
+                    </m:sSub>
+                    <m:r>
+                      <a:rPr lang="nl-NL" sz="2400" i="1">
+                        <a:latin typeface="Cambria Math" panose="02040503050406030204" pitchFamily="18" charset="0"/>
+                      </a:rPr>
+                      <m:t>, …</m:t>
+                    </m:r>
+                    <m:sSub>
+                      <m:sSubPr>
+                        <m:ctrlPr>
+                          <a:rPr lang="nl-NL" sz="2400" i="1">
+                            <a:latin typeface="Cambria Math" panose="02040503050406030204" pitchFamily="18" charset="0"/>
+                          </a:rPr>
+                        </m:ctrlPr>
+                      </m:sSubPr>
+                      <m:e>
+                        <m:r>
+                          <a:rPr lang="nl-NL" sz="2400" i="1">
+                            <a:latin typeface="Cambria Math" panose="02040503050406030204" pitchFamily="18" charset="0"/>
+                          </a:rPr>
+                          <m:t>𝑋</m:t>
+                        </m:r>
+                      </m:e>
+                      <m:sub>
+                        <m:r>
+                          <a:rPr lang="nl-NL" sz="2400" i="1">
+                            <a:latin typeface="Cambria Math" panose="02040503050406030204" pitchFamily="18" charset="0"/>
+                          </a:rPr>
+                          <m:t>𝑛</m:t>
+                        </m:r>
+                      </m:sub>
+                    </m:sSub>
+                  </m:oMath>
+                </a14:m>
+                <a:r>
+                  <a:rPr lang="nl-NL" sz="2400" dirty="0"/>
+                  <a:t> </a:t>
+                </a:r>
+                <a:r>
+                  <a:rPr lang="nl-NL" sz="2400" dirty="0" smtClean="0"/>
+                  <a:t>met verwachtingswaarde </a:t>
+                </a:r>
+                <a14:m>
+                  <m:oMath xmlns:m="http://schemas.openxmlformats.org/officeDocument/2006/math">
+                    <m:r>
+                      <a:rPr lang="nl-NL" sz="2400" b="0" i="1" smtClean="0">
+                        <a:latin typeface="Cambria Math" panose="02040503050406030204" pitchFamily="18" charset="0"/>
+                      </a:rPr>
+                      <m:t>𝜇</m:t>
+                    </m:r>
+                  </m:oMath>
+                </a14:m>
+                <a:r>
+                  <a:rPr lang="nl-NL" sz="2400" dirty="0" smtClean="0"/>
+                  <a:t> en standaardafwijking </a:t>
+                </a:r>
+                <a14:m>
+                  <m:oMath xmlns:m="http://schemas.openxmlformats.org/officeDocument/2006/math">
+                    <m:r>
+                      <a:rPr lang="nl-NL" sz="2400" b="0" i="1" smtClean="0">
+                        <a:latin typeface="Cambria Math" panose="02040503050406030204" pitchFamily="18" charset="0"/>
+                      </a:rPr>
+                      <m:t>𝜎</m:t>
+                    </m:r>
+                  </m:oMath>
+                </a14:m>
+                <a:r>
+                  <a:rPr lang="nl-NL" sz="2400" dirty="0" smtClean="0"/>
+                  <a:t> geldt </a:t>
+                </a:r>
+                <a:r>
+                  <a:rPr lang="nl-NL" sz="2400" i="1" dirty="0"/>
+                  <a:t>(bij benadering) </a:t>
+                </a:r>
+                <a:r>
+                  <a:rPr lang="nl-NL" sz="2400" dirty="0"/>
+                  <a:t>dat:</a:t>
+                </a:r>
+              </a:p>
+              <a:p>
+                <a:pPr marL="342900" indent="-342900" eaLnBrk="1" hangingPunct="1">
+                  <a:buFont typeface="Arial" panose="020B0604020202020204" pitchFamily="34" charset="0"/>
+                  <a:buChar char="•"/>
+                </a:pPr>
+                <a:endParaRPr lang="nl-NL" sz="2400" dirty="0" smtClean="0"/>
+              </a:p>
+              <a:p>
+                <a:pPr marL="342900" indent="-342900" eaLnBrk="1" hangingPunct="1">
+                  <a:buFont typeface="Arial" panose="020B0604020202020204" pitchFamily="34" charset="0"/>
+                  <a:buChar char="•"/>
+                </a:pPr>
+                <a:r>
+                  <a:rPr lang="nl-NL" sz="2400" dirty="0" smtClean="0"/>
+                  <a:t>de </a:t>
+                </a:r>
+                <a:r>
+                  <a:rPr lang="nl-NL" sz="2400" dirty="0"/>
+                  <a:t>som </a:t>
+                </a:r>
+                <a14:m>
+                  <m:oMath xmlns:m="http://schemas.openxmlformats.org/officeDocument/2006/math">
+                    <m:nary>
+                      <m:naryPr>
+                        <m:chr m:val="∑"/>
+                        <m:ctrlPr>
+                          <a:rPr lang="nl-NL" sz="2400" i="1">
+                            <a:latin typeface="Cambria Math" panose="02040503050406030204" pitchFamily="18" charset="0"/>
+                          </a:rPr>
+                        </m:ctrlPr>
+                      </m:naryPr>
+                      <m:sub>
+                        <m:r>
+                          <a:rPr lang="nl-NL" sz="2400" i="1">
+                            <a:latin typeface="Cambria Math" panose="02040503050406030204" pitchFamily="18" charset="0"/>
+                          </a:rPr>
+                          <m:t>𝑖</m:t>
+                        </m:r>
+                        <m:r>
+                          <a:rPr lang="nl-NL" sz="2400" i="1">
+                            <a:latin typeface="Cambria Math" panose="02040503050406030204" pitchFamily="18" charset="0"/>
+                          </a:rPr>
+                          <m:t>=1</m:t>
+                        </m:r>
+                      </m:sub>
+                      <m:sup>
+                        <m:r>
+                          <a:rPr lang="nl-NL" sz="2400" i="1">
+                            <a:latin typeface="Cambria Math" panose="02040503050406030204" pitchFamily="18" charset="0"/>
+                          </a:rPr>
+                          <m:t>𝑛</m:t>
+                        </m:r>
+                      </m:sup>
+                      <m:e>
+                        <m:sSub>
+                          <m:sSubPr>
+                            <m:ctrlPr>
+                              <a:rPr lang="nl-NL" sz="2400" i="1">
+                                <a:latin typeface="Cambria Math" panose="02040503050406030204" pitchFamily="18" charset="0"/>
+                              </a:rPr>
+                            </m:ctrlPr>
+                          </m:sSubPr>
+                          <m:e>
+                            <m:r>
+                              <a:rPr lang="nl-NL" sz="2400" i="1">
+                                <a:latin typeface="Cambria Math" panose="02040503050406030204" pitchFamily="18" charset="0"/>
+                              </a:rPr>
+                              <m:t>𝑋</m:t>
+                            </m:r>
+                          </m:e>
+                          <m:sub>
+                            <m:r>
+                              <a:rPr lang="nl-NL" sz="2400" i="1">
+                                <a:latin typeface="Cambria Math" panose="02040503050406030204" pitchFamily="18" charset="0"/>
+                              </a:rPr>
+                              <m:t>𝑖</m:t>
+                            </m:r>
+                          </m:sub>
+                        </m:sSub>
+                      </m:e>
+                    </m:nary>
+                  </m:oMath>
+                </a14:m>
+                <a:r>
+                  <a:rPr lang="nl-NL" sz="2400" dirty="0"/>
+                  <a:t> </a:t>
+                </a:r>
+                <a:r>
+                  <a:rPr lang="nl-NL" sz="2400" dirty="0" smtClean="0"/>
+                  <a:t>normaal </a:t>
+                </a:r>
+                <a:r>
+                  <a:rPr lang="nl-NL" sz="2400" dirty="0"/>
+                  <a:t>verdeeld is </a:t>
+                </a:r>
+                <a:r>
+                  <a:rPr lang="nl-NL" sz="2400" dirty="0" smtClean="0"/>
+                  <a:t>met</a:t>
+                </a:r>
+              </a:p>
+              <a:p>
+                <a:pPr marL="800100" lvl="1" indent="-342900">
+                  <a:buFont typeface="Arial" panose="020B0604020202020204" pitchFamily="34" charset="0"/>
+                  <a:buChar char="•"/>
+                </a:pPr>
+                <a:r>
+                  <a:rPr lang="nl-NL" sz="2400" i="1" dirty="0" smtClean="0"/>
+                  <a:t>verwachtingswaarde</a:t>
+                </a:r>
+                <a:r>
+                  <a:rPr lang="nl-NL" sz="2400" dirty="0" smtClean="0"/>
+                  <a:t> </a:t>
+                </a:r>
+                <a14:m>
+                  <m:oMath xmlns:m="http://schemas.openxmlformats.org/officeDocument/2006/math">
+                    <m:r>
+                      <a:rPr lang="nl-NL" sz="2400" i="1">
+                        <a:latin typeface="Cambria Math" panose="02040503050406030204" pitchFamily="18" charset="0"/>
+                      </a:rPr>
+                      <m:t>𝑛</m:t>
+                    </m:r>
+                    <m:r>
+                      <a:rPr lang="nl-NL" sz="2400" i="1">
+                        <a:latin typeface="Cambria Math" panose="02040503050406030204" pitchFamily="18" charset="0"/>
+                      </a:rPr>
+                      <m:t>⋅</m:t>
+                    </m:r>
+                    <m:r>
+                      <a:rPr lang="nl-NL" sz="2400" i="1">
+                        <a:latin typeface="Cambria Math" panose="02040503050406030204" pitchFamily="18" charset="0"/>
+                      </a:rPr>
+                      <m:t>𝜇</m:t>
+                    </m:r>
+                  </m:oMath>
+                </a14:m>
+                <a:endParaRPr lang="nl-NL" sz="2400" i="1" dirty="0" smtClean="0"/>
+              </a:p>
+              <a:p>
+                <a:pPr marL="800100" lvl="1" indent="-342900">
+                  <a:buFont typeface="Arial" panose="020B0604020202020204" pitchFamily="34" charset="0"/>
+                  <a:buChar char="•"/>
+                </a:pPr>
+                <a:r>
+                  <a:rPr lang="nl-NL" sz="2400" i="1" dirty="0" smtClean="0"/>
+                  <a:t>standaardafwijking</a:t>
+                </a:r>
+                <a:r>
+                  <a:rPr lang="nl-NL" sz="2400" dirty="0" smtClean="0"/>
+                  <a:t> </a:t>
+                </a:r>
+                <a14:m>
+                  <m:oMath xmlns:m="http://schemas.openxmlformats.org/officeDocument/2006/math">
+                    <m:rad>
+                      <m:radPr>
+                        <m:degHide m:val="on"/>
+                        <m:ctrlPr>
+                          <a:rPr lang="nl-NL" sz="2400" i="1">
+                            <a:latin typeface="Cambria Math" panose="02040503050406030204" pitchFamily="18" charset="0"/>
+                          </a:rPr>
+                        </m:ctrlPr>
+                      </m:radPr>
+                      <m:deg/>
+                      <m:e>
+                        <m:r>
+                          <a:rPr lang="nl-NL" sz="2400" i="1">
+                            <a:latin typeface="Cambria Math" panose="02040503050406030204" pitchFamily="18" charset="0"/>
+                          </a:rPr>
+                          <m:t>𝑛</m:t>
+                        </m:r>
+                      </m:e>
+                    </m:rad>
+                    <m:r>
+                      <a:rPr lang="nl-NL" sz="2400" i="1">
+                        <a:latin typeface="Cambria Math" panose="02040503050406030204" pitchFamily="18" charset="0"/>
+                      </a:rPr>
+                      <m:t>⋅</m:t>
+                    </m:r>
+                    <m:r>
+                      <a:rPr lang="nl-NL" sz="2400" i="1">
+                        <a:latin typeface="Cambria Math" panose="02040503050406030204" pitchFamily="18" charset="0"/>
+                      </a:rPr>
+                      <m:t>𝜎</m:t>
+                    </m:r>
+                  </m:oMath>
+                </a14:m>
+                <a:r>
+                  <a:rPr lang="nl-NL" sz="2400" i="1" dirty="0" smtClean="0"/>
+                  <a:t>.</a:t>
+                </a:r>
+              </a:p>
+              <a:p>
+                <a:pPr marL="800100" lvl="1" indent="-342900">
+                  <a:buFont typeface="Arial" panose="020B0604020202020204" pitchFamily="34" charset="0"/>
+                  <a:buChar char="•"/>
+                </a:pPr>
+                <a:endParaRPr lang="nl-NL" sz="2400" i="1" dirty="0"/>
+              </a:p>
+              <a:p>
+                <a:pPr marL="342900" indent="-342900" eaLnBrk="1" hangingPunct="1">
+                  <a:buFont typeface="Arial" panose="020B0604020202020204" pitchFamily="34" charset="0"/>
+                  <a:buChar char="•"/>
+                </a:pPr>
+                <a:r>
+                  <a:rPr lang="nl-NL" sz="2400" dirty="0" smtClean="0"/>
+                  <a:t>het </a:t>
+                </a:r>
+                <a:r>
+                  <a:rPr lang="nl-NL" sz="2400" dirty="0"/>
+                  <a:t>gemiddelde </a:t>
+                </a:r>
+                <a14:m>
+                  <m:oMath xmlns:m="http://schemas.openxmlformats.org/officeDocument/2006/math">
+                    <m:bar>
+                      <m:barPr>
+                        <m:pos m:val="top"/>
+                        <m:ctrlPr>
+                          <a:rPr lang="nl-NL" sz="2400" i="1">
+                            <a:latin typeface="Cambria Math" panose="02040503050406030204" pitchFamily="18" charset="0"/>
+                          </a:rPr>
+                        </m:ctrlPr>
+                      </m:barPr>
+                      <m:e>
+                        <m:r>
+                          <a:rPr lang="nl-NL" sz="2400" i="1">
+                            <a:latin typeface="Cambria Math" panose="02040503050406030204" pitchFamily="18" charset="0"/>
+                          </a:rPr>
+                          <m:t>𝑋</m:t>
+                        </m:r>
+                      </m:e>
+                    </m:bar>
+                    <m:r>
+                      <a:rPr lang="nl-NL" sz="2400" i="1">
+                        <a:latin typeface="Cambria Math" panose="02040503050406030204" pitchFamily="18" charset="0"/>
+                      </a:rPr>
+                      <m:t>=</m:t>
+                    </m:r>
+                    <m:f>
+                      <m:fPr>
+                        <m:ctrlPr>
+                          <a:rPr lang="nl-NL" sz="2400" i="1">
+                            <a:latin typeface="Cambria Math" panose="02040503050406030204" pitchFamily="18" charset="0"/>
+                          </a:rPr>
+                        </m:ctrlPr>
+                      </m:fPr>
+                      <m:num>
+                        <m:sSub>
+                          <m:sSubPr>
+                            <m:ctrlPr>
+                              <a:rPr lang="nl-NL" sz="2400" i="1">
+                                <a:latin typeface="Cambria Math" panose="02040503050406030204" pitchFamily="18" charset="0"/>
+                              </a:rPr>
+                            </m:ctrlPr>
+                          </m:sSubPr>
+                          <m:e>
+                            <m:r>
+                              <a:rPr lang="nl-NL" sz="2400" i="1">
+                                <a:latin typeface="Cambria Math" panose="02040503050406030204" pitchFamily="18" charset="0"/>
+                              </a:rPr>
+                              <m:t>𝑋</m:t>
+                            </m:r>
+                          </m:e>
+                          <m:sub>
+                            <m:r>
+                              <a:rPr lang="nl-NL" sz="2400" i="1">
+                                <a:latin typeface="Cambria Math" panose="02040503050406030204" pitchFamily="18" charset="0"/>
+                              </a:rPr>
+                              <m:t>1</m:t>
+                            </m:r>
+                          </m:sub>
+                        </m:sSub>
+                        <m:r>
+                          <a:rPr lang="nl-NL" sz="2400" i="1">
+                            <a:latin typeface="Cambria Math" panose="02040503050406030204" pitchFamily="18" charset="0"/>
+                          </a:rPr>
+                          <m:t>+</m:t>
+                        </m:r>
+                        <m:sSub>
+                          <m:sSubPr>
+                            <m:ctrlPr>
+                              <a:rPr lang="nl-NL" sz="2400" i="1">
+                                <a:latin typeface="Cambria Math" panose="02040503050406030204" pitchFamily="18" charset="0"/>
+                              </a:rPr>
+                            </m:ctrlPr>
+                          </m:sSubPr>
+                          <m:e>
+                            <m:r>
+                              <a:rPr lang="nl-NL" sz="2400" i="1">
+                                <a:latin typeface="Cambria Math" panose="02040503050406030204" pitchFamily="18" charset="0"/>
+                              </a:rPr>
+                              <m:t>𝑋</m:t>
+                            </m:r>
+                          </m:e>
+                          <m:sub>
+                            <m:r>
+                              <a:rPr lang="nl-NL" sz="2400" i="1">
+                                <a:latin typeface="Cambria Math" panose="02040503050406030204" pitchFamily="18" charset="0"/>
+                              </a:rPr>
+                              <m:t>2</m:t>
+                            </m:r>
+                          </m:sub>
+                        </m:sSub>
+                        <m:r>
+                          <a:rPr lang="nl-NL" sz="2400" i="1">
+                            <a:latin typeface="Cambria Math" panose="02040503050406030204" pitchFamily="18" charset="0"/>
+                          </a:rPr>
+                          <m:t>+…+</m:t>
+                        </m:r>
+                        <m:sSub>
+                          <m:sSubPr>
+                            <m:ctrlPr>
+                              <a:rPr lang="nl-NL" sz="2400" i="1">
+                                <a:latin typeface="Cambria Math" panose="02040503050406030204" pitchFamily="18" charset="0"/>
+                              </a:rPr>
+                            </m:ctrlPr>
+                          </m:sSubPr>
+                          <m:e>
+                            <m:r>
+                              <a:rPr lang="nl-NL" sz="2400" i="1">
+                                <a:latin typeface="Cambria Math" panose="02040503050406030204" pitchFamily="18" charset="0"/>
+                              </a:rPr>
+                              <m:t>𝑋</m:t>
+                            </m:r>
+                          </m:e>
+                          <m:sub>
+                            <m:r>
+                              <a:rPr lang="nl-NL" sz="2400" i="1">
+                                <a:latin typeface="Cambria Math" panose="02040503050406030204" pitchFamily="18" charset="0"/>
+                              </a:rPr>
+                              <m:t>𝑛</m:t>
+                            </m:r>
+                          </m:sub>
+                        </m:sSub>
+                      </m:num>
+                      <m:den>
+                        <m:r>
+                          <a:rPr lang="nl-NL" sz="2400" i="1">
+                            <a:latin typeface="Cambria Math" panose="02040503050406030204" pitchFamily="18" charset="0"/>
+                          </a:rPr>
+                          <m:t>𝑛</m:t>
+                        </m:r>
+                      </m:den>
+                    </m:f>
+                  </m:oMath>
+                </a14:m>
+                <a:r>
+                  <a:rPr lang="nl-NL" sz="2400" i="1" dirty="0"/>
+                  <a:t> </a:t>
+                </a:r>
+                <a:r>
+                  <a:rPr lang="nl-NL" sz="2400" dirty="0"/>
+                  <a:t>normaal verdeeld is met </a:t>
+                </a:r>
+                <a:endParaRPr lang="nl-NL" sz="2400" dirty="0" smtClean="0"/>
+              </a:p>
+              <a:p>
+                <a:pPr marL="800100" lvl="1" indent="-342900">
+                  <a:buFont typeface="Arial" panose="020B0604020202020204" pitchFamily="34" charset="0"/>
+                  <a:buChar char="•"/>
+                </a:pPr>
+                <a:r>
+                  <a:rPr lang="nl-NL" sz="2400" i="1" dirty="0" smtClean="0"/>
+                  <a:t>verwachtingswaarde</a:t>
+                </a:r>
+                <a:r>
+                  <a:rPr lang="nl-NL" sz="2400" dirty="0" smtClean="0"/>
+                  <a:t> </a:t>
+                </a:r>
+                <a14:m>
+                  <m:oMath xmlns:m="http://schemas.openxmlformats.org/officeDocument/2006/math">
+                    <m:r>
+                      <a:rPr lang="nl-NL" sz="2400" i="1">
+                        <a:latin typeface="Cambria Math" panose="02040503050406030204" pitchFamily="18" charset="0"/>
+                      </a:rPr>
+                      <m:t>𝜇</m:t>
+                    </m:r>
+                  </m:oMath>
+                </a14:m>
+                <a:endParaRPr lang="nl-NL" sz="2400" i="1" dirty="0" smtClean="0"/>
+              </a:p>
+              <a:p>
+                <a:pPr marL="800100" lvl="1" indent="-342900">
+                  <a:buFont typeface="Arial" panose="020B0604020202020204" pitchFamily="34" charset="0"/>
+                  <a:buChar char="•"/>
+                </a:pPr>
+                <a:r>
+                  <a:rPr lang="nl-NL" sz="2400" i="1" dirty="0" smtClean="0"/>
+                  <a:t>standaardafwijking </a:t>
+                </a:r>
+                <a14:m>
+                  <m:oMath xmlns:m="http://schemas.openxmlformats.org/officeDocument/2006/math">
+                    <m:f>
+                      <m:fPr>
+                        <m:ctrlPr>
+                          <a:rPr lang="nl-NL" sz="2400" i="1">
+                            <a:latin typeface="Cambria Math" panose="02040503050406030204" pitchFamily="18" charset="0"/>
+                          </a:rPr>
+                        </m:ctrlPr>
+                      </m:fPr>
+                      <m:num>
+                        <m:r>
+                          <a:rPr lang="nl-NL" sz="2400" i="1">
+                            <a:latin typeface="Cambria Math" panose="02040503050406030204" pitchFamily="18" charset="0"/>
+                          </a:rPr>
+                          <m:t>𝜎</m:t>
+                        </m:r>
+                      </m:num>
+                      <m:den>
+                        <m:rad>
+                          <m:radPr>
+                            <m:degHide m:val="on"/>
+                            <m:ctrlPr>
+                              <a:rPr lang="nl-NL" sz="2400" i="1">
+                                <a:latin typeface="Cambria Math" panose="02040503050406030204" pitchFamily="18" charset="0"/>
+                              </a:rPr>
+                            </m:ctrlPr>
+                          </m:radPr>
+                          <m:deg/>
+                          <m:e>
+                            <m:r>
+                              <a:rPr lang="nl-NL" sz="2400" i="1">
+                                <a:latin typeface="Cambria Math" panose="02040503050406030204" pitchFamily="18" charset="0"/>
+                              </a:rPr>
+                              <m:t>𝑛</m:t>
+                            </m:r>
+                          </m:e>
+                        </m:rad>
+                      </m:den>
+                    </m:f>
+                  </m:oMath>
+                </a14:m>
+                <a:r>
+                  <a:rPr lang="nl-NL" sz="2400" i="1" dirty="0"/>
+                  <a:t>.</a:t>
+                </a:r>
+              </a:p>
+            </p:txBody>
+          </p:sp>
+        </mc:Choice>
+        <mc:Fallback xmlns="">
+          <p:sp>
+            <p:nvSpPr>
+              <p:cNvPr id="2" name="Tekstvak 1"/>
+              <p:cNvSpPr txBox="1">
+                <a:spLocks noRot="1" noChangeAspect="1" noMove="1" noResize="1" noEditPoints="1" noAdjustHandles="1" noChangeArrowheads="1" noChangeShapeType="1" noTextEdit="1"/>
+              </p:cNvSpPr>
+              <p:nvPr/>
+            </p:nvSpPr>
+            <p:spPr>
+              <a:xfrm>
+                <a:off x="624430" y="1842047"/>
+                <a:ext cx="11060539" cy="4108945"/>
+              </a:xfrm>
+              <a:prstGeom prst="rect">
+                <a:avLst/>
+              </a:prstGeom>
+              <a:blipFill>
+                <a:blip r:embed="rId3"/>
+                <a:stretch>
+                  <a:fillRect l="-659" t="-294"/>
+                </a:stretch>
+              </a:blipFill>
+              <a:ln w="38100"/>
+              <a:effectLst>
+                <a:softEdge rad="31750"/>
+              </a:effectLst>
+            </p:spPr>
+            <p:txBody>
+              <a:bodyPr/>
+              <a:lstStyle/>
+              <a:p>
+                <a:r>
+                  <a:rPr lang="nl-NL">
+                    <a:noFill/>
+                  </a:rPr>
+                  <a:t> </a:t>
+                </a:r>
+              </a:p>
+            </p:txBody>
+          </p:sp>
+        </mc:Fallback>
+      </mc:AlternateContent>
+    </p:spTree>
+    <p:extLst>
+      <p:ext uri="{BB962C8B-B14F-4D97-AF65-F5344CB8AC3E}">
+        <p14:creationId xmlns:p14="http://schemas.microsoft.com/office/powerpoint/2010/main" val="794121855"/>
+      </p:ext>
+    </p:extLst>
+  </p:cSld>
+  <p:clrMapOvr>
+    <a:masterClrMapping/>
+  </p:clrMapOvr>
+  <p:timing>
+    <p:tnLst>
+      <p:par>
+        <p:cTn id="1" dur="indefinite" restart="never" nodeType="tmRoot"/>
+      </p:par>
+    </p:tnLst>
+  </p:timing>
+</p:sld>
+</file>
+
+<file path=ppt/slides/slide9.xml><?xml version="1.0" encoding="utf-8"?>
+<p:sld xmlns:a="http://schemas.openxmlformats.org/drawingml/2006/main" xmlns:r="http://schemas.openxmlformats.org/officeDocument/2006/relationships" xmlns:p="http://schemas.openxmlformats.org/presentationml/2006/main">
+  <p:cSld>
+    <p:spTree>
+      <p:nvGrpSpPr>
+        <p:cNvPr id="1" name=""/>
+        <p:cNvGrpSpPr/>
+        <p:nvPr/>
+      </p:nvGrpSpPr>
+      <p:grpSpPr>
+        <a:xfrm>
+          <a:off x="0" y="0"/>
+          <a:ext cx="0" cy="0"/>
+          <a:chOff x="0" y="0"/>
+          <a:chExt cx="0" cy="0"/>
+        </a:xfrm>
+      </p:grpSpPr>
+      <p:sp>
+        <p:nvSpPr>
+          <p:cNvPr id="6146" name="Title 1"/>
+          <p:cNvSpPr>
+            <a:spLocks noGrp="1"/>
+          </p:cNvSpPr>
+          <p:nvPr>
+            <p:ph type="title"/>
+          </p:nvPr>
+        </p:nvSpPr>
+        <p:spPr/>
+        <p:txBody>
+          <a:bodyPr/>
+          <a:lstStyle/>
+          <a:p>
+            <a:pPr eaLnBrk="1" hangingPunct="1"/>
+            <a:r>
+              <a:rPr lang="en-US" dirty="0" err="1" smtClean="0"/>
+              <a:t>Voorbeeld</a:t>
+            </a:r>
+            <a:endParaRPr lang="nl-NL" dirty="0" smtClean="0"/>
+          </a:p>
+        </p:txBody>
+      </p:sp>
+      <mc:AlternateContent xmlns:mc="http://schemas.openxmlformats.org/markup-compatibility/2006" xmlns:a14="http://schemas.microsoft.com/office/drawing/2010/main">
+        <mc:Choice Requires="a14">
           <p:sp>
             <p:nvSpPr>
               <p:cNvPr id="6147" name="Content Placeholder 2"/>
@@ -29062,11 +30311,7 @@
                 </a:r>
                 <a:r>
                   <a:rPr lang="en-US" b="1" dirty="0" smtClean="0"/>
-                  <a:t> van </a:t>
-                </a:r>
-                <a:r>
-                  <a:rPr lang="en-US" b="1" dirty="0" smtClean="0"/>
-                  <a:t>het </a:t>
+                  <a:t> van het </a:t>
                 </a:r>
                 <a:r>
                   <a:rPr lang="en-US" b="1" dirty="0" err="1" smtClean="0"/>
@@ -29442,25 +30687,7 @@
                         </a:solidFill>
                         <a:latin typeface="Cambria Math" panose="02040503050406030204" pitchFamily="18" charset="0"/>
                       </a:rPr>
-                      <m:t>=50⋅8</m:t>
-                    </m:r>
-                    <m:r>
-                      <a:rPr lang="nl-NL" sz="2000" b="0" i="1">
-                        <a:solidFill>
-                          <a:srgbClr val="92D050"/>
-                        </a:solidFill>
-                        <a:latin typeface="Cambria Math" panose="02040503050406030204" pitchFamily="18" charset="0"/>
-                      </a:rPr>
-                      <m:t>5=4</m:t>
-                    </m:r>
-                    <m:r>
-                      <a:rPr lang="nl-NL" sz="2000" b="0" i="1" smtClean="0">
-                        <a:solidFill>
-                          <a:srgbClr val="92D050"/>
-                        </a:solidFill>
-                        <a:latin typeface="Cambria Math" panose="02040503050406030204" pitchFamily="18" charset="0"/>
-                      </a:rPr>
-                      <m:t>250</m:t>
+                      <m:t>=50⋅85=4250</m:t>
                     </m:r>
                   </m:oMath>
                 </a14:m>
@@ -29595,7 +30822,7 @@
             </p:txBody>
           </p:sp>
         </mc:Choice>
-        <mc:Fallback>
+        <mc:Fallback xmlns="">
           <p:sp>
             <p:nvSpPr>
               <p:cNvPr id="6147" name="Content Placeholder 2"/>
@@ -29670,316 +30897,6 @@
     <p:extLst>
       <p:ext uri="{BB962C8B-B14F-4D97-AF65-F5344CB8AC3E}">
         <p14:creationId xmlns:p14="http://schemas.microsoft.com/office/powerpoint/2010/main" val="3609559254"/>
-      </p:ext>
-    </p:extLst>
-  </p:cSld>
-  <p:clrMapOvr>
-    <a:masterClrMapping/>
-  </p:clrMapOvr>
-  <p:timing>
-    <p:tnLst>
-      <p:par>
-        <p:cTn id="1" dur="indefinite" restart="never" nodeType="tmRoot"/>
-      </p:par>
-    </p:tnLst>
-  </p:timing>
-</p:sld>
-</file>
-
-<file path=ppt/slides/slide9.xml><?xml version="1.0" encoding="utf-8"?>
-<p:sld xmlns:a="http://schemas.openxmlformats.org/drawingml/2006/main" xmlns:r="http://schemas.openxmlformats.org/officeDocument/2006/relationships" xmlns:p="http://schemas.openxmlformats.org/presentationml/2006/main">
-  <p:cSld>
-    <p:spTree>
-      <p:nvGrpSpPr>
-        <p:cNvPr id="1" name=""/>
-        <p:cNvGrpSpPr/>
-        <p:nvPr/>
-      </p:nvGrpSpPr>
-      <p:grpSpPr>
-        <a:xfrm>
-          <a:off x="0" y="0"/>
-          <a:ext cx="0" cy="0"/>
-          <a:chOff x="0" y="0"/>
-          <a:chExt cx="0" cy="0"/>
-        </a:xfrm>
-      </p:grpSpPr>
-      <p:sp>
-        <p:nvSpPr>
-          <p:cNvPr id="6146" name="Title 1"/>
-          <p:cNvSpPr>
-            <a:spLocks noGrp="1"/>
-          </p:cNvSpPr>
-          <p:nvPr>
-            <p:ph type="title"/>
-          </p:nvPr>
-        </p:nvSpPr>
-        <p:spPr/>
-        <p:txBody>
-          <a:bodyPr/>
-          <a:lstStyle/>
-          <a:p>
-            <a:pPr eaLnBrk="1" hangingPunct="1"/>
-            <a:r>
-              <a:rPr lang="en-US" dirty="0" err="1" smtClean="0"/>
-              <a:t>Visuele</a:t>
-            </a:r>
-            <a:r>
-              <a:rPr lang="en-US" dirty="0" smtClean="0"/>
-              <a:t> </a:t>
-            </a:r>
-            <a:r>
-              <a:rPr lang="en-US" dirty="0" err="1" smtClean="0"/>
-              <a:t>simulatie</a:t>
-            </a:r>
-            <a:r>
-              <a:rPr lang="en-US" dirty="0"/>
-              <a:t> </a:t>
-            </a:r>
-            <a:r>
-              <a:rPr lang="en-US" dirty="0" smtClean="0"/>
-              <a:t>van de </a:t>
-            </a:r>
-            <a:r>
-              <a:rPr lang="en-US" dirty="0" err="1" smtClean="0"/>
-              <a:t>centrale</a:t>
-            </a:r>
-            <a:r>
-              <a:rPr lang="en-US" dirty="0" smtClean="0"/>
-              <a:t> </a:t>
-            </a:r>
-            <a:r>
-              <a:rPr lang="en-US" dirty="0" err="1" smtClean="0"/>
-              <a:t>limietstelling</a:t>
-            </a:r>
-            <a:endParaRPr lang="nl-NL" dirty="0" smtClean="0"/>
-          </a:p>
-        </p:txBody>
-      </p:sp>
-      <p:sp>
-        <p:nvSpPr>
-          <p:cNvPr id="6148" name="Date Placeholder 3"/>
-          <p:cNvSpPr>
-            <a:spLocks noGrp="1"/>
-          </p:cNvSpPr>
-          <p:nvPr>
-            <p:ph type="dt" sz="quarter" idx="10"/>
-          </p:nvPr>
-        </p:nvSpPr>
-        <p:spPr bwMode="auto">
-          <a:noFill/>
-          <a:ln>
-            <a:miter lim="800000"/>
-            <a:headEnd/>
-            <a:tailEnd/>
-          </a:ln>
-        </p:spPr>
-        <p:txBody>
-          <a:bodyPr wrap="square" numCol="1" anchorCtr="0" compatLnSpc="1">
-            <a:prstTxWarp prst="textNoShape">
-              <a:avLst/>
-            </a:prstTxWarp>
-          </a:bodyPr>
-          <a:lstStyle/>
-          <a:p>
-            <a:r>
-              <a:rPr lang="nl-NL" smtClean="0"/>
-              <a:t>College 5b: de centrale limietstelling</a:t>
-            </a:r>
-          </a:p>
-        </p:txBody>
-      </p:sp>
-      <mc:AlternateContent xmlns:mc="http://schemas.openxmlformats.org/markup-compatibility/2006">
-        <mc:Choice xmlns:a14="http://schemas.microsoft.com/office/drawing/2010/main" Requires="a14">
-          <p:sp>
-            <p:nvSpPr>
-              <p:cNvPr id="2" name="Tijdelijke aanduiding voor inhoud 1"/>
-              <p:cNvSpPr>
-                <a:spLocks noGrp="1"/>
-              </p:cNvSpPr>
-              <p:nvPr>
-                <p:ph idx="1"/>
-              </p:nvPr>
-            </p:nvSpPr>
-            <p:spPr/>
-            <p:txBody>
-              <a:bodyPr/>
-              <a:lstStyle/>
-              <a:p>
-                <a:pPr marL="342900" indent="-342900">
-                  <a:buFont typeface="Arial" panose="020B0604020202020204" pitchFamily="34" charset="0"/>
-                  <a:buChar char="•"/>
-                </a:pPr>
-                <a:endParaRPr lang="nl-NL" dirty="0" smtClean="0"/>
-              </a:p>
-              <a:p>
-                <a:pPr marL="342900" indent="-342900">
-                  <a:buFont typeface="Arial" panose="020B0604020202020204" pitchFamily="34" charset="0"/>
-                  <a:buChar char="•"/>
-                </a:pPr>
-                <a:r>
-                  <a:rPr lang="nl-NL" dirty="0" smtClean="0"/>
-                  <a:t>Wat gebeurt er als we het aantal </a:t>
-                </a:r>
-                <a:r>
-                  <a:rPr lang="nl-NL" dirty="0" err="1" smtClean="0"/>
-                  <a:t>kansvariabelen</a:t>
-                </a:r>
-                <a:r>
-                  <a:rPr lang="nl-NL" dirty="0" smtClean="0"/>
-                  <a:t> </a:t>
-                </a:r>
-                <a14:m>
-                  <m:oMath xmlns:m="http://schemas.openxmlformats.org/officeDocument/2006/math">
-                    <m:r>
-                      <a:rPr lang="nl-NL" b="0" i="1" smtClean="0">
-                        <a:latin typeface="Cambria Math" panose="02040503050406030204" pitchFamily="18" charset="0"/>
-                      </a:rPr>
-                      <m:t>𝑛</m:t>
-                    </m:r>
-                  </m:oMath>
-                </a14:m>
-                <a:r>
-                  <a:rPr lang="nl-NL" dirty="0" smtClean="0"/>
-                  <a:t> vergroten?</a:t>
-                </a:r>
-              </a:p>
-              <a:p>
-                <a:pPr marL="342900" indent="-342900">
-                  <a:buFont typeface="Arial" panose="020B0604020202020204" pitchFamily="34" charset="0"/>
-                  <a:buChar char="•"/>
-                </a:pPr>
-                <a:endParaRPr lang="nl-NL" dirty="0" smtClean="0"/>
-              </a:p>
-              <a:p>
-                <a:endParaRPr lang="nl-NL" dirty="0"/>
-              </a:p>
-              <a:p>
-                <a:pPr marL="342900" indent="-342900">
-                  <a:buFont typeface="Arial" panose="020B0604020202020204" pitchFamily="34" charset="0"/>
-                  <a:buChar char="•"/>
-                </a:pPr>
-                <a:r>
-                  <a:rPr lang="nl-NL" dirty="0" smtClean="0"/>
-                  <a:t>Wat gebeurt er als we het aantal steekproeven van grootte </a:t>
-                </a:r>
-                <a14:m>
-                  <m:oMath xmlns:m="http://schemas.openxmlformats.org/officeDocument/2006/math">
-                    <m:r>
-                      <a:rPr lang="nl-NL" b="0" i="1" smtClean="0">
-                        <a:latin typeface="Cambria Math" panose="02040503050406030204" pitchFamily="18" charset="0"/>
-                      </a:rPr>
-                      <m:t>𝑛</m:t>
-                    </m:r>
-                  </m:oMath>
-                </a14:m>
-                <a:r>
-                  <a:rPr lang="nl-NL" dirty="0" smtClean="0"/>
-                  <a:t> vergroten?</a:t>
-                </a:r>
-              </a:p>
-              <a:p>
-                <a:endParaRPr lang="nl-NL" dirty="0" smtClean="0"/>
-              </a:p>
-              <a:p>
-                <a:pPr marL="342900" indent="-342900">
-                  <a:buFont typeface="Arial" panose="020B0604020202020204" pitchFamily="34" charset="0"/>
-                  <a:buChar char="•"/>
-                </a:pPr>
-                <a:endParaRPr lang="nl-NL" dirty="0"/>
-              </a:p>
-              <a:p>
-                <a:pPr marL="342900" indent="-342900">
-                  <a:buFont typeface="Arial" panose="020B0604020202020204" pitchFamily="34" charset="0"/>
-                  <a:buChar char="•"/>
-                </a:pPr>
-                <a:r>
-                  <a:rPr lang="nl-NL" dirty="0" smtClean="0"/>
-                  <a:t>Maakt het uit wat de originele kansverdeling is de </a:t>
-                </a:r>
-                <a:r>
-                  <a:rPr lang="nl-NL" dirty="0" err="1" smtClean="0"/>
-                  <a:t>kansvariabelen</a:t>
-                </a:r>
-                <a:r>
-                  <a:rPr lang="nl-NL" dirty="0" smtClean="0"/>
-                  <a:t>?</a:t>
-                </a:r>
-              </a:p>
-              <a:p>
-                <a:pPr algn="ctr"/>
-                <a:endParaRPr lang="nl-NL" b="1" dirty="0" smtClean="0">
-                  <a:hlinkClick r:id="rId2"/>
-                </a:endParaRPr>
-              </a:p>
-              <a:p>
-                <a:pPr algn="ctr"/>
-                <a:endParaRPr lang="nl-NL" b="1" dirty="0">
-                  <a:hlinkClick r:id="rId2"/>
-                </a:endParaRPr>
-              </a:p>
-              <a:p>
-                <a:pPr algn="ctr"/>
-                <a:endParaRPr lang="nl-NL" b="1" dirty="0" smtClean="0">
-                  <a:hlinkClick r:id="rId2"/>
-                </a:endParaRPr>
-              </a:p>
-              <a:p>
-                <a:pPr algn="ctr"/>
-                <a:r>
-                  <a:rPr lang="nl-NL" b="1" dirty="0" smtClean="0">
-                    <a:hlinkClick r:id="rId2"/>
-                  </a:rPr>
-                  <a:t>https</a:t>
-                </a:r>
-                <a:r>
-                  <a:rPr lang="nl-NL" b="1" dirty="0">
-                    <a:hlinkClick r:id="rId2"/>
-                  </a:rPr>
-                  <a:t>://interactive-cls.streamlit.app</a:t>
-                </a:r>
-                <a:endParaRPr lang="nl-NL" b="1" dirty="0"/>
-              </a:p>
-            </p:txBody>
-          </p:sp>
-        </mc:Choice>
-        <mc:Fallback>
-          <p:sp>
-            <p:nvSpPr>
-              <p:cNvPr id="2" name="Tijdelijke aanduiding voor inhoud 1"/>
-              <p:cNvSpPr>
-                <a:spLocks noGrp="1" noRot="1" noChangeAspect="1" noMove="1" noResize="1" noEditPoints="1" noAdjustHandles="1" noChangeArrowheads="1" noChangeShapeType="1" noTextEdit="1"/>
-              </p:cNvSpPr>
-              <p:nvPr>
-                <p:ph idx="1"/>
-              </p:nvPr>
-            </p:nvSpPr>
-            <p:spPr>
-              <a:blipFill>
-                <a:blip r:embed="rId3"/>
-                <a:stretch>
-                  <a:fillRect l="-1529" b="-3013"/>
-                </a:stretch>
-              </a:blipFill>
-            </p:spPr>
-            <p:txBody>
-              <a:bodyPr/>
-              <a:lstStyle/>
-              <a:p>
-                <a:r>
-                  <a:rPr lang="nl-NL">
-                    <a:noFill/>
-                  </a:rPr>
-                  <a:t> </a:t>
-                </a:r>
-              </a:p>
-            </p:txBody>
-          </p:sp>
-        </mc:Fallback>
-      </mc:AlternateContent>
-    </p:spTree>
-    <p:extLst>
-      <p:ext uri="{BB962C8B-B14F-4D97-AF65-F5344CB8AC3E}">
-        <p14:creationId xmlns:p14="http://schemas.microsoft.com/office/powerpoint/2010/main" val="2263666321"/>
       </p:ext>
     </p:extLst>
   </p:cSld>
